--- a/slides/pptx/week-10.pptx
+++ b/slides/pptx/week-10.pptx
@@ -12,9 +12,10 @@
     <p:sldId id="260" r:id="rId6"/>
     <p:sldId id="261" r:id="rId7"/>
     <p:sldId id="262" r:id="rId8"/>
+    <p:sldId id="263" r:id="rId9"/>
   </p:sldIdLst>
   <p:notesMasterIdLst>
-    <p:notesMasterId r:id="rId9"/>
+    <p:notesMasterId r:id="rId10"/>
   </p:notesMasterIdLst>
   <p:sldSz cx="12191695" cy="6858000"/>
   <p:notesSz cx="6858000" cy="12191695"/>
@@ -1078,6 +1079,94 @@
 </p:notes>
 </file>
 
+<file path=ppt/notesSlides/notesSlide8.xml><?xml version="1.0" encoding="utf-8"?>
+<p:notes xmlns:a="http://schemas.openxmlformats.org/drawingml/2006/main" xmlns:r="http://schemas.openxmlformats.org/officeDocument/2006/relationships" xmlns:p="http://schemas.openxmlformats.org/presentationml/2006/main">
+  <p:cSld>
+    <p:spTree>
+      <p:nvGrpSpPr>
+        <p:cNvPr id="1" name=""/>
+        <p:cNvGrpSpPr/>
+        <p:nvPr/>
+      </p:nvGrpSpPr>
+      <p:grpSpPr>
+        <a:xfrm>
+          <a:off x="0" y="0"/>
+          <a:ext cx="0" cy="0"/>
+          <a:chOff x="0" y="0"/>
+          <a:chExt cx="0" cy="0"/>
+        </a:xfrm>
+      </p:grpSpPr>
+      <p:sp>
+        <p:nvSpPr>
+          <p:cNvPr id="2" name="Slide Image Placeholder 1"/>
+          <p:cNvSpPr>
+            <a:spLocks noGrp="1" noRot="1" noChangeAspect="1"/>
+          </p:cNvSpPr>
+          <p:nvPr>
+            <p:ph type="sldImg"/>
+          </p:nvPr>
+        </p:nvSpPr>
+        <p:spPr/>
+      </p:sp>
+      <p:sp>
+        <p:nvSpPr>
+          <p:cNvPr id="3" name="Notes Placeholder 2"/>
+          <p:cNvSpPr>
+            <a:spLocks noGrp="1"/>
+          </p:cNvSpPr>
+          <p:nvPr>
+            <p:ph type="body" idx="1"/>
+          </p:nvPr>
+        </p:nvSpPr>
+        <p:spPr/>
+        <p:txBody>
+          <a:bodyPr/>
+          <a:lstStyle/>
+          <a:p>
+            <a:r>
+              <a:rPr lang="en-US" dirty="0"/>
+              <a:t/>
+            </a:r>
+            <a:endParaRPr lang="en-US" dirty="0"/>
+          </a:p>
+        </p:txBody>
+      </p:sp>
+      <p:sp>
+        <p:nvSpPr>
+          <p:cNvPr id="4" name="Slide Number Placeholder 3"/>
+          <p:cNvSpPr>
+            <a:spLocks noGrp="1"/>
+          </p:cNvSpPr>
+          <p:nvPr>
+            <p:ph type="sldNum" sz="quarter" idx="10"/>
+          </p:nvPr>
+        </p:nvSpPr>
+        <p:spPr/>
+        <p:txBody>
+          <a:bodyPr/>
+          <a:lstStyle/>
+          <a:p>
+            <a:fld id="{F7021451-1387-4CA6-816F-3879F97B5CBC}" type="slidenum">
+              <a:rPr lang="en-US"/>
+              <a:t>8</a:t>
+            </a:fld>
+            <a:endParaRPr lang="en-US"/>
+          </a:p>
+        </p:txBody>
+      </p:sp>
+    </p:spTree>
+    <p:extLst>
+      <p:ext uri="{BB962C8B-B14F-4D97-AF65-F5344CB8AC3E}">
+        <p14:creationId xmlns:p14="http://schemas.microsoft.com/office/powerpoint/2010/main" val="1024086991"/>
+      </p:ext>
+    </p:extLst>
+  </p:cSld>
+  <p:clrMapOvr>
+    <a:masterClrMapping/>
+  </p:clrMapOvr>
+</p:notes>
+</file>
+
 <file path=ppt/slideLayouts/slideLayout1.xml><?xml version="1.0" encoding="utf-8"?>
 <p:sldLayout xmlns:a="http://schemas.openxmlformats.org/drawingml/2006/main" xmlns:r="http://schemas.openxmlformats.org/officeDocument/2006/relationships" xmlns:p="http://schemas.openxmlformats.org/presentationml/2006/main" preserve="1">
   <p:cSld name="DEFAULT">
@@ -3682,6 +3771,548 @@
 <file path=ppt/slides/slide7.xml><?xml version="1.0" encoding="utf-8"?>
 <p:sld xmlns:a="http://schemas.openxmlformats.org/drawingml/2006/main" xmlns:r="http://schemas.openxmlformats.org/officeDocument/2006/relationships" xmlns:p="http://schemas.openxmlformats.org/presentationml/2006/main">
   <p:cSld name="Slide 7">
+    <p:bg>
+      <p:bgPr>
+        <a:solidFill>
+          <a:srgbClr val="FFFFFF"/>
+        </a:solidFill>
+      </p:bgPr>
+    </p:bg>
+    <p:spTree>
+      <p:nvGrpSpPr>
+        <p:cNvPr id="1" name=""/>
+        <p:cNvGrpSpPr/>
+        <p:nvPr/>
+      </p:nvGrpSpPr>
+      <p:grpSpPr>
+        <a:xfrm>
+          <a:off x="0" y="0"/>
+          <a:ext cx="0" cy="0"/>
+          <a:chOff x="0" y="0"/>
+          <a:chExt cx="0" cy="0"/>
+        </a:xfrm>
+      </p:grpSpPr>
+      <p:sp>
+        <p:nvSpPr>
+          <p:cNvPr id="2" name="Text 0"/>
+          <p:cNvSpPr/>
+          <p:nvPr/>
+        </p:nvSpPr>
+        <p:spPr>
+          <a:xfrm>
+            <a:off x="640080" y="640080"/>
+            <a:ext cx="10058400" cy="320040"/>
+          </a:xfrm>
+          <a:prstGeom prst="rect">
+            <a:avLst/>
+          </a:prstGeom>
+          <a:noFill/>
+          <a:ln/>
+        </p:spPr>
+        <p:txBody>
+          <a:bodyPr wrap="square" rtlCol="0" anchor="ctr"/>
+          <a:lstStyle/>
+          <a:p>
+            <a:pPr indent="0" marL="0">
+              <a:buNone/>
+            </a:pPr>
+            <a:r>
+              <a:rPr lang="en-US" sz="1300" b="1" spc="300" kern="0" dirty="0">
+                <a:solidFill>
+                  <a:srgbClr val="7A3B2E"/>
+                </a:solidFill>
+                <a:latin typeface="Calibri" pitchFamily="34" charset="0"/>
+                <a:ea typeface="Calibri" pitchFamily="34" charset="-122"/>
+                <a:cs typeface="Calibri" pitchFamily="34" charset="-120"/>
+              </a:rPr>
+              <a:t>HOW THIS WEEK CONNECTS</a:t>
+            </a:r>
+            <a:endParaRPr lang="en-US" sz="1300" dirty="0"/>
+          </a:p>
+        </p:txBody>
+      </p:sp>
+      <p:sp>
+        <p:nvSpPr>
+          <p:cNvPr id="3" name="Text 1"/>
+          <p:cNvSpPr/>
+          <p:nvPr/>
+        </p:nvSpPr>
+        <p:spPr>
+          <a:xfrm>
+            <a:off x="640080" y="987552"/>
+            <a:ext cx="10058400" cy="640080"/>
+          </a:xfrm>
+          <a:prstGeom prst="rect">
+            <a:avLst/>
+          </a:prstGeom>
+          <a:noFill/>
+          <a:ln/>
+        </p:spPr>
+        <p:txBody>
+          <a:bodyPr wrap="square" rtlCol="0" anchor="ctr"/>
+          <a:lstStyle/>
+          <a:p>
+            <a:pPr indent="0" marL="0">
+              <a:buNone/>
+            </a:pPr>
+            <a:r>
+              <a:rPr lang="en-US" sz="2800" b="1" dirty="0">
+                <a:solidFill>
+                  <a:srgbClr val="1A1A1A"/>
+                </a:solidFill>
+                <a:latin typeface="Cambria" pitchFamily="34" charset="0"/>
+                <a:ea typeface="Cambria" pitchFamily="34" charset="-122"/>
+                <a:cs typeface="Cambria" pitchFamily="34" charset="-120"/>
+              </a:rPr>
+              <a:t>The course's through-lines</a:t>
+            </a:r>
+            <a:endParaRPr lang="en-US" sz="2800" dirty="0"/>
+          </a:p>
+        </p:txBody>
+      </p:sp>
+      <p:sp>
+        <p:nvSpPr>
+          <p:cNvPr id="4" name="Shape 2"/>
+          <p:cNvSpPr/>
+          <p:nvPr/>
+        </p:nvSpPr>
+        <p:spPr>
+          <a:xfrm>
+            <a:off x="640080" y="2057400"/>
+            <a:ext cx="457200" cy="457200"/>
+          </a:xfrm>
+          <a:prstGeom prst="roundRect">
+            <a:avLst>
+              <a:gd name="adj" fmla="val 16000"/>
+            </a:avLst>
+          </a:prstGeom>
+          <a:solidFill>
+            <a:srgbClr val="7A3B2E"/>
+          </a:solidFill>
+          <a:ln/>
+        </p:spPr>
+      </p:sp>
+      <p:sp>
+        <p:nvSpPr>
+          <p:cNvPr id="5" name="Text 3"/>
+          <p:cNvSpPr/>
+          <p:nvPr/>
+        </p:nvSpPr>
+        <p:spPr>
+          <a:xfrm>
+            <a:off x="640080" y="2057400"/>
+            <a:ext cx="457200" cy="457200"/>
+          </a:xfrm>
+          <a:prstGeom prst="rect">
+            <a:avLst/>
+          </a:prstGeom>
+          <a:noFill/>
+          <a:ln/>
+        </p:spPr>
+        <p:txBody>
+          <a:bodyPr wrap="square" rtlCol="0" anchor="ctr"/>
+          <a:lstStyle/>
+          <a:p>
+            <a:pPr algn="ctr" indent="0" marL="0">
+              <a:buNone/>
+            </a:pPr>
+            <a:r>
+              <a:rPr lang="en-US" sz="2000" b="1" dirty="0">
+                <a:solidFill>
+                  <a:srgbClr val="FFFFFF"/>
+                </a:solidFill>
+                <a:latin typeface="Cambria" pitchFamily="34" charset="0"/>
+                <a:ea typeface="Cambria" pitchFamily="34" charset="-122"/>
+                <a:cs typeface="Cambria" pitchFamily="34" charset="-120"/>
+              </a:rPr>
+              <a:t>1</a:t>
+            </a:r>
+            <a:endParaRPr lang="en-US" sz="2000" dirty="0"/>
+          </a:p>
+        </p:txBody>
+      </p:sp>
+      <p:sp>
+        <p:nvSpPr>
+          <p:cNvPr id="6" name="Text 4"/>
+          <p:cNvSpPr/>
+          <p:nvPr/>
+        </p:nvSpPr>
+        <p:spPr>
+          <a:xfrm>
+            <a:off x="1371600" y="2020824"/>
+            <a:ext cx="10332720" cy="411480"/>
+          </a:xfrm>
+          <a:prstGeom prst="rect">
+            <a:avLst/>
+          </a:prstGeom>
+          <a:noFill/>
+          <a:ln/>
+        </p:spPr>
+        <p:txBody>
+          <a:bodyPr wrap="square" rtlCol="0" anchor="ctr"/>
+          <a:lstStyle/>
+          <a:p>
+            <a:pPr indent="0" marL="0">
+              <a:buNone/>
+            </a:pPr>
+            <a:r>
+              <a:rPr lang="en-US" sz="1900" b="1" dirty="0">
+                <a:solidFill>
+                  <a:srgbClr val="7A3B2E"/>
+                </a:solidFill>
+                <a:latin typeface="Cambria" pitchFamily="34" charset="0"/>
+                <a:ea typeface="Cambria" pitchFamily="34" charset="-122"/>
+                <a:cs typeface="Cambria" pitchFamily="34" charset="-120"/>
+              </a:rPr>
+              <a:t>Whose data, whose authorship</a:t>
+            </a:r>
+            <a:endParaRPr lang="en-US" sz="1900" dirty="0"/>
+          </a:p>
+        </p:txBody>
+      </p:sp>
+      <p:sp>
+        <p:nvSpPr>
+          <p:cNvPr id="7" name="Text 5"/>
+          <p:cNvSpPr/>
+          <p:nvPr/>
+        </p:nvSpPr>
+        <p:spPr>
+          <a:xfrm>
+            <a:off x="1371600" y="2441448"/>
+            <a:ext cx="10332720" cy="914400"/>
+          </a:xfrm>
+          <a:prstGeom prst="rect">
+            <a:avLst/>
+          </a:prstGeom>
+          <a:noFill/>
+          <a:ln/>
+        </p:spPr>
+        <p:txBody>
+          <a:bodyPr wrap="square" rtlCol="0" anchor="t">
+            <a:spAutoFit/>
+          </a:bodyPr>
+          <a:lstStyle/>
+          <a:p>
+            <a:pPr indent="0" marL="0">
+              <a:lnSpc>
+                <a:spcPct val="112000"/>
+              </a:lnSpc>
+              <a:buNone/>
+            </a:pPr>
+            <a:r>
+              <a:rPr lang="en-US" sz="1450" dirty="0">
+                <a:solidFill>
+                  <a:srgbClr val="1A1A1A"/>
+                </a:solidFill>
+                <a:latin typeface="Calibri" pitchFamily="34" charset="0"/>
+                <a:ea typeface="Calibri" pitchFamily="34" charset="-122"/>
+                <a:cs typeface="Calibri" pitchFamily="34" charset="-120"/>
+              </a:rPr>
+              <a:t>The art triptych, de Belamy to Ridler to Anadol: who decided what went in?</a:t>
+            </a:r>
+            <a:endParaRPr lang="en-US" sz="1450" dirty="0"/>
+          </a:p>
+        </p:txBody>
+      </p:sp>
+      <p:sp>
+        <p:nvSpPr>
+          <p:cNvPr id="8" name="Shape 6"/>
+          <p:cNvSpPr/>
+          <p:nvPr/>
+        </p:nvSpPr>
+        <p:spPr>
+          <a:xfrm>
+            <a:off x="640080" y="3520440"/>
+            <a:ext cx="457200" cy="457200"/>
+          </a:xfrm>
+          <a:prstGeom prst="roundRect">
+            <a:avLst>
+              <a:gd name="adj" fmla="val 16000"/>
+            </a:avLst>
+          </a:prstGeom>
+          <a:solidFill>
+            <a:srgbClr val="3F6F5F"/>
+          </a:solidFill>
+          <a:ln/>
+        </p:spPr>
+      </p:sp>
+      <p:sp>
+        <p:nvSpPr>
+          <p:cNvPr id="9" name="Text 7"/>
+          <p:cNvSpPr/>
+          <p:nvPr/>
+        </p:nvSpPr>
+        <p:spPr>
+          <a:xfrm>
+            <a:off x="640080" y="3520440"/>
+            <a:ext cx="457200" cy="457200"/>
+          </a:xfrm>
+          <a:prstGeom prst="rect">
+            <a:avLst/>
+          </a:prstGeom>
+          <a:noFill/>
+          <a:ln/>
+        </p:spPr>
+        <p:txBody>
+          <a:bodyPr wrap="square" rtlCol="0" anchor="ctr"/>
+          <a:lstStyle/>
+          <a:p>
+            <a:pPr algn="ctr" indent="0" marL="0">
+              <a:buNone/>
+            </a:pPr>
+            <a:r>
+              <a:rPr lang="en-US" sz="2000" b="1" dirty="0">
+                <a:solidFill>
+                  <a:srgbClr val="FFFFFF"/>
+                </a:solidFill>
+                <a:latin typeface="Cambria" pitchFamily="34" charset="0"/>
+                <a:ea typeface="Cambria" pitchFamily="34" charset="-122"/>
+                <a:cs typeface="Cambria" pitchFamily="34" charset="-120"/>
+              </a:rPr>
+              <a:t>2</a:t>
+            </a:r>
+            <a:endParaRPr lang="en-US" sz="2000" dirty="0"/>
+          </a:p>
+        </p:txBody>
+      </p:sp>
+      <p:sp>
+        <p:nvSpPr>
+          <p:cNvPr id="10" name="Text 8"/>
+          <p:cNvSpPr/>
+          <p:nvPr/>
+        </p:nvSpPr>
+        <p:spPr>
+          <a:xfrm>
+            <a:off x="1371600" y="3483864"/>
+            <a:ext cx="10332720" cy="411480"/>
+          </a:xfrm>
+          <a:prstGeom prst="rect">
+            <a:avLst/>
+          </a:prstGeom>
+          <a:noFill/>
+          <a:ln/>
+        </p:spPr>
+        <p:txBody>
+          <a:bodyPr wrap="square" rtlCol="0" anchor="ctr"/>
+          <a:lstStyle/>
+          <a:p>
+            <a:pPr indent="0" marL="0">
+              <a:buNone/>
+            </a:pPr>
+            <a:r>
+              <a:rPr lang="en-US" sz="1900" b="1" dirty="0">
+                <a:solidFill>
+                  <a:srgbClr val="3F6F5F"/>
+                </a:solidFill>
+                <a:latin typeface="Cambria" pitchFamily="34" charset="0"/>
+                <a:ea typeface="Cambria" pitchFamily="34" charset="-122"/>
+                <a:cs typeface="Cambria" pitchFamily="34" charset="-120"/>
+              </a:rPr>
+              <a:t>Understand, not commission</a:t>
+            </a:r>
+            <a:endParaRPr lang="en-US" sz="1900" dirty="0"/>
+          </a:p>
+        </p:txBody>
+      </p:sp>
+      <p:sp>
+        <p:nvSpPr>
+          <p:cNvPr id="11" name="Text 9"/>
+          <p:cNvSpPr/>
+          <p:nvPr/>
+        </p:nvSpPr>
+        <p:spPr>
+          <a:xfrm>
+            <a:off x="1371600" y="3904488"/>
+            <a:ext cx="10332720" cy="914400"/>
+          </a:xfrm>
+          <a:prstGeom prst="rect">
+            <a:avLst/>
+          </a:prstGeom>
+          <a:noFill/>
+          <a:ln/>
+        </p:spPr>
+        <p:txBody>
+          <a:bodyPr wrap="square" rtlCol="0" anchor="t">
+            <a:spAutoFit/>
+          </a:bodyPr>
+          <a:lstStyle/>
+          <a:p>
+            <a:pPr indent="0" marL="0">
+              <a:lnSpc>
+                <a:spcPct val="112000"/>
+              </a:lnSpc>
+              <a:buNone/>
+            </a:pPr>
+            <a:r>
+              <a:rPr lang="en-US" sz="1450" dirty="0">
+                <a:solidFill>
+                  <a:srgbClr val="1A1A1A"/>
+                </a:solidFill>
+                <a:latin typeface="Calibri" pitchFamily="34" charset="0"/>
+                <a:ea typeface="Calibri" pitchFamily="34" charset="-122"/>
+                <a:cs typeface="Calibri" pitchFamily="34" charset="-120"/>
+              </a:rPr>
+              <a:t>The oral walkthrough an AI cannot do for you.</a:t>
+            </a:r>
+            <a:endParaRPr lang="en-US" sz="1450" dirty="0"/>
+          </a:p>
+        </p:txBody>
+      </p:sp>
+      <p:sp>
+        <p:nvSpPr>
+          <p:cNvPr id="12" name="Shape 10"/>
+          <p:cNvSpPr/>
+          <p:nvPr/>
+        </p:nvSpPr>
+        <p:spPr>
+          <a:xfrm>
+            <a:off x="640080" y="4983480"/>
+            <a:ext cx="457200" cy="457200"/>
+          </a:xfrm>
+          <a:prstGeom prst="roundRect">
+            <a:avLst>
+              <a:gd name="adj" fmla="val 16000"/>
+            </a:avLst>
+          </a:prstGeom>
+          <a:solidFill>
+            <a:srgbClr val="B9852F"/>
+          </a:solidFill>
+          <a:ln/>
+        </p:spPr>
+      </p:sp>
+      <p:sp>
+        <p:nvSpPr>
+          <p:cNvPr id="13" name="Text 11"/>
+          <p:cNvSpPr/>
+          <p:nvPr/>
+        </p:nvSpPr>
+        <p:spPr>
+          <a:xfrm>
+            <a:off x="640080" y="4983480"/>
+            <a:ext cx="457200" cy="457200"/>
+          </a:xfrm>
+          <a:prstGeom prst="rect">
+            <a:avLst/>
+          </a:prstGeom>
+          <a:noFill/>
+          <a:ln/>
+        </p:spPr>
+        <p:txBody>
+          <a:bodyPr wrap="square" rtlCol="0" anchor="ctr"/>
+          <a:lstStyle/>
+          <a:p>
+            <a:pPr algn="ctr" indent="0" marL="0">
+              <a:buNone/>
+            </a:pPr>
+            <a:r>
+              <a:rPr lang="en-US" sz="2000" b="1" dirty="0">
+                <a:solidFill>
+                  <a:srgbClr val="FFFFFF"/>
+                </a:solidFill>
+                <a:latin typeface="Cambria" pitchFamily="34" charset="0"/>
+                <a:ea typeface="Cambria" pitchFamily="34" charset="-122"/>
+                <a:cs typeface="Cambria" pitchFamily="34" charset="-120"/>
+              </a:rPr>
+              <a:t>3</a:t>
+            </a:r>
+            <a:endParaRPr lang="en-US" sz="2000" dirty="0"/>
+          </a:p>
+        </p:txBody>
+      </p:sp>
+      <p:sp>
+        <p:nvSpPr>
+          <p:cNvPr id="14" name="Text 12"/>
+          <p:cNvSpPr/>
+          <p:nvPr/>
+        </p:nvSpPr>
+        <p:spPr>
+          <a:xfrm>
+            <a:off x="1371600" y="4946904"/>
+            <a:ext cx="10332720" cy="411480"/>
+          </a:xfrm>
+          <a:prstGeom prst="rect">
+            <a:avLst/>
+          </a:prstGeom>
+          <a:noFill/>
+          <a:ln/>
+        </p:spPr>
+        <p:txBody>
+          <a:bodyPr wrap="square" rtlCol="0" anchor="ctr"/>
+          <a:lstStyle/>
+          <a:p>
+            <a:pPr indent="0" marL="0">
+              <a:buNone/>
+            </a:pPr>
+            <a:r>
+              <a:rPr lang="en-US" sz="1900" b="1" dirty="0">
+                <a:solidFill>
+                  <a:srgbClr val="B9852F"/>
+                </a:solidFill>
+                <a:latin typeface="Cambria" pitchFamily="34" charset="0"/>
+                <a:ea typeface="Cambria" pitchFamily="34" charset="-122"/>
+                <a:cs typeface="Cambria" pitchFamily="34" charset="-120"/>
+              </a:rPr>
+              <a:t>All threads converge</a:t>
+            </a:r>
+            <a:endParaRPr lang="en-US" sz="1900" dirty="0"/>
+          </a:p>
+        </p:txBody>
+      </p:sp>
+      <p:sp>
+        <p:nvSpPr>
+          <p:cNvPr id="15" name="Text 13"/>
+          <p:cNvSpPr/>
+          <p:nvPr/>
+        </p:nvSpPr>
+        <p:spPr>
+          <a:xfrm>
+            <a:off x="1371600" y="5367528"/>
+            <a:ext cx="10332720" cy="914400"/>
+          </a:xfrm>
+          <a:prstGeom prst="rect">
+            <a:avLst/>
+          </a:prstGeom>
+          <a:noFill/>
+          <a:ln/>
+        </p:spPr>
+        <p:txBody>
+          <a:bodyPr wrap="square" rtlCol="0" anchor="t">
+            <a:spAutoFit/>
+          </a:bodyPr>
+          <a:lstStyle/>
+          <a:p>
+            <a:pPr indent="0" marL="0">
+              <a:lnSpc>
+                <a:spcPct val="112000"/>
+              </a:lnSpc>
+              <a:buNone/>
+            </a:pPr>
+            <a:r>
+              <a:rPr lang="en-US" sz="1450" dirty="0">
+                <a:solidFill>
+                  <a:srgbClr val="1A1A1A"/>
+                </a:solidFill>
+                <a:latin typeface="Calibri" pitchFamily="34" charset="0"/>
+                <a:ea typeface="Calibri" pitchFamily="34" charset="-122"/>
+                <a:cs typeface="Calibri" pitchFamily="34" charset="-120"/>
+              </a:rPr>
+              <a:t>You started loading a museum's data; you end watching it become the art.</a:t>
+            </a:r>
+            <a:endParaRPr lang="en-US" sz="1450" dirty="0"/>
+          </a:p>
+        </p:txBody>
+      </p:sp>
+    </p:spTree>
+  </p:cSld>
+  <p:clrMapOvr>
+    <a:masterClrMapping/>
+  </p:clrMapOvr>
+</p:sld>
+</file>
+
+<file path=ppt/slides/slide8.xml><?xml version="1.0" encoding="utf-8"?>
+<p:sld xmlns:a="http://schemas.openxmlformats.org/drawingml/2006/main" xmlns:r="http://schemas.openxmlformats.org/officeDocument/2006/relationships" xmlns:p="http://schemas.openxmlformats.org/presentationml/2006/main">
+  <p:cSld name="Slide 8">
     <p:bg>
       <p:bgPr>
         <a:solidFill>

--- a/slides/pptx/week-10.pptx
+++ b/slides/pptx/week-10.pptx
@@ -13,9 +13,12 @@
     <p:sldId id="261" r:id="rId7"/>
     <p:sldId id="262" r:id="rId8"/>
     <p:sldId id="263" r:id="rId9"/>
+    <p:sldId id="264" r:id="rId10"/>
+    <p:sldId id="265" r:id="rId11"/>
+    <p:sldId id="266" r:id="rId12"/>
   </p:sldIdLst>
   <p:notesMasterIdLst>
-    <p:notesMasterId r:id="rId10"/>
+    <p:notesMasterId r:id="rId13"/>
   </p:notesMasterIdLst>
   <p:sldSz cx="12191695" cy="6858000"/>
   <p:notesSz cx="6858000" cy="12191695"/>
@@ -551,6 +554,182 @@
 </p:notes>
 </file>
 
+<file path=ppt/notesSlides/notesSlide10.xml><?xml version="1.0" encoding="utf-8"?>
+<p:notes xmlns:a="http://schemas.openxmlformats.org/drawingml/2006/main" xmlns:r="http://schemas.openxmlformats.org/officeDocument/2006/relationships" xmlns:p="http://schemas.openxmlformats.org/presentationml/2006/main">
+  <p:cSld>
+    <p:spTree>
+      <p:nvGrpSpPr>
+        <p:cNvPr id="1" name=""/>
+        <p:cNvGrpSpPr/>
+        <p:nvPr/>
+      </p:nvGrpSpPr>
+      <p:grpSpPr>
+        <a:xfrm>
+          <a:off x="0" y="0"/>
+          <a:ext cx="0" cy="0"/>
+          <a:chOff x="0" y="0"/>
+          <a:chExt cx="0" cy="0"/>
+        </a:xfrm>
+      </p:grpSpPr>
+      <p:sp>
+        <p:nvSpPr>
+          <p:cNvPr id="2" name="Slide Image Placeholder 1"/>
+          <p:cNvSpPr>
+            <a:spLocks noGrp="1" noRot="1" noChangeAspect="1"/>
+          </p:cNvSpPr>
+          <p:nvPr>
+            <p:ph type="sldImg"/>
+          </p:nvPr>
+        </p:nvSpPr>
+        <p:spPr/>
+      </p:sp>
+      <p:sp>
+        <p:nvSpPr>
+          <p:cNvPr id="3" name="Notes Placeholder 2"/>
+          <p:cNvSpPr>
+            <a:spLocks noGrp="1"/>
+          </p:cNvSpPr>
+          <p:nvPr>
+            <p:ph type="body" idx="1"/>
+          </p:nvPr>
+        </p:nvSpPr>
+        <p:spPr/>
+        <p:txBody>
+          <a:bodyPr/>
+          <a:lstStyle/>
+          <a:p>
+            <a:r>
+              <a:rPr lang="en-US" dirty="0"/>
+              <a:t/>
+            </a:r>
+            <a:endParaRPr lang="en-US" dirty="0"/>
+          </a:p>
+        </p:txBody>
+      </p:sp>
+      <p:sp>
+        <p:nvSpPr>
+          <p:cNvPr id="4" name="Slide Number Placeholder 3"/>
+          <p:cNvSpPr>
+            <a:spLocks noGrp="1"/>
+          </p:cNvSpPr>
+          <p:nvPr>
+            <p:ph type="sldNum" sz="quarter" idx="10"/>
+          </p:nvPr>
+        </p:nvSpPr>
+        <p:spPr/>
+        <p:txBody>
+          <a:bodyPr/>
+          <a:lstStyle/>
+          <a:p>
+            <a:fld id="{F7021451-1387-4CA6-816F-3879F97B5CBC}" type="slidenum">
+              <a:rPr lang="en-US"/>
+              <a:t>10</a:t>
+            </a:fld>
+            <a:endParaRPr lang="en-US"/>
+          </a:p>
+        </p:txBody>
+      </p:sp>
+    </p:spTree>
+    <p:extLst>
+      <p:ext uri="{BB962C8B-B14F-4D97-AF65-F5344CB8AC3E}">
+        <p14:creationId xmlns:p14="http://schemas.microsoft.com/office/powerpoint/2010/main" val="1024086991"/>
+      </p:ext>
+    </p:extLst>
+  </p:cSld>
+  <p:clrMapOvr>
+    <a:masterClrMapping/>
+  </p:clrMapOvr>
+</p:notes>
+</file>
+
+<file path=ppt/notesSlides/notesSlide11.xml><?xml version="1.0" encoding="utf-8"?>
+<p:notes xmlns:a="http://schemas.openxmlformats.org/drawingml/2006/main" xmlns:r="http://schemas.openxmlformats.org/officeDocument/2006/relationships" xmlns:p="http://schemas.openxmlformats.org/presentationml/2006/main">
+  <p:cSld>
+    <p:spTree>
+      <p:nvGrpSpPr>
+        <p:cNvPr id="1" name=""/>
+        <p:cNvGrpSpPr/>
+        <p:nvPr/>
+      </p:nvGrpSpPr>
+      <p:grpSpPr>
+        <a:xfrm>
+          <a:off x="0" y="0"/>
+          <a:ext cx="0" cy="0"/>
+          <a:chOff x="0" y="0"/>
+          <a:chExt cx="0" cy="0"/>
+        </a:xfrm>
+      </p:grpSpPr>
+      <p:sp>
+        <p:nvSpPr>
+          <p:cNvPr id="2" name="Slide Image Placeholder 1"/>
+          <p:cNvSpPr>
+            <a:spLocks noGrp="1" noRot="1" noChangeAspect="1"/>
+          </p:cNvSpPr>
+          <p:nvPr>
+            <p:ph type="sldImg"/>
+          </p:nvPr>
+        </p:nvSpPr>
+        <p:spPr/>
+      </p:sp>
+      <p:sp>
+        <p:nvSpPr>
+          <p:cNvPr id="3" name="Notes Placeholder 2"/>
+          <p:cNvSpPr>
+            <a:spLocks noGrp="1"/>
+          </p:cNvSpPr>
+          <p:nvPr>
+            <p:ph type="body" idx="1"/>
+          </p:nvPr>
+        </p:nvSpPr>
+        <p:spPr/>
+        <p:txBody>
+          <a:bodyPr/>
+          <a:lstStyle/>
+          <a:p>
+            <a:r>
+              <a:rPr lang="en-US" dirty="0"/>
+              <a:t/>
+            </a:r>
+            <a:endParaRPr lang="en-US" dirty="0"/>
+          </a:p>
+        </p:txBody>
+      </p:sp>
+      <p:sp>
+        <p:nvSpPr>
+          <p:cNvPr id="4" name="Slide Number Placeholder 3"/>
+          <p:cNvSpPr>
+            <a:spLocks noGrp="1"/>
+          </p:cNvSpPr>
+          <p:nvPr>
+            <p:ph type="sldNum" sz="quarter" idx="10"/>
+          </p:nvPr>
+        </p:nvSpPr>
+        <p:spPr/>
+        <p:txBody>
+          <a:bodyPr/>
+          <a:lstStyle/>
+          <a:p>
+            <a:fld id="{F7021451-1387-4CA6-816F-3879F97B5CBC}" type="slidenum">
+              <a:rPr lang="en-US"/>
+              <a:t>11</a:t>
+            </a:fld>
+            <a:endParaRPr lang="en-US"/>
+          </a:p>
+        </p:txBody>
+      </p:sp>
+    </p:spTree>
+    <p:extLst>
+      <p:ext uri="{BB962C8B-B14F-4D97-AF65-F5344CB8AC3E}">
+        <p14:creationId xmlns:p14="http://schemas.microsoft.com/office/powerpoint/2010/main" val="1024086991"/>
+      </p:ext>
+    </p:extLst>
+  </p:cSld>
+  <p:clrMapOvr>
+    <a:masterClrMapping/>
+  </p:clrMapOvr>
+</p:notes>
+</file>
+
 <file path=ppt/notesSlides/notesSlide2.xml><?xml version="1.0" encoding="utf-8"?>
 <p:notes xmlns:a="http://schemas.openxmlformats.org/drawingml/2006/main" xmlns:r="http://schemas.openxmlformats.org/officeDocument/2006/relationships" xmlns:p="http://schemas.openxmlformats.org/presentationml/2006/main">
   <p:cSld>
@@ -1149,6 +1328,94 @@
             <a:fld id="{F7021451-1387-4CA6-816F-3879F97B5CBC}" type="slidenum">
               <a:rPr lang="en-US"/>
               <a:t>8</a:t>
+            </a:fld>
+            <a:endParaRPr lang="en-US"/>
+          </a:p>
+        </p:txBody>
+      </p:sp>
+    </p:spTree>
+    <p:extLst>
+      <p:ext uri="{BB962C8B-B14F-4D97-AF65-F5344CB8AC3E}">
+        <p14:creationId xmlns:p14="http://schemas.microsoft.com/office/powerpoint/2010/main" val="1024086991"/>
+      </p:ext>
+    </p:extLst>
+  </p:cSld>
+  <p:clrMapOvr>
+    <a:masterClrMapping/>
+  </p:clrMapOvr>
+</p:notes>
+</file>
+
+<file path=ppt/notesSlides/notesSlide9.xml><?xml version="1.0" encoding="utf-8"?>
+<p:notes xmlns:a="http://schemas.openxmlformats.org/drawingml/2006/main" xmlns:r="http://schemas.openxmlformats.org/officeDocument/2006/relationships" xmlns:p="http://schemas.openxmlformats.org/presentationml/2006/main">
+  <p:cSld>
+    <p:spTree>
+      <p:nvGrpSpPr>
+        <p:cNvPr id="1" name=""/>
+        <p:cNvGrpSpPr/>
+        <p:nvPr/>
+      </p:nvGrpSpPr>
+      <p:grpSpPr>
+        <a:xfrm>
+          <a:off x="0" y="0"/>
+          <a:ext cx="0" cy="0"/>
+          <a:chOff x="0" y="0"/>
+          <a:chExt cx="0" cy="0"/>
+        </a:xfrm>
+      </p:grpSpPr>
+      <p:sp>
+        <p:nvSpPr>
+          <p:cNvPr id="2" name="Slide Image Placeholder 1"/>
+          <p:cNvSpPr>
+            <a:spLocks noGrp="1" noRot="1" noChangeAspect="1"/>
+          </p:cNvSpPr>
+          <p:nvPr>
+            <p:ph type="sldImg"/>
+          </p:nvPr>
+        </p:nvSpPr>
+        <p:spPr/>
+      </p:sp>
+      <p:sp>
+        <p:nvSpPr>
+          <p:cNvPr id="3" name="Notes Placeholder 2"/>
+          <p:cNvSpPr>
+            <a:spLocks noGrp="1"/>
+          </p:cNvSpPr>
+          <p:nvPr>
+            <p:ph type="body" idx="1"/>
+          </p:nvPr>
+        </p:nvSpPr>
+        <p:spPr/>
+        <p:txBody>
+          <a:bodyPr/>
+          <a:lstStyle/>
+          <a:p>
+            <a:r>
+              <a:rPr lang="en-US" dirty="0"/>
+              <a:t/>
+            </a:r>
+            <a:endParaRPr lang="en-US" dirty="0"/>
+          </a:p>
+        </p:txBody>
+      </p:sp>
+      <p:sp>
+        <p:nvSpPr>
+          <p:cNvPr id="4" name="Slide Number Placeholder 3"/>
+          <p:cNvSpPr>
+            <a:spLocks noGrp="1"/>
+          </p:cNvSpPr>
+          <p:nvPr>
+            <p:ph type="sldNum" sz="quarter" idx="10"/>
+          </p:nvPr>
+        </p:nvSpPr>
+        <p:spPr/>
+        <p:txBody>
+          <a:bodyPr/>
+          <a:lstStyle/>
+          <a:p>
+            <a:fld id="{F7021451-1387-4CA6-816F-3879F97B5CBC}" type="slidenum">
+              <a:rPr lang="en-US"/>
+              <a:t>9</a:t>
             </a:fld>
             <a:endParaRPr lang="en-US"/>
           </a:p>
@@ -2025,6 +2292,982 @@
 </p:sld>
 </file>
 
+<file path=ppt/slides/slide10.xml><?xml version="1.0" encoding="utf-8"?>
+<p:sld xmlns:a="http://schemas.openxmlformats.org/drawingml/2006/main" xmlns:r="http://schemas.openxmlformats.org/officeDocument/2006/relationships" xmlns:p="http://schemas.openxmlformats.org/presentationml/2006/main">
+  <p:cSld name="Slide 10">
+    <p:bg>
+      <p:bgPr>
+        <a:solidFill>
+          <a:srgbClr val="FFFFFF"/>
+        </a:solidFill>
+      </p:bgPr>
+    </p:bg>
+    <p:spTree>
+      <p:nvGrpSpPr>
+        <p:cNvPr id="1" name=""/>
+        <p:cNvGrpSpPr/>
+        <p:nvPr/>
+      </p:nvGrpSpPr>
+      <p:grpSpPr>
+        <a:xfrm>
+          <a:off x="0" y="0"/>
+          <a:ext cx="0" cy="0"/>
+          <a:chOff x="0" y="0"/>
+          <a:chExt cx="0" cy="0"/>
+        </a:xfrm>
+      </p:grpSpPr>
+      <p:sp>
+        <p:nvSpPr>
+          <p:cNvPr id="2" name="Text 0"/>
+          <p:cNvSpPr/>
+          <p:nvPr/>
+        </p:nvSpPr>
+        <p:spPr>
+          <a:xfrm>
+            <a:off x="640080" y="640080"/>
+            <a:ext cx="10058400" cy="320040"/>
+          </a:xfrm>
+          <a:prstGeom prst="rect">
+            <a:avLst/>
+          </a:prstGeom>
+          <a:noFill/>
+          <a:ln/>
+        </p:spPr>
+        <p:txBody>
+          <a:bodyPr wrap="square" rtlCol="0" anchor="ctr"/>
+          <a:lstStyle/>
+          <a:p>
+            <a:pPr indent="0" marL="0">
+              <a:buNone/>
+            </a:pPr>
+            <a:r>
+              <a:rPr lang="en-US" sz="1300" b="1" spc="300" kern="0" dirty="0">
+                <a:solidFill>
+                  <a:srgbClr val="7A3B2E"/>
+                </a:solidFill>
+                <a:latin typeface="Calibri" pitchFamily="34" charset="0"/>
+                <a:ea typeface="Calibri" pitchFamily="34" charset="-122"/>
+                <a:cs typeface="Calibri" pitchFamily="34" charset="-120"/>
+              </a:rPr>
+              <a:t>HOW THIS WEEK CONNECTS</a:t>
+            </a:r>
+            <a:endParaRPr lang="en-US" sz="1300" dirty="0"/>
+          </a:p>
+        </p:txBody>
+      </p:sp>
+      <p:sp>
+        <p:nvSpPr>
+          <p:cNvPr id="3" name="Text 1"/>
+          <p:cNvSpPr/>
+          <p:nvPr/>
+        </p:nvSpPr>
+        <p:spPr>
+          <a:xfrm>
+            <a:off x="640080" y="987552"/>
+            <a:ext cx="10058400" cy="640080"/>
+          </a:xfrm>
+          <a:prstGeom prst="rect">
+            <a:avLst/>
+          </a:prstGeom>
+          <a:noFill/>
+          <a:ln/>
+        </p:spPr>
+        <p:txBody>
+          <a:bodyPr wrap="square" rtlCol="0" anchor="ctr"/>
+          <a:lstStyle/>
+          <a:p>
+            <a:pPr indent="0" marL="0">
+              <a:buNone/>
+            </a:pPr>
+            <a:r>
+              <a:rPr lang="en-US" sz="2800" b="1" dirty="0">
+                <a:solidFill>
+                  <a:srgbClr val="1A1A1A"/>
+                </a:solidFill>
+                <a:latin typeface="Cambria" pitchFamily="34" charset="0"/>
+                <a:ea typeface="Cambria" pitchFamily="34" charset="-122"/>
+                <a:cs typeface="Cambria" pitchFamily="34" charset="-120"/>
+              </a:rPr>
+              <a:t>The course's through-lines</a:t>
+            </a:r>
+            <a:endParaRPr lang="en-US" sz="2800" dirty="0"/>
+          </a:p>
+        </p:txBody>
+      </p:sp>
+      <p:sp>
+        <p:nvSpPr>
+          <p:cNvPr id="4" name="Shape 2"/>
+          <p:cNvSpPr/>
+          <p:nvPr/>
+        </p:nvSpPr>
+        <p:spPr>
+          <a:xfrm>
+            <a:off x="640080" y="2057400"/>
+            <a:ext cx="457200" cy="457200"/>
+          </a:xfrm>
+          <a:prstGeom prst="roundRect">
+            <a:avLst>
+              <a:gd name="adj" fmla="val 16000"/>
+            </a:avLst>
+          </a:prstGeom>
+          <a:solidFill>
+            <a:srgbClr val="7A3B2E"/>
+          </a:solidFill>
+          <a:ln/>
+        </p:spPr>
+      </p:sp>
+      <p:sp>
+        <p:nvSpPr>
+          <p:cNvPr id="5" name="Text 3"/>
+          <p:cNvSpPr/>
+          <p:nvPr/>
+        </p:nvSpPr>
+        <p:spPr>
+          <a:xfrm>
+            <a:off x="640080" y="2057400"/>
+            <a:ext cx="457200" cy="457200"/>
+          </a:xfrm>
+          <a:prstGeom prst="rect">
+            <a:avLst/>
+          </a:prstGeom>
+          <a:noFill/>
+          <a:ln/>
+        </p:spPr>
+        <p:txBody>
+          <a:bodyPr wrap="square" rtlCol="0" anchor="ctr"/>
+          <a:lstStyle/>
+          <a:p>
+            <a:pPr algn="ctr" indent="0" marL="0">
+              <a:buNone/>
+            </a:pPr>
+            <a:r>
+              <a:rPr lang="en-US" sz="2000" b="1" dirty="0">
+                <a:solidFill>
+                  <a:srgbClr val="FFFFFF"/>
+                </a:solidFill>
+                <a:latin typeface="Cambria" pitchFamily="34" charset="0"/>
+                <a:ea typeface="Cambria" pitchFamily="34" charset="-122"/>
+                <a:cs typeface="Cambria" pitchFamily="34" charset="-120"/>
+              </a:rPr>
+              <a:t>1</a:t>
+            </a:r>
+            <a:endParaRPr lang="en-US" sz="2000" dirty="0"/>
+          </a:p>
+        </p:txBody>
+      </p:sp>
+      <p:sp>
+        <p:nvSpPr>
+          <p:cNvPr id="6" name="Text 4"/>
+          <p:cNvSpPr/>
+          <p:nvPr/>
+        </p:nvSpPr>
+        <p:spPr>
+          <a:xfrm>
+            <a:off x="1371600" y="2020824"/>
+            <a:ext cx="10332720" cy="411480"/>
+          </a:xfrm>
+          <a:prstGeom prst="rect">
+            <a:avLst/>
+          </a:prstGeom>
+          <a:noFill/>
+          <a:ln/>
+        </p:spPr>
+        <p:txBody>
+          <a:bodyPr wrap="square" rtlCol="0" anchor="ctr"/>
+          <a:lstStyle/>
+          <a:p>
+            <a:pPr indent="0" marL="0">
+              <a:buNone/>
+            </a:pPr>
+            <a:r>
+              <a:rPr lang="en-US" sz="1900" b="1" dirty="0">
+                <a:solidFill>
+                  <a:srgbClr val="7A3B2E"/>
+                </a:solidFill>
+                <a:latin typeface="Cambria" pitchFamily="34" charset="0"/>
+                <a:ea typeface="Cambria" pitchFamily="34" charset="-122"/>
+                <a:cs typeface="Cambria" pitchFamily="34" charset="-120"/>
+              </a:rPr>
+              <a:t>Whose data, whose authorship</a:t>
+            </a:r>
+            <a:endParaRPr lang="en-US" sz="1900" dirty="0"/>
+          </a:p>
+        </p:txBody>
+      </p:sp>
+      <p:sp>
+        <p:nvSpPr>
+          <p:cNvPr id="7" name="Text 5"/>
+          <p:cNvSpPr/>
+          <p:nvPr/>
+        </p:nvSpPr>
+        <p:spPr>
+          <a:xfrm>
+            <a:off x="1371600" y="2441448"/>
+            <a:ext cx="10332720" cy="914400"/>
+          </a:xfrm>
+          <a:prstGeom prst="rect">
+            <a:avLst/>
+          </a:prstGeom>
+          <a:noFill/>
+          <a:ln/>
+        </p:spPr>
+        <p:txBody>
+          <a:bodyPr wrap="square" rtlCol="0" anchor="t">
+            <a:spAutoFit/>
+          </a:bodyPr>
+          <a:lstStyle/>
+          <a:p>
+            <a:pPr indent="0" marL="0">
+              <a:lnSpc>
+                <a:spcPct val="112000"/>
+              </a:lnSpc>
+              <a:buNone/>
+            </a:pPr>
+            <a:r>
+              <a:rPr lang="en-US" sz="1450" dirty="0">
+                <a:solidFill>
+                  <a:srgbClr val="1A1A1A"/>
+                </a:solidFill>
+                <a:latin typeface="Calibri" pitchFamily="34" charset="0"/>
+                <a:ea typeface="Calibri" pitchFamily="34" charset="-122"/>
+                <a:cs typeface="Calibri" pitchFamily="34" charset="-120"/>
+              </a:rPr>
+              <a:t>The art triptych, de Belamy to Ridler to Anadol: who decided what went in?</a:t>
+            </a:r>
+            <a:endParaRPr lang="en-US" sz="1450" dirty="0"/>
+          </a:p>
+        </p:txBody>
+      </p:sp>
+      <p:sp>
+        <p:nvSpPr>
+          <p:cNvPr id="8" name="Shape 6"/>
+          <p:cNvSpPr/>
+          <p:nvPr/>
+        </p:nvSpPr>
+        <p:spPr>
+          <a:xfrm>
+            <a:off x="640080" y="3520440"/>
+            <a:ext cx="457200" cy="457200"/>
+          </a:xfrm>
+          <a:prstGeom prst="roundRect">
+            <a:avLst>
+              <a:gd name="adj" fmla="val 16000"/>
+            </a:avLst>
+          </a:prstGeom>
+          <a:solidFill>
+            <a:srgbClr val="3F6F5F"/>
+          </a:solidFill>
+          <a:ln/>
+        </p:spPr>
+      </p:sp>
+      <p:sp>
+        <p:nvSpPr>
+          <p:cNvPr id="9" name="Text 7"/>
+          <p:cNvSpPr/>
+          <p:nvPr/>
+        </p:nvSpPr>
+        <p:spPr>
+          <a:xfrm>
+            <a:off x="640080" y="3520440"/>
+            <a:ext cx="457200" cy="457200"/>
+          </a:xfrm>
+          <a:prstGeom prst="rect">
+            <a:avLst/>
+          </a:prstGeom>
+          <a:noFill/>
+          <a:ln/>
+        </p:spPr>
+        <p:txBody>
+          <a:bodyPr wrap="square" rtlCol="0" anchor="ctr"/>
+          <a:lstStyle/>
+          <a:p>
+            <a:pPr algn="ctr" indent="0" marL="0">
+              <a:buNone/>
+            </a:pPr>
+            <a:r>
+              <a:rPr lang="en-US" sz="2000" b="1" dirty="0">
+                <a:solidFill>
+                  <a:srgbClr val="FFFFFF"/>
+                </a:solidFill>
+                <a:latin typeface="Cambria" pitchFamily="34" charset="0"/>
+                <a:ea typeface="Cambria" pitchFamily="34" charset="-122"/>
+                <a:cs typeface="Cambria" pitchFamily="34" charset="-120"/>
+              </a:rPr>
+              <a:t>2</a:t>
+            </a:r>
+            <a:endParaRPr lang="en-US" sz="2000" dirty="0"/>
+          </a:p>
+        </p:txBody>
+      </p:sp>
+      <p:sp>
+        <p:nvSpPr>
+          <p:cNvPr id="10" name="Text 8"/>
+          <p:cNvSpPr/>
+          <p:nvPr/>
+        </p:nvSpPr>
+        <p:spPr>
+          <a:xfrm>
+            <a:off x="1371600" y="3483864"/>
+            <a:ext cx="10332720" cy="411480"/>
+          </a:xfrm>
+          <a:prstGeom prst="rect">
+            <a:avLst/>
+          </a:prstGeom>
+          <a:noFill/>
+          <a:ln/>
+        </p:spPr>
+        <p:txBody>
+          <a:bodyPr wrap="square" rtlCol="0" anchor="ctr"/>
+          <a:lstStyle/>
+          <a:p>
+            <a:pPr indent="0" marL="0">
+              <a:buNone/>
+            </a:pPr>
+            <a:r>
+              <a:rPr lang="en-US" sz="1900" b="1" dirty="0">
+                <a:solidFill>
+                  <a:srgbClr val="3F6F5F"/>
+                </a:solidFill>
+                <a:latin typeface="Cambria" pitchFamily="34" charset="0"/>
+                <a:ea typeface="Cambria" pitchFamily="34" charset="-122"/>
+                <a:cs typeface="Cambria" pitchFamily="34" charset="-120"/>
+              </a:rPr>
+              <a:t>Understand, not commission</a:t>
+            </a:r>
+            <a:endParaRPr lang="en-US" sz="1900" dirty="0"/>
+          </a:p>
+        </p:txBody>
+      </p:sp>
+      <p:sp>
+        <p:nvSpPr>
+          <p:cNvPr id="11" name="Text 9"/>
+          <p:cNvSpPr/>
+          <p:nvPr/>
+        </p:nvSpPr>
+        <p:spPr>
+          <a:xfrm>
+            <a:off x="1371600" y="3904488"/>
+            <a:ext cx="10332720" cy="914400"/>
+          </a:xfrm>
+          <a:prstGeom prst="rect">
+            <a:avLst/>
+          </a:prstGeom>
+          <a:noFill/>
+          <a:ln/>
+        </p:spPr>
+        <p:txBody>
+          <a:bodyPr wrap="square" rtlCol="0" anchor="t">
+            <a:spAutoFit/>
+          </a:bodyPr>
+          <a:lstStyle/>
+          <a:p>
+            <a:pPr indent="0" marL="0">
+              <a:lnSpc>
+                <a:spcPct val="112000"/>
+              </a:lnSpc>
+              <a:buNone/>
+            </a:pPr>
+            <a:r>
+              <a:rPr lang="en-US" sz="1450" dirty="0">
+                <a:solidFill>
+                  <a:srgbClr val="1A1A1A"/>
+                </a:solidFill>
+                <a:latin typeface="Calibri" pitchFamily="34" charset="0"/>
+                <a:ea typeface="Calibri" pitchFamily="34" charset="-122"/>
+                <a:cs typeface="Calibri" pitchFamily="34" charset="-120"/>
+              </a:rPr>
+              <a:t>The oral walkthrough an AI cannot do for you.</a:t>
+            </a:r>
+            <a:endParaRPr lang="en-US" sz="1450" dirty="0"/>
+          </a:p>
+        </p:txBody>
+      </p:sp>
+      <p:sp>
+        <p:nvSpPr>
+          <p:cNvPr id="12" name="Shape 10"/>
+          <p:cNvSpPr/>
+          <p:nvPr/>
+        </p:nvSpPr>
+        <p:spPr>
+          <a:xfrm>
+            <a:off x="640080" y="4983480"/>
+            <a:ext cx="457200" cy="457200"/>
+          </a:xfrm>
+          <a:prstGeom prst="roundRect">
+            <a:avLst>
+              <a:gd name="adj" fmla="val 16000"/>
+            </a:avLst>
+          </a:prstGeom>
+          <a:solidFill>
+            <a:srgbClr val="B9852F"/>
+          </a:solidFill>
+          <a:ln/>
+        </p:spPr>
+      </p:sp>
+      <p:sp>
+        <p:nvSpPr>
+          <p:cNvPr id="13" name="Text 11"/>
+          <p:cNvSpPr/>
+          <p:nvPr/>
+        </p:nvSpPr>
+        <p:spPr>
+          <a:xfrm>
+            <a:off x="640080" y="4983480"/>
+            <a:ext cx="457200" cy="457200"/>
+          </a:xfrm>
+          <a:prstGeom prst="rect">
+            <a:avLst/>
+          </a:prstGeom>
+          <a:noFill/>
+          <a:ln/>
+        </p:spPr>
+        <p:txBody>
+          <a:bodyPr wrap="square" rtlCol="0" anchor="ctr"/>
+          <a:lstStyle/>
+          <a:p>
+            <a:pPr algn="ctr" indent="0" marL="0">
+              <a:buNone/>
+            </a:pPr>
+            <a:r>
+              <a:rPr lang="en-US" sz="2000" b="1" dirty="0">
+                <a:solidFill>
+                  <a:srgbClr val="FFFFFF"/>
+                </a:solidFill>
+                <a:latin typeface="Cambria" pitchFamily="34" charset="0"/>
+                <a:ea typeface="Cambria" pitchFamily="34" charset="-122"/>
+                <a:cs typeface="Cambria" pitchFamily="34" charset="-120"/>
+              </a:rPr>
+              <a:t>3</a:t>
+            </a:r>
+            <a:endParaRPr lang="en-US" sz="2000" dirty="0"/>
+          </a:p>
+        </p:txBody>
+      </p:sp>
+      <p:sp>
+        <p:nvSpPr>
+          <p:cNvPr id="14" name="Text 12"/>
+          <p:cNvSpPr/>
+          <p:nvPr/>
+        </p:nvSpPr>
+        <p:spPr>
+          <a:xfrm>
+            <a:off x="1371600" y="4946904"/>
+            <a:ext cx="10332720" cy="411480"/>
+          </a:xfrm>
+          <a:prstGeom prst="rect">
+            <a:avLst/>
+          </a:prstGeom>
+          <a:noFill/>
+          <a:ln/>
+        </p:spPr>
+        <p:txBody>
+          <a:bodyPr wrap="square" rtlCol="0" anchor="ctr"/>
+          <a:lstStyle/>
+          <a:p>
+            <a:pPr indent="0" marL="0">
+              <a:buNone/>
+            </a:pPr>
+            <a:r>
+              <a:rPr lang="en-US" sz="1900" b="1" dirty="0">
+                <a:solidFill>
+                  <a:srgbClr val="B9852F"/>
+                </a:solidFill>
+                <a:latin typeface="Cambria" pitchFamily="34" charset="0"/>
+                <a:ea typeface="Cambria" pitchFamily="34" charset="-122"/>
+                <a:cs typeface="Cambria" pitchFamily="34" charset="-120"/>
+              </a:rPr>
+              <a:t>All threads converge</a:t>
+            </a:r>
+            <a:endParaRPr lang="en-US" sz="1900" dirty="0"/>
+          </a:p>
+        </p:txBody>
+      </p:sp>
+      <p:sp>
+        <p:nvSpPr>
+          <p:cNvPr id="15" name="Text 13"/>
+          <p:cNvSpPr/>
+          <p:nvPr/>
+        </p:nvSpPr>
+        <p:spPr>
+          <a:xfrm>
+            <a:off x="1371600" y="5367528"/>
+            <a:ext cx="10332720" cy="914400"/>
+          </a:xfrm>
+          <a:prstGeom prst="rect">
+            <a:avLst/>
+          </a:prstGeom>
+          <a:noFill/>
+          <a:ln/>
+        </p:spPr>
+        <p:txBody>
+          <a:bodyPr wrap="square" rtlCol="0" anchor="t">
+            <a:spAutoFit/>
+          </a:bodyPr>
+          <a:lstStyle/>
+          <a:p>
+            <a:pPr indent="0" marL="0">
+              <a:lnSpc>
+                <a:spcPct val="112000"/>
+              </a:lnSpc>
+              <a:buNone/>
+            </a:pPr>
+            <a:r>
+              <a:rPr lang="en-US" sz="1450" dirty="0">
+                <a:solidFill>
+                  <a:srgbClr val="1A1A1A"/>
+                </a:solidFill>
+                <a:latin typeface="Calibri" pitchFamily="34" charset="0"/>
+                <a:ea typeface="Calibri" pitchFamily="34" charset="-122"/>
+                <a:cs typeface="Calibri" pitchFamily="34" charset="-120"/>
+              </a:rPr>
+              <a:t>You started loading a museum's data; you end watching it become the art.</a:t>
+            </a:r>
+            <a:endParaRPr lang="en-US" sz="1450" dirty="0"/>
+          </a:p>
+        </p:txBody>
+      </p:sp>
+    </p:spTree>
+  </p:cSld>
+  <p:clrMapOvr>
+    <a:masterClrMapping/>
+  </p:clrMapOvr>
+</p:sld>
+</file>
+
+<file path=ppt/slides/slide11.xml><?xml version="1.0" encoding="utf-8"?>
+<p:sld xmlns:a="http://schemas.openxmlformats.org/drawingml/2006/main" xmlns:r="http://schemas.openxmlformats.org/officeDocument/2006/relationships" xmlns:p="http://schemas.openxmlformats.org/presentationml/2006/main">
+  <p:cSld name="Slide 11">
+    <p:bg>
+      <p:bgPr>
+        <a:solidFill>
+          <a:srgbClr val="4E261D"/>
+        </a:solidFill>
+      </p:bgPr>
+    </p:bg>
+    <p:spTree>
+      <p:nvGrpSpPr>
+        <p:cNvPr id="1" name=""/>
+        <p:cNvGrpSpPr/>
+        <p:nvPr/>
+      </p:nvGrpSpPr>
+      <p:grpSpPr>
+        <a:xfrm>
+          <a:off x="0" y="0"/>
+          <a:ext cx="0" cy="0"/>
+          <a:chOff x="0" y="0"/>
+          <a:chExt cx="0" cy="0"/>
+        </a:xfrm>
+      </p:grpSpPr>
+      <p:sp>
+        <p:nvSpPr>
+          <p:cNvPr id="2" name="Text 0"/>
+          <p:cNvSpPr/>
+          <p:nvPr/>
+        </p:nvSpPr>
+        <p:spPr>
+          <a:xfrm>
+            <a:off x="640080" y="1005840"/>
+            <a:ext cx="8229600" cy="320040"/>
+          </a:xfrm>
+          <a:prstGeom prst="rect">
+            <a:avLst/>
+          </a:prstGeom>
+          <a:noFill/>
+          <a:ln/>
+        </p:spPr>
+        <p:txBody>
+          <a:bodyPr wrap="square" rtlCol="0" anchor="ctr"/>
+          <a:lstStyle/>
+          <a:p>
+            <a:pPr indent="0" marL="0">
+              <a:buNone/>
+            </a:pPr>
+            <a:r>
+              <a:rPr lang="en-US" sz="1300" b="1" spc="300" kern="0" dirty="0">
+                <a:solidFill>
+                  <a:srgbClr val="B9852F"/>
+                </a:solidFill>
+                <a:latin typeface="Calibri" pitchFamily="34" charset="0"/>
+                <a:ea typeface="Calibri" pitchFamily="34" charset="-122"/>
+                <a:cs typeface="Calibri" pitchFamily="34" charset="-120"/>
+              </a:rPr>
+              <a:t>THE CHECK, AI CLOSED</a:t>
+            </a:r>
+            <a:endParaRPr lang="en-US" sz="1300" dirty="0"/>
+          </a:p>
+        </p:txBody>
+      </p:sp>
+      <p:sp>
+        <p:nvSpPr>
+          <p:cNvPr id="3" name="Text 1"/>
+          <p:cNvSpPr/>
+          <p:nvPr/>
+        </p:nvSpPr>
+        <p:spPr>
+          <a:xfrm>
+            <a:off x="640080" y="1645920"/>
+            <a:ext cx="8686800" cy="3108960"/>
+          </a:xfrm>
+          <a:prstGeom prst="rect">
+            <a:avLst/>
+          </a:prstGeom>
+          <a:noFill/>
+          <a:ln/>
+        </p:spPr>
+        <p:txBody>
+          <a:bodyPr wrap="square" rtlCol="0" anchor="t">
+            <a:spAutoFit/>
+          </a:bodyPr>
+          <a:lstStyle/>
+          <a:p>
+            <a:pPr indent="0" marL="0">
+              <a:lnSpc>
+                <a:spcPct val="115000"/>
+              </a:lnSpc>
+              <a:buNone/>
+            </a:pPr>
+            <a:r>
+              <a:rPr lang="en-US" sz="2600" dirty="0">
+                <a:solidFill>
+                  <a:srgbClr val="FFFFFF"/>
+                </a:solidFill>
+                <a:latin typeface="Cambria" pitchFamily="34" charset="0"/>
+                <a:ea typeface="Cambria" pitchFamily="34" charset="-122"/>
+                <a:cs typeface="Cambria" pitchFamily="34" charset="-120"/>
+              </a:rPr>
+              <a:t>The oral walkthrough (the capstone): how you got your headline result, what it does not show, and how the tools actually work. Plus the workbench intro. (All eight competencies.)</a:t>
+            </a:r>
+            <a:endParaRPr lang="en-US" sz="2600" dirty="0"/>
+          </a:p>
+        </p:txBody>
+      </p:sp>
+      <p:sp>
+        <p:nvSpPr>
+          <p:cNvPr id="4" name="Text 2"/>
+          <p:cNvSpPr/>
+          <p:nvPr/>
+        </p:nvSpPr>
+        <p:spPr>
+          <a:xfrm>
+            <a:off x="640080" y="6126480"/>
+            <a:ext cx="7315200" cy="365760"/>
+          </a:xfrm>
+          <a:prstGeom prst="rect">
+            <a:avLst/>
+          </a:prstGeom>
+          <a:noFill/>
+          <a:ln/>
+        </p:spPr>
+        <p:txBody>
+          <a:bodyPr wrap="square" rtlCol="0" anchor="ctr"/>
+          <a:lstStyle/>
+          <a:p>
+            <a:pPr indent="0" marL="0">
+              <a:buNone/>
+            </a:pPr>
+            <a:r>
+              <a:rPr lang="en-US" sz="1200" dirty="0">
+                <a:solidFill>
+                  <a:srgbClr val="E8DCD6"/>
+                </a:solidFill>
+                <a:latin typeface="Calibri" pitchFamily="34" charset="0"/>
+                <a:ea typeface="Calibri" pitchFamily="34" charset="-122"/>
+                <a:cs typeface="Calibri" pitchFamily="34" charset="-120"/>
+              </a:rPr>
+              <a:t>Culture as Data  ·  Week 10</a:t>
+            </a:r>
+            <a:endParaRPr lang="en-US" sz="1200" dirty="0"/>
+          </a:p>
+        </p:txBody>
+      </p:sp>
+      <p:sp>
+        <p:nvSpPr>
+          <p:cNvPr id="5" name="Shape 3"/>
+          <p:cNvSpPr/>
+          <p:nvPr/>
+        </p:nvSpPr>
+        <p:spPr>
+          <a:xfrm>
+            <a:off x="11052898" y="6107659"/>
+            <a:ext cx="96631" cy="96631"/>
+          </a:xfrm>
+          <a:prstGeom prst="ellipse">
+            <a:avLst/>
+          </a:prstGeom>
+          <a:solidFill>
+            <a:srgbClr val="7A3B2E"/>
+          </a:solidFill>
+          <a:ln/>
+        </p:spPr>
+      </p:sp>
+      <p:sp>
+        <p:nvSpPr>
+          <p:cNvPr id="6" name="Shape 4"/>
+          <p:cNvSpPr/>
+          <p:nvPr/>
+        </p:nvSpPr>
+        <p:spPr>
+          <a:xfrm>
+            <a:off x="9224752" y="5766644"/>
+            <a:ext cx="61944" cy="61944"/>
+          </a:xfrm>
+          <a:prstGeom prst="ellipse">
+            <a:avLst/>
+          </a:prstGeom>
+          <a:solidFill>
+            <a:srgbClr val="3F6F5F"/>
+          </a:solidFill>
+          <a:ln/>
+        </p:spPr>
+      </p:sp>
+      <p:sp>
+        <p:nvSpPr>
+          <p:cNvPr id="7" name="Shape 5"/>
+          <p:cNvSpPr/>
+          <p:nvPr/>
+        </p:nvSpPr>
+        <p:spPr>
+          <a:xfrm>
+            <a:off x="10591079" y="4939008"/>
+            <a:ext cx="74374" cy="74374"/>
+          </a:xfrm>
+          <a:prstGeom prst="ellipse">
+            <a:avLst/>
+          </a:prstGeom>
+          <a:solidFill>
+            <a:srgbClr val="B9852F"/>
+          </a:solidFill>
+          <a:ln/>
+        </p:spPr>
+      </p:sp>
+      <p:sp>
+        <p:nvSpPr>
+          <p:cNvPr id="8" name="Shape 6"/>
+          <p:cNvSpPr/>
+          <p:nvPr/>
+        </p:nvSpPr>
+        <p:spPr>
+          <a:xfrm>
+            <a:off x="11098039" y="6086009"/>
+            <a:ext cx="47052" cy="47052"/>
+          </a:xfrm>
+          <a:prstGeom prst="ellipse">
+            <a:avLst/>
+          </a:prstGeom>
+          <a:solidFill>
+            <a:srgbClr val="7A3B2E"/>
+          </a:solidFill>
+          <a:ln/>
+        </p:spPr>
+      </p:sp>
+      <p:sp>
+        <p:nvSpPr>
+          <p:cNvPr id="9" name="Shape 7"/>
+          <p:cNvSpPr/>
+          <p:nvPr/>
+        </p:nvSpPr>
+        <p:spPr>
+          <a:xfrm>
+            <a:off x="9252113" y="4719469"/>
+            <a:ext cx="57704" cy="57704"/>
+          </a:xfrm>
+          <a:prstGeom prst="ellipse">
+            <a:avLst/>
+          </a:prstGeom>
+          <a:solidFill>
+            <a:srgbClr val="3F6F5F"/>
+          </a:solidFill>
+          <a:ln/>
+        </p:spPr>
+      </p:sp>
+      <p:sp>
+        <p:nvSpPr>
+          <p:cNvPr id="10" name="Shape 8"/>
+          <p:cNvSpPr/>
+          <p:nvPr/>
+        </p:nvSpPr>
+        <p:spPr>
+          <a:xfrm>
+            <a:off x="11240740" y="5038008"/>
+            <a:ext cx="74325" cy="74325"/>
+          </a:xfrm>
+          <a:prstGeom prst="ellipse">
+            <a:avLst/>
+          </a:prstGeom>
+          <a:solidFill>
+            <a:srgbClr val="B9852F"/>
+          </a:solidFill>
+          <a:ln/>
+        </p:spPr>
+      </p:sp>
+      <p:sp>
+        <p:nvSpPr>
+          <p:cNvPr id="11" name="Shape 9"/>
+          <p:cNvSpPr/>
+          <p:nvPr/>
+        </p:nvSpPr>
+        <p:spPr>
+          <a:xfrm>
+            <a:off x="10449761" y="6028164"/>
+            <a:ext cx="64911" cy="64911"/>
+          </a:xfrm>
+          <a:prstGeom prst="ellipse">
+            <a:avLst/>
+          </a:prstGeom>
+          <a:solidFill>
+            <a:srgbClr val="7A3B2E"/>
+          </a:solidFill>
+          <a:ln/>
+        </p:spPr>
+      </p:sp>
+      <p:sp>
+        <p:nvSpPr>
+          <p:cNvPr id="12" name="Shape 10"/>
+          <p:cNvSpPr/>
+          <p:nvPr/>
+        </p:nvSpPr>
+        <p:spPr>
+          <a:xfrm>
+            <a:off x="10506295" y="4939119"/>
+            <a:ext cx="52321" cy="52321"/>
+          </a:xfrm>
+          <a:prstGeom prst="ellipse">
+            <a:avLst/>
+          </a:prstGeom>
+          <a:solidFill>
+            <a:srgbClr val="3F6F5F"/>
+          </a:solidFill>
+          <a:ln/>
+        </p:spPr>
+      </p:sp>
+      <p:sp>
+        <p:nvSpPr>
+          <p:cNvPr id="13" name="Shape 11"/>
+          <p:cNvSpPr/>
+          <p:nvPr/>
+        </p:nvSpPr>
+        <p:spPr>
+          <a:xfrm>
+            <a:off x="9916822" y="5969493"/>
+            <a:ext cx="59417" cy="59417"/>
+          </a:xfrm>
+          <a:prstGeom prst="ellipse">
+            <a:avLst/>
+          </a:prstGeom>
+          <a:solidFill>
+            <a:srgbClr val="B9852F"/>
+          </a:solidFill>
+          <a:ln/>
+        </p:spPr>
+      </p:sp>
+      <p:sp>
+        <p:nvSpPr>
+          <p:cNvPr id="14" name="Shape 12"/>
+          <p:cNvSpPr/>
+          <p:nvPr/>
+        </p:nvSpPr>
+        <p:spPr>
+          <a:xfrm>
+            <a:off x="9748142" y="4631104"/>
+            <a:ext cx="54194" cy="54194"/>
+          </a:xfrm>
+          <a:prstGeom prst="ellipse">
+            <a:avLst/>
+          </a:prstGeom>
+          <a:solidFill>
+            <a:srgbClr val="7A3B2E"/>
+          </a:solidFill>
+          <a:ln/>
+        </p:spPr>
+      </p:sp>
+      <p:sp>
+        <p:nvSpPr>
+          <p:cNvPr id="15" name="Shape 13"/>
+          <p:cNvSpPr/>
+          <p:nvPr/>
+        </p:nvSpPr>
+        <p:spPr>
+          <a:xfrm>
+            <a:off x="11067056" y="5122574"/>
+            <a:ext cx="59512" cy="59512"/>
+          </a:xfrm>
+          <a:prstGeom prst="ellipse">
+            <a:avLst/>
+          </a:prstGeom>
+          <a:solidFill>
+            <a:srgbClr val="3F6F5F"/>
+          </a:solidFill>
+          <a:ln/>
+        </p:spPr>
+      </p:sp>
+      <p:sp>
+        <p:nvSpPr>
+          <p:cNvPr id="16" name="Shape 14"/>
+          <p:cNvSpPr/>
+          <p:nvPr/>
+        </p:nvSpPr>
+        <p:spPr>
+          <a:xfrm>
+            <a:off x="9819723" y="4693083"/>
+            <a:ext cx="98231" cy="98231"/>
+          </a:xfrm>
+          <a:prstGeom prst="ellipse">
+            <a:avLst/>
+          </a:prstGeom>
+          <a:solidFill>
+            <a:srgbClr val="B9852F"/>
+          </a:solidFill>
+          <a:ln/>
+        </p:spPr>
+      </p:sp>
+      <p:sp>
+        <p:nvSpPr>
+          <p:cNvPr id="17" name="Shape 15"/>
+          <p:cNvSpPr/>
+          <p:nvPr/>
+        </p:nvSpPr>
+        <p:spPr>
+          <a:xfrm>
+            <a:off x="9633264" y="5803889"/>
+            <a:ext cx="83482" cy="83482"/>
+          </a:xfrm>
+          <a:prstGeom prst="ellipse">
+            <a:avLst/>
+          </a:prstGeom>
+          <a:solidFill>
+            <a:srgbClr val="7A3B2E"/>
+          </a:solidFill>
+          <a:ln/>
+        </p:spPr>
+      </p:sp>
+      <p:sp>
+        <p:nvSpPr>
+          <p:cNvPr id="18" name="Shape 16"/>
+          <p:cNvSpPr/>
+          <p:nvPr/>
+        </p:nvSpPr>
+        <p:spPr>
+          <a:xfrm>
+            <a:off x="11574477" y="5704174"/>
+            <a:ext cx="92991" cy="92991"/>
+          </a:xfrm>
+          <a:prstGeom prst="ellipse">
+            <a:avLst/>
+          </a:prstGeom>
+          <a:solidFill>
+            <a:srgbClr val="3F6F5F"/>
+          </a:solidFill>
+          <a:ln/>
+        </p:spPr>
+      </p:sp>
+    </p:spTree>
+  </p:cSld>
+  <p:clrMapOvr>
+    <a:masterClrMapping/>
+  </p:clrMapOvr>
+</p:sld>
+</file>
+
 <file path=ppt/slides/slide2.xml><?xml version="1.0" encoding="utf-8"?>
 <p:sld xmlns:a="http://schemas.openxmlformats.org/drawingml/2006/main" xmlns:r="http://schemas.openxmlformats.org/officeDocument/2006/relationships" xmlns:p="http://schemas.openxmlformats.org/presentationml/2006/main">
   <p:cSld name="Slide 2">
@@ -2461,14 +3704,34 @@
       </p:grpSpPr>
       <p:sp>
         <p:nvSpPr>
-          <p:cNvPr id="2" name="Text 0"/>
-          <p:cNvSpPr/>
-          <p:nvPr/>
-        </p:nvSpPr>
-        <p:spPr>
-          <a:xfrm>
-            <a:off x="640080" y="731520"/>
-            <a:ext cx="10058400" cy="731520"/>
+          <p:cNvPr id="2" name="Shape 0"/>
+          <p:cNvSpPr/>
+          <p:nvPr/>
+        </p:nvSpPr>
+        <p:spPr>
+          <a:xfrm>
+            <a:off x="0" y="0"/>
+            <a:ext cx="164592" cy="6858000"/>
+          </a:xfrm>
+          <a:prstGeom prst="rect">
+            <a:avLst/>
+          </a:prstGeom>
+          <a:solidFill>
+            <a:srgbClr val="7A3B2E"/>
+          </a:solidFill>
+          <a:ln/>
+        </p:spPr>
+      </p:sp>
+      <p:sp>
+        <p:nvSpPr>
+          <p:cNvPr id="3" name="Text 1"/>
+          <p:cNvSpPr/>
+          <p:nvPr/>
+        </p:nvSpPr>
+        <p:spPr>
+          <a:xfrm>
+            <a:off x="640080" y="640080"/>
+            <a:ext cx="10058400" cy="320040"/>
           </a:xfrm>
           <a:prstGeom prst="rect">
             <a:avLst/>
@@ -2478,6 +3741,47 @@
         </p:spPr>
         <p:txBody>
           <a:bodyPr wrap="square" rtlCol="0" anchor="ctr"/>
+          <a:lstStyle/>
+          <a:p>
+            <a:pPr indent="0" marL="0">
+              <a:buNone/>
+            </a:pPr>
+            <a:r>
+              <a:rPr lang="en-US" sz="1200" b="1" spc="300" kern="0" dirty="0">
+                <a:solidFill>
+                  <a:srgbClr val="7A3B2E"/>
+                </a:solidFill>
+                <a:latin typeface="Calibri" pitchFamily="34" charset="0"/>
+                <a:ea typeface="Calibri" pitchFamily="34" charset="-122"/>
+                <a:cs typeface="Calibri" pitchFamily="34" charset="-120"/>
+              </a:rPr>
+              <a:t>WEEK 10 · THE MATERIAL</a:t>
+            </a:r>
+            <a:endParaRPr lang="en-US" sz="1200" dirty="0"/>
+          </a:p>
+        </p:txBody>
+      </p:sp>
+      <p:sp>
+        <p:nvSpPr>
+          <p:cNvPr id="4" name="Text 2"/>
+          <p:cNvSpPr/>
+          <p:nvPr/>
+        </p:nvSpPr>
+        <p:spPr>
+          <a:xfrm>
+            <a:off x="640080" y="1005840"/>
+            <a:ext cx="10881360" cy="914400"/>
+          </a:xfrm>
+          <a:prstGeom prst="rect">
+            <a:avLst/>
+          </a:prstGeom>
+          <a:noFill/>
+          <a:ln/>
+        </p:spPr>
+        <p:txBody>
+          <a:bodyPr wrap="square" rtlCol="0" anchor="t">
+            <a:spAutoFit/>
+          </a:bodyPr>
           <a:lstStyle/>
           <a:p>
             <a:pPr indent="0" marL="0">
@@ -2492,7 +3796,7 @@
                 <a:ea typeface="Cambria" pitchFamily="34" charset="-122"/>
                 <a:cs typeface="Cambria" pitchFamily="34" charset="-120"/>
               </a:rPr>
-              <a:t>Three modes today</a:t>
+              <a:t>The walkthrough, AI closed</a:t>
             </a:r>
             <a:endParaRPr lang="en-US" sz="3000" dirty="0"/>
           </a:p>
@@ -2500,134 +3804,98 @@
       </p:sp>
       <p:sp>
         <p:nvSpPr>
-          <p:cNvPr id="3" name="Text 1"/>
-          <p:cNvSpPr/>
-          <p:nvPr/>
-        </p:nvSpPr>
-        <p:spPr>
-          <a:xfrm>
-            <a:off x="640080" y="1417320"/>
-            <a:ext cx="10058400" cy="365760"/>
-          </a:xfrm>
-          <a:prstGeom prst="rect">
-            <a:avLst/>
-          </a:prstGeom>
-          <a:noFill/>
-          <a:ln/>
-        </p:spPr>
-        <p:txBody>
-          <a:bodyPr wrap="square" rtlCol="0" anchor="ctr"/>
+          <p:cNvPr id="5" name="Shape 3"/>
+          <p:cNvSpPr/>
+          <p:nvPr/>
+        </p:nvSpPr>
+        <p:spPr>
+          <a:xfrm>
+            <a:off x="640080" y="2331720"/>
+            <a:ext cx="201168" cy="201168"/>
+          </a:xfrm>
+          <a:prstGeom prst="ellipse">
+            <a:avLst/>
+          </a:prstGeom>
+          <a:solidFill>
+            <a:srgbClr val="7A3B2E"/>
+          </a:solidFill>
+          <a:ln/>
+        </p:spPr>
+      </p:sp>
+      <p:sp>
+        <p:nvSpPr>
+          <p:cNvPr id="6" name="Text 4"/>
+          <p:cNvSpPr/>
+          <p:nvPr/>
+        </p:nvSpPr>
+        <p:spPr>
+          <a:xfrm>
+            <a:off x="1097280" y="2240280"/>
+            <a:ext cx="10607040" cy="1051560"/>
+          </a:xfrm>
+          <a:prstGeom prst="rect">
+            <a:avLst/>
+          </a:prstGeom>
+          <a:noFill/>
+          <a:ln/>
+        </p:spPr>
+        <p:txBody>
+          <a:bodyPr wrap="square" rtlCol="0" anchor="t">
+            <a:spAutoFit/>
+          </a:bodyPr>
           <a:lstStyle/>
           <a:p>
             <a:pPr indent="0" marL="0">
-              <a:buNone/>
-            </a:pPr>
-            <a:r>
-              <a:rPr lang="en-US" sz="1400" i="1" dirty="0">
-                <a:solidFill>
-                  <a:srgbClr val="6B6B63"/>
+              <a:lnSpc>
+                <a:spcPct val="112000"/>
+              </a:lnSpc>
+              <a:buNone/>
+            </a:pPr>
+            <a:r>
+              <a:rPr lang="en-US" sz="1650" dirty="0">
+                <a:solidFill>
+                  <a:srgbClr val="1A1A1A"/>
                 </a:solidFill>
                 <a:latin typeface="Calibri" pitchFamily="34" charset="0"/>
                 <a:ea typeface="Calibri" pitchFamily="34" charset="-122"/>
                 <a:cs typeface="Calibri" pitchFamily="34" charset="-120"/>
               </a:rPr>
-              <a:t>about a third of the session each</a:t>
-            </a:r>
-            <a:endParaRPr lang="en-US" sz="1400" dirty="0"/>
-          </a:p>
-        </p:txBody>
-      </p:sp>
-      <p:sp>
-        <p:nvSpPr>
-          <p:cNvPr id="4" name="Shape 2"/>
-          <p:cNvSpPr/>
-          <p:nvPr/>
-        </p:nvSpPr>
-        <p:spPr>
-          <a:xfrm>
-            <a:off x="640080" y="2194560"/>
-            <a:ext cx="3383280" cy="3291840"/>
-          </a:xfrm>
-          <a:prstGeom prst="roundRect">
-            <a:avLst>
-              <a:gd name="adj" fmla="val 3333"/>
-            </a:avLst>
-          </a:prstGeom>
-          <a:solidFill>
-            <a:srgbClr val="F4EEE8"/>
-          </a:solidFill>
-          <a:ln/>
-        </p:spPr>
-      </p:sp>
-      <p:sp>
-        <p:nvSpPr>
-          <p:cNvPr id="5" name="Shape 3"/>
-          <p:cNvSpPr/>
-          <p:nvPr/>
-        </p:nvSpPr>
-        <p:spPr>
-          <a:xfrm>
-            <a:off x="1051560" y="2606040"/>
-            <a:ext cx="548640" cy="548640"/>
+              <a:t>Present the essay, then walk the room through your notebook, aloud, cell by cell.</a:t>
+            </a:r>
+            <a:endParaRPr lang="en-US" sz="1650" dirty="0"/>
+          </a:p>
+        </p:txBody>
+      </p:sp>
+      <p:sp>
+        <p:nvSpPr>
+          <p:cNvPr id="7" name="Shape 5"/>
+          <p:cNvSpPr/>
+          <p:nvPr/>
+        </p:nvSpPr>
+        <p:spPr>
+          <a:xfrm>
+            <a:off x="640080" y="3383280"/>
+            <a:ext cx="201168" cy="201168"/>
           </a:xfrm>
           <a:prstGeom prst="ellipse">
             <a:avLst/>
           </a:prstGeom>
           <a:solidFill>
-            <a:srgbClr val="7A3B2E"/>
-          </a:solidFill>
-          <a:ln/>
-        </p:spPr>
-      </p:sp>
-      <p:sp>
-        <p:nvSpPr>
-          <p:cNvPr id="6" name="Text 4"/>
-          <p:cNvSpPr/>
-          <p:nvPr/>
-        </p:nvSpPr>
-        <p:spPr>
-          <a:xfrm>
-            <a:off x="1005840" y="3383280"/>
-            <a:ext cx="2651760" cy="548640"/>
-          </a:xfrm>
-          <a:prstGeom prst="rect">
-            <a:avLst/>
-          </a:prstGeom>
-          <a:noFill/>
-          <a:ln/>
-        </p:spPr>
-        <p:txBody>
-          <a:bodyPr wrap="square" rtlCol="0" anchor="ctr"/>
-          <a:lstStyle/>
-          <a:p>
-            <a:pPr indent="0" marL="0">
-              <a:buNone/>
-            </a:pPr>
-            <a:r>
-              <a:rPr lang="en-US" sz="2100" b="1" dirty="0">
-                <a:solidFill>
-                  <a:srgbClr val="1A1A1A"/>
-                </a:solidFill>
-                <a:latin typeface="Cambria" pitchFamily="34" charset="0"/>
-                <a:ea typeface="Cambria" pitchFamily="34" charset="-122"/>
-                <a:cs typeface="Cambria" pitchFamily="34" charset="-120"/>
-              </a:rPr>
-              <a:t>Lecture / demo</a:t>
-            </a:r>
-            <a:endParaRPr lang="en-US" sz="2100" dirty="0"/>
-          </a:p>
-        </p:txBody>
-      </p:sp>
-      <p:sp>
-        <p:nvSpPr>
-          <p:cNvPr id="7" name="Text 5"/>
-          <p:cNvSpPr/>
-          <p:nvPr/>
-        </p:nvSpPr>
-        <p:spPr>
-          <a:xfrm>
-            <a:off x="1005840" y="3977640"/>
-            <a:ext cx="2651760" cy="1371600"/>
+            <a:srgbClr val="3F6F5F"/>
+          </a:solidFill>
+          <a:ln/>
+        </p:spPr>
+      </p:sp>
+      <p:sp>
+        <p:nvSpPr>
+          <p:cNvPr id="8" name="Text 6"/>
+          <p:cNvSpPr/>
+          <p:nvPr/>
+        </p:nvSpPr>
+        <p:spPr>
+          <a:xfrm>
+            <a:off x="1097280" y="3291840"/>
+            <a:ext cx="10607040" cy="1051560"/>
           </a:xfrm>
           <a:prstGeom prst="rect">
             <a:avLst/>
@@ -2643,12 +3911,12 @@
           <a:p>
             <a:pPr indent="0" marL="0">
               <a:lnSpc>
-                <a:spcPct val="115000"/>
+                <a:spcPct val="112000"/>
               </a:lnSpc>
               <a:buNone/>
             </a:pPr>
             <a:r>
-              <a:rPr lang="en-US" sz="1500" dirty="0">
+              <a:rPr lang="en-US" sz="1650" dirty="0">
                 <a:solidFill>
                   <a:srgbClr val="1A1A1A"/>
                 </a:solidFill>
@@ -2656,33 +3924,11 @@
                 <a:ea typeface="Calibri" pitchFamily="34" charset="-122"/>
                 <a:cs typeface="Calibri" pitchFamily="34" charset="-120"/>
               </a:rPr>
-              <a:t>A public celebration; the two capstone assessments</a:t>
-            </a:r>
-            <a:endParaRPr lang="en-US" sz="1500" dirty="0"/>
-          </a:p>
-        </p:txBody>
-      </p:sp>
-      <p:sp>
-        <p:nvSpPr>
-          <p:cNvPr id="8" name="Shape 6"/>
-          <p:cNvSpPr/>
-          <p:nvPr/>
-        </p:nvSpPr>
-        <p:spPr>
-          <a:xfrm>
-            <a:off x="4526280" y="2194560"/>
-            <a:ext cx="3383280" cy="3291840"/>
-          </a:xfrm>
-          <a:prstGeom prst="roundRect">
-            <a:avLst>
-              <a:gd name="adj" fmla="val 3333"/>
-            </a:avLst>
-          </a:prstGeom>
-          <a:solidFill>
-            <a:srgbClr val="F4EEE8"/>
-          </a:solidFill>
-          <a:ln/>
-        </p:spPr>
+              <a:t>The oral walkthrough is the one deliverable an AI cannot produce for you.</a:t>
+            </a:r>
+            <a:endParaRPr lang="en-US" sz="1650" dirty="0"/>
+          </a:p>
+        </p:txBody>
       </p:sp>
       <p:sp>
         <p:nvSpPr>
@@ -2692,14 +3938,14 @@
         </p:nvSpPr>
         <p:spPr>
           <a:xfrm>
-            <a:off x="4937760" y="2606040"/>
-            <a:ext cx="548640" cy="548640"/>
+            <a:off x="640080" y="4434840"/>
+            <a:ext cx="201168" cy="201168"/>
           </a:xfrm>
           <a:prstGeom prst="ellipse">
             <a:avLst/>
           </a:prstGeom>
           <a:solidFill>
-            <a:srgbClr val="3F6F5F"/>
+            <a:srgbClr val="B9852F"/>
           </a:solidFill>
           <a:ln/>
         </p:spPr>
@@ -2712,47 +3958,8 @@
         </p:nvSpPr>
         <p:spPr>
           <a:xfrm>
-            <a:off x="4892040" y="3383280"/>
-            <a:ext cx="2651760" cy="548640"/>
-          </a:xfrm>
-          <a:prstGeom prst="rect">
-            <a:avLst/>
-          </a:prstGeom>
-          <a:noFill/>
-          <a:ln/>
-        </p:spPr>
-        <p:txBody>
-          <a:bodyPr wrap="square" rtlCol="0" anchor="ctr"/>
-          <a:lstStyle/>
-          <a:p>
-            <a:pPr indent="0" marL="0">
-              <a:buNone/>
-            </a:pPr>
-            <a:r>
-              <a:rPr lang="en-US" sz="2100" b="1" dirty="0">
-                <a:solidFill>
-                  <a:srgbClr val="1A1A1A"/>
-                </a:solidFill>
-                <a:latin typeface="Cambria" pitchFamily="34" charset="0"/>
-                <a:ea typeface="Cambria" pitchFamily="34" charset="-122"/>
-                <a:cs typeface="Cambria" pitchFamily="34" charset="-120"/>
-              </a:rPr>
-              <a:t>Workshop</a:t>
-            </a:r>
-            <a:endParaRPr lang="en-US" sz="2100" dirty="0"/>
-          </a:p>
-        </p:txBody>
-      </p:sp>
-      <p:sp>
-        <p:nvSpPr>
-          <p:cNvPr id="11" name="Text 9"/>
-          <p:cNvSpPr/>
-          <p:nvPr/>
-        </p:nvSpPr>
-        <p:spPr>
-          <a:xfrm>
-            <a:off x="4892040" y="3977640"/>
-            <a:ext cx="2651760" cy="1371600"/>
+            <a:off x="1097280" y="4343400"/>
+            <a:ext cx="10607040" cy="1051560"/>
           </a:xfrm>
           <a:prstGeom prst="rect">
             <a:avLst/>
@@ -2768,12 +3975,12 @@
           <a:p>
             <a:pPr indent="0" marL="0">
               <a:lnSpc>
-                <a:spcPct val="115000"/>
+                <a:spcPct val="112000"/>
               </a:lnSpc>
               <a:buNone/>
             </a:pPr>
             <a:r>
-              <a:rPr lang="en-US" sz="1500" dirty="0">
+              <a:rPr lang="en-US" sz="1650" dirty="0">
                 <a:solidFill>
                   <a:srgbClr val="1A1A1A"/>
                 </a:solidFill>
@@ -2781,134 +3988,9 @@
                 <a:ea typeface="Calibri" pitchFamily="34" charset="-122"/>
                 <a:cs typeface="Calibri" pitchFamily="34" charset="-120"/>
               </a:rPr>
-              <a:t>Build hands-on on your own data.</a:t>
-            </a:r>
-            <a:endParaRPr lang="en-US" sz="1500" dirty="0"/>
-          </a:p>
-        </p:txBody>
-      </p:sp>
-      <p:sp>
-        <p:nvSpPr>
-          <p:cNvPr id="12" name="Shape 10"/>
-          <p:cNvSpPr/>
-          <p:nvPr/>
-        </p:nvSpPr>
-        <p:spPr>
-          <a:xfrm>
-            <a:off x="8412480" y="2194560"/>
-            <a:ext cx="3383280" cy="3291840"/>
-          </a:xfrm>
-          <a:prstGeom prst="roundRect">
-            <a:avLst>
-              <a:gd name="adj" fmla="val 3333"/>
-            </a:avLst>
-          </a:prstGeom>
-          <a:solidFill>
-            <a:srgbClr val="F4EEE8"/>
-          </a:solidFill>
-          <a:ln/>
-        </p:spPr>
-      </p:sp>
-      <p:sp>
-        <p:nvSpPr>
-          <p:cNvPr id="13" name="Shape 11"/>
-          <p:cNvSpPr/>
-          <p:nvPr/>
-        </p:nvSpPr>
-        <p:spPr>
-          <a:xfrm>
-            <a:off x="8823960" y="2606040"/>
-            <a:ext cx="548640" cy="548640"/>
-          </a:xfrm>
-          <a:prstGeom prst="ellipse">
-            <a:avLst/>
-          </a:prstGeom>
-          <a:solidFill>
-            <a:srgbClr val="B9852F"/>
-          </a:solidFill>
-          <a:ln/>
-        </p:spPr>
-      </p:sp>
-      <p:sp>
-        <p:nvSpPr>
-          <p:cNvPr id="14" name="Text 12"/>
-          <p:cNvSpPr/>
-          <p:nvPr/>
-        </p:nvSpPr>
-        <p:spPr>
-          <a:xfrm>
-            <a:off x="8778240" y="3383280"/>
-            <a:ext cx="2651760" cy="548640"/>
-          </a:xfrm>
-          <a:prstGeom prst="rect">
-            <a:avLst/>
-          </a:prstGeom>
-          <a:noFill/>
-          <a:ln/>
-        </p:spPr>
-        <p:txBody>
-          <a:bodyPr wrap="square" rtlCol="0" anchor="ctr"/>
-          <a:lstStyle/>
-          <a:p>
-            <a:pPr indent="0" marL="0">
-              <a:buNone/>
-            </a:pPr>
-            <a:r>
-              <a:rPr lang="en-US" sz="2100" b="1" dirty="0">
-                <a:solidFill>
-                  <a:srgbClr val="1A1A1A"/>
-                </a:solidFill>
-                <a:latin typeface="Cambria" pitchFamily="34" charset="0"/>
-                <a:ea typeface="Cambria" pitchFamily="34" charset="-122"/>
-                <a:cs typeface="Cambria" pitchFamily="34" charset="-120"/>
-              </a:rPr>
-              <a:t>Discussion</a:t>
-            </a:r>
-            <a:endParaRPr lang="en-US" sz="2100" dirty="0"/>
-          </a:p>
-        </p:txBody>
-      </p:sp>
-      <p:sp>
-        <p:nvSpPr>
-          <p:cNvPr id="15" name="Text 13"/>
-          <p:cNvSpPr/>
-          <p:nvPr/>
-        </p:nvSpPr>
-        <p:spPr>
-          <a:xfrm>
-            <a:off x="8778240" y="3977640"/>
-            <a:ext cx="2651760" cy="1371600"/>
-          </a:xfrm>
-          <a:prstGeom prst="rect">
-            <a:avLst/>
-          </a:prstGeom>
-          <a:noFill/>
-          <a:ln/>
-        </p:spPr>
-        <p:txBody>
-          <a:bodyPr wrap="square" rtlCol="0" anchor="t">
-            <a:spAutoFit/>
-          </a:bodyPr>
-          <a:lstStyle/>
-          <a:p>
-            <a:pPr indent="0" marL="0">
-              <a:lnSpc>
-                <a:spcPct val="115000"/>
-              </a:lnSpc>
-              <a:buNone/>
-            </a:pPr>
-            <a:r>
-              <a:rPr lang="en-US" sz="1500" dirty="0">
-                <a:solidFill>
-                  <a:srgbClr val="1A1A1A"/>
-                </a:solidFill>
-                <a:latin typeface="Calibri" pitchFamily="34" charset="0"/>
-                <a:ea typeface="Calibri" pitchFamily="34" charset="-122"/>
-                <a:cs typeface="Calibri" pitchFamily="34" charset="-120"/>
-              </a:rPr>
-              <a:t>Interrogate the study, debate it, or critique each other's work.</a:t>
-            </a:r>
-            <a:endParaRPr lang="en-US" sz="1500" dirty="0"/>
+              <a:t>Expect three questions: what did you choose, what would you distrust, what would you do next?</a:t>
+            </a:r>
+            <a:endParaRPr lang="en-US" sz="1650" dirty="0"/>
           </a:p>
         </p:txBody>
       </p:sp>
@@ -2946,14 +4028,34 @@
       </p:grpSpPr>
       <p:sp>
         <p:nvSpPr>
-          <p:cNvPr id="2" name="Text 0"/>
+          <p:cNvPr id="2" name="Shape 0"/>
+          <p:cNvSpPr/>
+          <p:nvPr/>
+        </p:nvSpPr>
+        <p:spPr>
+          <a:xfrm>
+            <a:off x="0" y="0"/>
+            <a:ext cx="164592" cy="6858000"/>
+          </a:xfrm>
+          <a:prstGeom prst="rect">
+            <a:avLst/>
+          </a:prstGeom>
+          <a:solidFill>
+            <a:srgbClr val="3F6F5F"/>
+          </a:solidFill>
+          <a:ln/>
+        </p:spPr>
+      </p:sp>
+      <p:sp>
+        <p:nvSpPr>
+          <p:cNvPr id="3" name="Text 1"/>
           <p:cNvSpPr/>
           <p:nvPr/>
         </p:nvSpPr>
         <p:spPr>
           <a:xfrm>
             <a:off x="640080" y="640080"/>
-            <a:ext cx="10058400" cy="731520"/>
+            <a:ext cx="10058400" cy="320040"/>
           </a:xfrm>
           <a:prstGeom prst="rect">
             <a:avLst/>
@@ -2963,6 +4065,47 @@
         </p:spPr>
         <p:txBody>
           <a:bodyPr wrap="square" rtlCol="0" anchor="ctr"/>
+          <a:lstStyle/>
+          <a:p>
+            <a:pPr indent="0" marL="0">
+              <a:buNone/>
+            </a:pPr>
+            <a:r>
+              <a:rPr lang="en-US" sz="1200" b="1" spc="300" kern="0" dirty="0">
+                <a:solidFill>
+                  <a:srgbClr val="3F6F5F"/>
+                </a:solidFill>
+                <a:latin typeface="Calibri" pitchFamily="34" charset="0"/>
+                <a:ea typeface="Calibri" pitchFamily="34" charset="-122"/>
+                <a:cs typeface="Calibri" pitchFamily="34" charset="-120"/>
+              </a:rPr>
+              <a:t>WEEK 10 · THE MATERIAL</a:t>
+            </a:r>
+            <a:endParaRPr lang="en-US" sz="1200" dirty="0"/>
+          </a:p>
+        </p:txBody>
+      </p:sp>
+      <p:sp>
+        <p:nvSpPr>
+          <p:cNvPr id="4" name="Text 2"/>
+          <p:cNvSpPr/>
+          <p:nvPr/>
+        </p:nvSpPr>
+        <p:spPr>
+          <a:xfrm>
+            <a:off x="640080" y="1005840"/>
+            <a:ext cx="10881360" cy="914400"/>
+          </a:xfrm>
+          <a:prstGeom prst="rect">
+            <a:avLst/>
+          </a:prstGeom>
+          <a:noFill/>
+          <a:ln/>
+        </p:spPr>
+        <p:txBody>
+          <a:bodyPr wrap="square" rtlCol="0" anchor="t">
+            <a:spAutoFit/>
+          </a:bodyPr>
           <a:lstStyle/>
           <a:p>
             <a:pPr indent="0" marL="0">
@@ -2977,7 +4120,7 @@
                 <a:ea typeface="Cambria" pitchFamily="34" charset="-122"/>
                 <a:cs typeface="Cambria" pitchFamily="34" charset="-120"/>
               </a:rPr>
-              <a:t>The session</a:t>
+              <a:t>The send-off triptych</a:t>
             </a:r>
             <a:endParaRPr lang="en-US" sz="3000" dirty="0"/>
           </a:p>
@@ -2985,19 +4128,17 @@
       </p:sp>
       <p:sp>
         <p:nvSpPr>
-          <p:cNvPr id="3" name="Shape 1"/>
-          <p:cNvSpPr/>
-          <p:nvPr/>
-        </p:nvSpPr>
-        <p:spPr>
-          <a:xfrm>
-            <a:off x="640080" y="1572768"/>
-            <a:ext cx="868680" cy="457200"/>
-          </a:xfrm>
-          <a:prstGeom prst="roundRect">
-            <a:avLst>
-              <a:gd name="adj" fmla="val 12000"/>
-            </a:avLst>
+          <p:cNvPr id="5" name="Shape 3"/>
+          <p:cNvSpPr/>
+          <p:nvPr/>
+        </p:nvSpPr>
+        <p:spPr>
+          <a:xfrm>
+            <a:off x="640080" y="2331720"/>
+            <a:ext cx="201168" cy="201168"/>
+          </a:xfrm>
+          <a:prstGeom prst="ellipse">
+            <a:avLst/>
           </a:prstGeom>
           <a:solidFill>
             <a:srgbClr val="7A3B2E"/>
@@ -3007,71 +4148,99 @@
       </p:sp>
       <p:sp>
         <p:nvSpPr>
-          <p:cNvPr id="4" name="Text 2"/>
-          <p:cNvSpPr/>
-          <p:nvPr/>
-        </p:nvSpPr>
-        <p:spPr>
-          <a:xfrm>
-            <a:off x="640080" y="1572768"/>
-            <a:ext cx="868680" cy="457200"/>
-          </a:xfrm>
-          <a:prstGeom prst="rect">
-            <a:avLst/>
-          </a:prstGeom>
-          <a:noFill/>
-          <a:ln/>
-        </p:spPr>
-        <p:txBody>
-          <a:bodyPr wrap="square" rtlCol="0" anchor="ctr"/>
-          <a:lstStyle/>
-          <a:p>
-            <a:pPr algn="ctr" indent="0" marL="0">
-              <a:buNone/>
-            </a:pPr>
-            <a:r>
-              <a:rPr lang="en-US" sz="1100" b="1" dirty="0">
-                <a:solidFill>
-                  <a:srgbClr val="FFFFFF"/>
+          <p:cNvPr id="6" name="Text 4"/>
+          <p:cNvSpPr/>
+          <p:nvPr/>
+        </p:nvSpPr>
+        <p:spPr>
+          <a:xfrm>
+            <a:off x="1097280" y="2240280"/>
+            <a:ext cx="10607040" cy="1017270"/>
+          </a:xfrm>
+          <a:prstGeom prst="rect">
+            <a:avLst/>
+          </a:prstGeom>
+          <a:noFill/>
+          <a:ln/>
+        </p:spPr>
+        <p:txBody>
+          <a:bodyPr wrap="square" rtlCol="0" anchor="t">
+            <a:spAutoFit/>
+          </a:bodyPr>
+          <a:lstStyle/>
+          <a:p>
+            <a:pPr indent="0" marL="0">
+              <a:lnSpc>
+                <a:spcPct val="112000"/>
+              </a:lnSpc>
+              <a:buNone/>
+            </a:pPr>
+            <a:r>
+              <a:rPr lang="en-US" sz="1650" dirty="0">
+                <a:solidFill>
+                  <a:srgbClr val="1A1A1A"/>
                 </a:solidFill>
                 <a:latin typeface="Calibri" pitchFamily="34" charset="0"/>
                 <a:ea typeface="Calibri" pitchFamily="34" charset="-122"/>
                 <a:cs typeface="Calibri" pitchFamily="34" charset="-120"/>
               </a:rPr>
-              <a:t>0:00</a:t>
-            </a:r>
-            <a:endParaRPr lang="en-US" sz="1100" dirty="0"/>
-          </a:p>
-        </p:txBody>
-      </p:sp>
-      <p:sp>
-        <p:nvSpPr>
-          <p:cNvPr id="5" name="Text 3"/>
-          <p:cNvSpPr/>
-          <p:nvPr/>
-        </p:nvSpPr>
-        <p:spPr>
-          <a:xfrm>
-            <a:off x="1691640" y="1554480"/>
-            <a:ext cx="9646920" cy="566928"/>
-          </a:xfrm>
-          <a:prstGeom prst="rect">
-            <a:avLst/>
-          </a:prstGeom>
-          <a:noFill/>
-          <a:ln/>
-        </p:spPr>
-        <p:txBody>
-          <a:bodyPr wrap="square" rtlCol="0" anchor="ctr">
+              <a:t>Edmond de Belamy, the AI portrait that sold for $432,500: who is the author?</a:t>
+            </a:r>
+            <a:endParaRPr lang="en-US" sz="1650" dirty="0"/>
+          </a:p>
+        </p:txBody>
+      </p:sp>
+      <p:sp>
+        <p:nvSpPr>
+          <p:cNvPr id="7" name="Shape 5"/>
+          <p:cNvSpPr/>
+          <p:nvPr/>
+        </p:nvSpPr>
+        <p:spPr>
+          <a:xfrm>
+            <a:off x="640080" y="3348990"/>
+            <a:ext cx="201168" cy="201168"/>
+          </a:xfrm>
+          <a:prstGeom prst="ellipse">
+            <a:avLst/>
+          </a:prstGeom>
+          <a:solidFill>
+            <a:srgbClr val="3F6F5F"/>
+          </a:solidFill>
+          <a:ln/>
+        </p:spPr>
+      </p:sp>
+      <p:sp>
+        <p:nvSpPr>
+          <p:cNvPr id="8" name="Text 6"/>
+          <p:cNvSpPr/>
+          <p:nvPr/>
+        </p:nvSpPr>
+        <p:spPr>
+          <a:xfrm>
+            <a:off x="1097280" y="3257550"/>
+            <a:ext cx="10607040" cy="1017270"/>
+          </a:xfrm>
+          <a:prstGeom prst="rect">
+            <a:avLst/>
+          </a:prstGeom>
+          <a:noFill/>
+          <a:ln/>
+        </p:spPr>
+        <p:txBody>
+          <a:bodyPr wrap="square" rtlCol="0" anchor="t">
             <a:spAutoFit/>
           </a:bodyPr>
           <a:lstStyle/>
           <a:p>
             <a:pPr indent="0" marL="0">
-              <a:buNone/>
-            </a:pPr>
-            <a:r>
-              <a:rPr lang="en-US" sz="1250" dirty="0">
+              <a:lnSpc>
+                <a:spcPct val="112000"/>
+              </a:lnSpc>
+              <a:buNone/>
+            </a:pPr>
+            <a:r>
+              <a:rPr lang="en-US" sz="1650" dirty="0">
                 <a:solidFill>
                   <a:srgbClr val="1A1A1A"/>
                 </a:solidFill>
@@ -3079,101 +4248,127 @@
                 <a:ea typeface="Calibri" pitchFamily="34" charset="-122"/>
                 <a:cs typeface="Calibri" pitchFamily="34" charset="-120"/>
               </a:rPr>
-              <a:t>Welcome. This is a show, not a defense. The closing Look at This.</a:t>
-            </a:r>
-            <a:endParaRPr lang="en-US" sz="1250" dirty="0"/>
-          </a:p>
-        </p:txBody>
-      </p:sp>
-      <p:sp>
-        <p:nvSpPr>
-          <p:cNvPr id="6" name="Shape 4"/>
-          <p:cNvSpPr/>
-          <p:nvPr/>
-        </p:nvSpPr>
-        <p:spPr>
-          <a:xfrm>
-            <a:off x="640080" y="2139696"/>
-            <a:ext cx="868680" cy="457200"/>
-          </a:xfrm>
-          <a:prstGeom prst="roundRect">
-            <a:avLst>
-              <a:gd name="adj" fmla="val 12000"/>
-            </a:avLst>
-          </a:prstGeom>
-          <a:solidFill>
-            <a:srgbClr val="7A3B2E"/>
-          </a:solidFill>
-          <a:ln/>
-        </p:spPr>
-      </p:sp>
-      <p:sp>
-        <p:nvSpPr>
-          <p:cNvPr id="7" name="Text 5"/>
-          <p:cNvSpPr/>
-          <p:nvPr/>
-        </p:nvSpPr>
-        <p:spPr>
-          <a:xfrm>
-            <a:off x="640080" y="2139696"/>
-            <a:ext cx="868680" cy="457200"/>
-          </a:xfrm>
-          <a:prstGeom prst="rect">
-            <a:avLst/>
-          </a:prstGeom>
-          <a:noFill/>
-          <a:ln/>
-        </p:spPr>
-        <p:txBody>
-          <a:bodyPr wrap="square" rtlCol="0" anchor="ctr"/>
-          <a:lstStyle/>
-          <a:p>
-            <a:pPr algn="ctr" indent="0" marL="0">
-              <a:buNone/>
-            </a:pPr>
-            <a:r>
-              <a:rPr lang="en-US" sz="1100" b="1" dirty="0">
-                <a:solidFill>
-                  <a:srgbClr val="FFFFFF"/>
+              <a:t>Anna Ridler's Mosaic Virus: she photographed 10,000 tulips herself to build the training set: whose labor is the data?</a:t>
+            </a:r>
+            <a:endParaRPr lang="en-US" sz="1650" dirty="0"/>
+          </a:p>
+        </p:txBody>
+      </p:sp>
+      <p:sp>
+        <p:nvSpPr>
+          <p:cNvPr id="9" name="Shape 7"/>
+          <p:cNvSpPr/>
+          <p:nvPr/>
+        </p:nvSpPr>
+        <p:spPr>
+          <a:xfrm>
+            <a:off x="640080" y="4366260"/>
+            <a:ext cx="201168" cy="201168"/>
+          </a:xfrm>
+          <a:prstGeom prst="ellipse">
+            <a:avLst/>
+          </a:prstGeom>
+          <a:solidFill>
+            <a:srgbClr val="B9852F"/>
+          </a:solidFill>
+          <a:ln/>
+        </p:spPr>
+      </p:sp>
+      <p:sp>
+        <p:nvSpPr>
+          <p:cNvPr id="10" name="Text 8"/>
+          <p:cNvSpPr/>
+          <p:nvPr/>
+        </p:nvSpPr>
+        <p:spPr>
+          <a:xfrm>
+            <a:off x="1097280" y="4274820"/>
+            <a:ext cx="10607040" cy="1017270"/>
+          </a:xfrm>
+          <a:prstGeom prst="rect">
+            <a:avLst/>
+          </a:prstGeom>
+          <a:noFill/>
+          <a:ln/>
+        </p:spPr>
+        <p:txBody>
+          <a:bodyPr wrap="square" rtlCol="0" anchor="t">
+            <a:spAutoFit/>
+          </a:bodyPr>
+          <a:lstStyle/>
+          <a:p>
+            <a:pPr indent="0" marL="0">
+              <a:lnSpc>
+                <a:spcPct val="112000"/>
+              </a:lnSpc>
+              <a:buNone/>
+            </a:pPr>
+            <a:r>
+              <a:rPr lang="en-US" sz="1650" dirty="0">
+                <a:solidFill>
+                  <a:srgbClr val="1A1A1A"/>
                 </a:solidFill>
                 <a:latin typeface="Calibri" pitchFamily="34" charset="0"/>
                 <a:ea typeface="Calibri" pitchFamily="34" charset="-122"/>
                 <a:cs typeface="Calibri" pitchFamily="34" charset="-120"/>
               </a:rPr>
-              <a:t>0:10</a:t>
-            </a:r>
-            <a:endParaRPr lang="en-US" sz="1100" dirty="0"/>
-          </a:p>
-        </p:txBody>
-      </p:sp>
-      <p:sp>
-        <p:nvSpPr>
-          <p:cNvPr id="8" name="Text 6"/>
-          <p:cNvSpPr/>
-          <p:nvPr/>
-        </p:nvSpPr>
-        <p:spPr>
-          <a:xfrm>
-            <a:off x="1691640" y="2121408"/>
-            <a:ext cx="9646920" cy="566928"/>
-          </a:xfrm>
-          <a:prstGeom prst="rect">
-            <a:avLst/>
-          </a:prstGeom>
-          <a:noFill/>
-          <a:ln/>
-        </p:spPr>
-        <p:txBody>
-          <a:bodyPr wrap="square" rtlCol="0" anchor="ctr">
+              <a:t>Anadol's Unsupervised at MoMA: the museum's own collection becomes the art: who decided what went in?</a:t>
+            </a:r>
+            <a:endParaRPr lang="en-US" sz="1650" dirty="0"/>
+          </a:p>
+        </p:txBody>
+      </p:sp>
+      <p:sp>
+        <p:nvSpPr>
+          <p:cNvPr id="11" name="Shape 9"/>
+          <p:cNvSpPr/>
+          <p:nvPr/>
+        </p:nvSpPr>
+        <p:spPr>
+          <a:xfrm>
+            <a:off x="640080" y="5383530"/>
+            <a:ext cx="201168" cy="201168"/>
+          </a:xfrm>
+          <a:prstGeom prst="ellipse">
+            <a:avLst/>
+          </a:prstGeom>
+          <a:solidFill>
+            <a:srgbClr val="7A3B2E"/>
+          </a:solidFill>
+          <a:ln/>
+        </p:spPr>
+      </p:sp>
+      <p:sp>
+        <p:nvSpPr>
+          <p:cNvPr id="12" name="Text 10"/>
+          <p:cNvSpPr/>
+          <p:nvPr/>
+        </p:nvSpPr>
+        <p:spPr>
+          <a:xfrm>
+            <a:off x="1097280" y="5292090"/>
+            <a:ext cx="10607040" cy="1017270"/>
+          </a:xfrm>
+          <a:prstGeom prst="rect">
+            <a:avLst/>
+          </a:prstGeom>
+          <a:noFill/>
+          <a:ln/>
+        </p:spPr>
+        <p:txBody>
+          <a:bodyPr wrap="square" rtlCol="0" anchor="t">
             <a:spAutoFit/>
           </a:bodyPr>
           <a:lstStyle/>
           <a:p>
             <a:pPr indent="0" marL="0">
-              <a:buNone/>
-            </a:pPr>
-            <a:r>
-              <a:rPr lang="en-US" sz="1250" dirty="0">
+              <a:lnSpc>
+                <a:spcPct val="112000"/>
+              </a:lnSpc>
+              <a:buNone/>
+            </a:pPr>
+            <a:r>
+              <a:rPr lang="en-US" sz="1650" dirty="0">
                 <a:solidFill>
                   <a:srgbClr val="1A1A1A"/>
                 </a:solidFill>
@@ -3181,111 +4376,9 @@
                 <a:ea typeface="Calibri" pitchFamily="34" charset="-122"/>
                 <a:cs typeface="Calibri" pitchFamily="34" charset="-120"/>
               </a:rPr>
-              <a:t>Presentations, 4–5 min each: corpus, headline finding, one surprise. Live URL projected.</a:t>
-            </a:r>
-            <a:endParaRPr lang="en-US" sz="1250" dirty="0"/>
-          </a:p>
-        </p:txBody>
-      </p:sp>
-      <p:sp>
-        <p:nvSpPr>
-          <p:cNvPr id="9" name="Shape 7"/>
-          <p:cNvSpPr/>
-          <p:nvPr/>
-        </p:nvSpPr>
-        <p:spPr>
-          <a:xfrm>
-            <a:off x="640080" y="2706624"/>
-            <a:ext cx="868680" cy="457200"/>
-          </a:xfrm>
-          <a:prstGeom prst="roundRect">
-            <a:avLst>
-              <a:gd name="adj" fmla="val 12000"/>
-            </a:avLst>
-          </a:prstGeom>
-          <a:solidFill>
-            <a:srgbClr val="7A3B2E"/>
-          </a:solidFill>
-          <a:ln/>
-        </p:spPr>
-      </p:sp>
-      <p:sp>
-        <p:nvSpPr>
-          <p:cNvPr id="10" name="Text 8"/>
-          <p:cNvSpPr/>
-          <p:nvPr/>
-        </p:nvSpPr>
-        <p:spPr>
-          <a:xfrm>
-            <a:off x="640080" y="2706624"/>
-            <a:ext cx="868680" cy="457200"/>
-          </a:xfrm>
-          <a:prstGeom prst="rect">
-            <a:avLst/>
-          </a:prstGeom>
-          <a:noFill/>
-          <a:ln/>
-        </p:spPr>
-        <p:txBody>
-          <a:bodyPr wrap="square" rtlCol="0" anchor="ctr"/>
-          <a:lstStyle/>
-          <a:p>
-            <a:pPr algn="ctr" indent="0" marL="0">
-              <a:buNone/>
-            </a:pPr>
-            <a:r>
-              <a:rPr lang="en-US" sz="1100" b="1" dirty="0">
-                <a:solidFill>
-                  <a:srgbClr val="FFFFFF"/>
-                </a:solidFill>
-                <a:latin typeface="Calibri" pitchFamily="34" charset="0"/>
-                <a:ea typeface="Calibri" pitchFamily="34" charset="-122"/>
-                <a:cs typeface="Calibri" pitchFamily="34" charset="-120"/>
-              </a:rPr>
-              <a:t>1:30</a:t>
-            </a:r>
-            <a:endParaRPr lang="en-US" sz="1100" dirty="0"/>
-          </a:p>
-        </p:txBody>
-      </p:sp>
-      <p:sp>
-        <p:nvSpPr>
-          <p:cNvPr id="11" name="Text 9"/>
-          <p:cNvSpPr/>
-          <p:nvPr/>
-        </p:nvSpPr>
-        <p:spPr>
-          <a:xfrm>
-            <a:off x="1691640" y="2688336"/>
-            <a:ext cx="9646920" cy="566928"/>
-          </a:xfrm>
-          <a:prstGeom prst="rect">
-            <a:avLst/>
-          </a:prstGeom>
-          <a:noFill/>
-          <a:ln/>
-        </p:spPr>
-        <p:txBody>
-          <a:bodyPr wrap="square" rtlCol="0" anchor="ctr">
-            <a:spAutoFit/>
-          </a:bodyPr>
-          <a:lstStyle/>
-          <a:p>
-            <a:pPr indent="0" marL="0">
-              <a:buNone/>
-            </a:pPr>
-            <a:r>
-              <a:rPr lang="en-US" sz="1250" dirty="0">
-                <a:solidFill>
-                  <a:srgbClr val="1A1A1A"/>
-                </a:solidFill>
-                <a:latin typeface="Calibri" pitchFamily="34" charset="0"/>
-                <a:ea typeface="Calibri" pitchFamily="34" charset="-122"/>
-                <a:cs typeface="Calibri" pitchFamily="34" charset="-120"/>
-              </a:rPr>
-              <a:t>Reception. Laptops at every seat with everyone's URLs loaded.</a:t>
-            </a:r>
-            <a:endParaRPr lang="en-US" sz="1250" dirty="0"/>
+              <a:t>You spent Week 1 loading a museum's catalog. You end watching a catalog become the art.</a:t>
+            </a:r>
+            <a:endParaRPr lang="en-US" sz="1650" dirty="0"/>
           </a:p>
         </p:txBody>
       </p:sp>
@@ -3323,14 +4416,34 @@
       </p:grpSpPr>
       <p:sp>
         <p:nvSpPr>
-          <p:cNvPr id="2" name="Text 0"/>
+          <p:cNvPr id="2" name="Shape 0"/>
+          <p:cNvSpPr/>
+          <p:nvPr/>
+        </p:nvSpPr>
+        <p:spPr>
+          <a:xfrm>
+            <a:off x="0" y="0"/>
+            <a:ext cx="164592" cy="6858000"/>
+          </a:xfrm>
+          <a:prstGeom prst="rect">
+            <a:avLst/>
+          </a:prstGeom>
+          <a:solidFill>
+            <a:srgbClr val="B9852F"/>
+          </a:solidFill>
+          <a:ln/>
+        </p:spPr>
+      </p:sp>
+      <p:sp>
+        <p:nvSpPr>
+          <p:cNvPr id="3" name="Text 1"/>
           <p:cNvSpPr/>
           <p:nvPr/>
         </p:nvSpPr>
         <p:spPr>
           <a:xfrm>
             <a:off x="640080" y="640080"/>
-            <a:ext cx="10058400" cy="731520"/>
+            <a:ext cx="10058400" cy="320040"/>
           </a:xfrm>
           <a:prstGeom prst="rect">
             <a:avLst/>
@@ -3340,6 +4453,47 @@
         </p:spPr>
         <p:txBody>
           <a:bodyPr wrap="square" rtlCol="0" anchor="ctr"/>
+          <a:lstStyle/>
+          <a:p>
+            <a:pPr indent="0" marL="0">
+              <a:buNone/>
+            </a:pPr>
+            <a:r>
+              <a:rPr lang="en-US" sz="1200" b="1" spc="300" kern="0" dirty="0">
+                <a:solidFill>
+                  <a:srgbClr val="B9852F"/>
+                </a:solidFill>
+                <a:latin typeface="Calibri" pitchFamily="34" charset="0"/>
+                <a:ea typeface="Calibri" pitchFamily="34" charset="-122"/>
+                <a:cs typeface="Calibri" pitchFamily="34" charset="-120"/>
+              </a:rPr>
+              <a:t>WEEK 10 · THE MATERIAL</a:t>
+            </a:r>
+            <a:endParaRPr lang="en-US" sz="1200" dirty="0"/>
+          </a:p>
+        </p:txBody>
+      </p:sp>
+      <p:sp>
+        <p:nvSpPr>
+          <p:cNvPr id="4" name="Text 2"/>
+          <p:cNvSpPr/>
+          <p:nvPr/>
+        </p:nvSpPr>
+        <p:spPr>
+          <a:xfrm>
+            <a:off x="640080" y="1005840"/>
+            <a:ext cx="10881360" cy="914400"/>
+          </a:xfrm>
+          <a:prstGeom prst="rect">
+            <a:avLst/>
+          </a:prstGeom>
+          <a:noFill/>
+          <a:ln/>
+        </p:spPr>
+        <p:txBody>
+          <a:bodyPr wrap="square" rtlCol="0" anchor="t">
+            <a:spAutoFit/>
+          </a:bodyPr>
           <a:lstStyle/>
           <a:p>
             <a:pPr indent="0" marL="0">
@@ -3354,7 +4508,7 @@
                 <a:ea typeface="Cambria" pitchFamily="34" charset="-122"/>
                 <a:cs typeface="Cambria" pitchFamily="34" charset="-120"/>
               </a:rPr>
-              <a:t>Reading &amp; homework</a:t>
+              <a:t>What you can do now</a:t>
             </a:r>
             <a:endParaRPr lang="en-US" sz="3000" dirty="0"/>
           </a:p>
@@ -3362,14 +4516,14 @@
       </p:sp>
       <p:sp>
         <p:nvSpPr>
-          <p:cNvPr id="3" name="Shape 1"/>
-          <p:cNvSpPr/>
-          <p:nvPr/>
-        </p:nvSpPr>
-        <p:spPr>
-          <a:xfrm>
-            <a:off x="640080" y="1810512"/>
-            <a:ext cx="219456" cy="219456"/>
+          <p:cNvPr id="5" name="Shape 3"/>
+          <p:cNvSpPr/>
+          <p:nvPr/>
+        </p:nvSpPr>
+        <p:spPr>
+          <a:xfrm>
+            <a:off x="640080" y="2331720"/>
+            <a:ext cx="201168" cy="201168"/>
           </a:xfrm>
           <a:prstGeom prst="ellipse">
             <a:avLst/>
@@ -3382,38 +4536,43 @@
       </p:sp>
       <p:sp>
         <p:nvSpPr>
-          <p:cNvPr id="4" name="Text 2"/>
-          <p:cNvSpPr/>
-          <p:nvPr/>
-        </p:nvSpPr>
-        <p:spPr>
-          <a:xfrm>
-            <a:off x="1051560" y="1737360"/>
-            <a:ext cx="10424160" cy="365760"/>
-          </a:xfrm>
-          <a:prstGeom prst="rect">
-            <a:avLst/>
-          </a:prstGeom>
-          <a:noFill/>
-          <a:ln/>
-        </p:spPr>
-        <p:txBody>
-          <a:bodyPr wrap="square" rtlCol="0" anchor="ctr"/>
+          <p:cNvPr id="6" name="Text 4"/>
+          <p:cNvSpPr/>
+          <p:nvPr/>
+        </p:nvSpPr>
+        <p:spPr>
+          <a:xfrm>
+            <a:off x="1097280" y="2240280"/>
+            <a:ext cx="10607040" cy="813816"/>
+          </a:xfrm>
+          <a:prstGeom prst="rect">
+            <a:avLst/>
+          </a:prstGeom>
+          <a:noFill/>
+          <a:ln/>
+        </p:spPr>
+        <p:txBody>
+          <a:bodyPr wrap="square" rtlCol="0" anchor="t">
+            <a:spAutoFit/>
+          </a:bodyPr>
           <a:lstStyle/>
           <a:p>
             <a:pPr indent="0" marL="0">
-              <a:buNone/>
-            </a:pPr>
-            <a:r>
-              <a:rPr lang="en-US" sz="1500" b="1" dirty="0">
-                <a:solidFill>
-                  <a:srgbClr val="7A3B2E"/>
+              <a:lnSpc>
+                <a:spcPct val="112000"/>
+              </a:lnSpc>
+              <a:buNone/>
+            </a:pPr>
+            <a:r>
+              <a:rPr lang="en-US" sz="1500" dirty="0">
+                <a:solidFill>
+                  <a:srgbClr val="1A1A1A"/>
                 </a:solidFill>
                 <a:latin typeface="Calibri" pitchFamily="34" charset="0"/>
                 <a:ea typeface="Calibri" pitchFamily="34" charset="-122"/>
                 <a:cs typeface="Calibri" pitchFamily="34" charset="-120"/>
               </a:rPr>
-              <a:t>Reading</a:t>
+              <a:t>Read a block of analysis code and say what it does, line by line.</a:t>
             </a:r>
             <a:endParaRPr lang="en-US" sz="1500" dirty="0"/>
           </a:p>
@@ -3421,14 +4580,34 @@
       </p:sp>
       <p:sp>
         <p:nvSpPr>
-          <p:cNvPr id="5" name="Text 3"/>
-          <p:cNvSpPr/>
-          <p:nvPr/>
-        </p:nvSpPr>
-        <p:spPr>
-          <a:xfrm>
-            <a:off x="1051560" y="2121408"/>
-            <a:ext cx="10424160" cy="731520"/>
+          <p:cNvPr id="7" name="Shape 5"/>
+          <p:cNvSpPr/>
+          <p:nvPr/>
+        </p:nvSpPr>
+        <p:spPr>
+          <a:xfrm>
+            <a:off x="640080" y="3145536"/>
+            <a:ext cx="201168" cy="201168"/>
+          </a:xfrm>
+          <a:prstGeom prst="ellipse">
+            <a:avLst/>
+          </a:prstGeom>
+          <a:solidFill>
+            <a:srgbClr val="3F6F5F"/>
+          </a:solidFill>
+          <a:ln/>
+        </p:spPr>
+      </p:sp>
+      <p:sp>
+        <p:nvSpPr>
+          <p:cNvPr id="8" name="Text 6"/>
+          <p:cNvSpPr/>
+          <p:nvPr/>
+        </p:nvSpPr>
+        <p:spPr>
+          <a:xfrm>
+            <a:off x="1097280" y="3054096"/>
+            <a:ext cx="10607040" cy="813816"/>
           </a:xfrm>
           <a:prstGeom prst="rect">
             <a:avLst/>
@@ -3443,10 +4622,13 @@
           <a:lstStyle/>
           <a:p>
             <a:pPr indent="0" marL="0">
-              <a:buNone/>
-            </a:pPr>
-            <a:r>
-              <a:rPr lang="en-US" sz="1400" dirty="0">
+              <a:lnSpc>
+                <a:spcPct val="112000"/>
+              </a:lnSpc>
+              <a:buNone/>
+            </a:pPr>
+            <a:r>
+              <a:rPr lang="en-US" sz="1500" dirty="0">
                 <a:solidFill>
                   <a:srgbClr val="1A1A1A"/>
                 </a:solidFill>
@@ -3454,66 +4636,71 @@
                 <a:ea typeface="Calibri" pitchFamily="34" charset="-122"/>
                 <a:cs typeface="Calibri" pitchFamily="34" charset="-120"/>
               </a:rPr>
-              <a:t>None</a:t>
-            </a:r>
-            <a:endParaRPr lang="en-US" sz="1400" dirty="0"/>
-          </a:p>
-        </p:txBody>
-      </p:sp>
-      <p:sp>
-        <p:nvSpPr>
-          <p:cNvPr id="6" name="Shape 4"/>
-          <p:cNvSpPr/>
-          <p:nvPr/>
-        </p:nvSpPr>
-        <p:spPr>
-          <a:xfrm>
-            <a:off x="640080" y="2953512"/>
-            <a:ext cx="219456" cy="219456"/>
+              <a:t>Ask a tractable question of cultural data and name what it leaves out.</a:t>
+            </a:r>
+            <a:endParaRPr lang="en-US" sz="1500" dirty="0"/>
+          </a:p>
+        </p:txBody>
+      </p:sp>
+      <p:sp>
+        <p:nvSpPr>
+          <p:cNvPr id="9" name="Shape 7"/>
+          <p:cNvSpPr/>
+          <p:nvPr/>
+        </p:nvSpPr>
+        <p:spPr>
+          <a:xfrm>
+            <a:off x="640080" y="3959352"/>
+            <a:ext cx="201168" cy="201168"/>
           </a:xfrm>
           <a:prstGeom prst="ellipse">
             <a:avLst/>
           </a:prstGeom>
           <a:solidFill>
-            <a:srgbClr val="3F6F5F"/>
-          </a:solidFill>
-          <a:ln/>
-        </p:spPr>
-      </p:sp>
-      <p:sp>
-        <p:nvSpPr>
-          <p:cNvPr id="7" name="Text 5"/>
-          <p:cNvSpPr/>
-          <p:nvPr/>
-        </p:nvSpPr>
-        <p:spPr>
-          <a:xfrm>
-            <a:off x="1051560" y="2880360"/>
-            <a:ext cx="10424160" cy="365760"/>
-          </a:xfrm>
-          <a:prstGeom prst="rect">
-            <a:avLst/>
-          </a:prstGeom>
-          <a:noFill/>
-          <a:ln/>
-        </p:spPr>
-        <p:txBody>
-          <a:bodyPr wrap="square" rtlCol="0" anchor="ctr"/>
+            <a:srgbClr val="B9852F"/>
+          </a:solidFill>
+          <a:ln/>
+        </p:spPr>
+      </p:sp>
+      <p:sp>
+        <p:nvSpPr>
+          <p:cNvPr id="10" name="Text 8"/>
+          <p:cNvSpPr/>
+          <p:nvPr/>
+        </p:nvSpPr>
+        <p:spPr>
+          <a:xfrm>
+            <a:off x="1097280" y="3867912"/>
+            <a:ext cx="10607040" cy="813816"/>
+          </a:xfrm>
+          <a:prstGeom prst="rect">
+            <a:avLst/>
+          </a:prstGeom>
+          <a:noFill/>
+          <a:ln/>
+        </p:spPr>
+        <p:txBody>
+          <a:bodyPr wrap="square" rtlCol="0" anchor="t">
+            <a:spAutoFit/>
+          </a:bodyPr>
           <a:lstStyle/>
           <a:p>
             <a:pPr indent="0" marL="0">
-              <a:buNone/>
-            </a:pPr>
-            <a:r>
-              <a:rPr lang="en-US" sz="1500" b="1" dirty="0">
-                <a:solidFill>
-                  <a:srgbClr val="3F6F5F"/>
+              <a:lnSpc>
+                <a:spcPct val="112000"/>
+              </a:lnSpc>
+              <a:buNone/>
+            </a:pPr>
+            <a:r>
+              <a:rPr lang="en-US" sz="1500" dirty="0">
+                <a:solidFill>
+                  <a:srgbClr val="1A1A1A"/>
                 </a:solidFill>
                 <a:latin typeface="Calibri" pitchFamily="34" charset="0"/>
                 <a:ea typeface="Calibri" pitchFamily="34" charset="-122"/>
                 <a:cs typeface="Calibri" pitchFamily="34" charset="-120"/>
               </a:rPr>
-              <a:t>Supplement</a:t>
+              <a:t>Run counting, classification, embeddings, and annotation, and say what each reveals and hides.</a:t>
             </a:r>
             <a:endParaRPr lang="en-US" sz="1500" dirty="0"/>
           </a:p>
@@ -3521,14 +4708,34 @@
       </p:sp>
       <p:sp>
         <p:nvSpPr>
-          <p:cNvPr id="8" name="Text 6"/>
-          <p:cNvSpPr/>
-          <p:nvPr/>
-        </p:nvSpPr>
-        <p:spPr>
-          <a:xfrm>
-            <a:off x="1051560" y="3264408"/>
-            <a:ext cx="10424160" cy="731520"/>
+          <p:cNvPr id="11" name="Shape 9"/>
+          <p:cNvSpPr/>
+          <p:nvPr/>
+        </p:nvSpPr>
+        <p:spPr>
+          <a:xfrm>
+            <a:off x="640080" y="4773168"/>
+            <a:ext cx="201168" cy="201168"/>
+          </a:xfrm>
+          <a:prstGeom prst="ellipse">
+            <a:avLst/>
+          </a:prstGeom>
+          <a:solidFill>
+            <a:srgbClr val="7A3B2E"/>
+          </a:solidFill>
+          <a:ln/>
+        </p:spPr>
+      </p:sp>
+      <p:sp>
+        <p:nvSpPr>
+          <p:cNvPr id="12" name="Text 10"/>
+          <p:cNvSpPr/>
+          <p:nvPr/>
+        </p:nvSpPr>
+        <p:spPr>
+          <a:xfrm>
+            <a:off x="1097280" y="4681728"/>
+            <a:ext cx="10607040" cy="813816"/>
           </a:xfrm>
           <a:prstGeom prst="rect">
             <a:avLst/>
@@ -3543,10 +4750,13 @@
           <a:lstStyle/>
           <a:p>
             <a:pPr indent="0" marL="0">
-              <a:buNone/>
-            </a:pPr>
-            <a:r>
-              <a:rPr lang="en-US" sz="1400" dirty="0">
+              <a:lnSpc>
+                <a:spcPct val="112000"/>
+              </a:lnSpc>
+              <a:buNone/>
+            </a:pPr>
+            <a:r>
+              <a:rPr lang="en-US" sz="1500" dirty="0">
                 <a:solidFill>
                   <a:srgbClr val="1A1A1A"/>
                 </a:solidFill>
@@ -3554,209 +4764,73 @@
                 <a:ea typeface="Calibri" pitchFamily="34" charset="-122"/>
                 <a:cs typeface="Calibri" pitchFamily="34" charset="-120"/>
               </a:rPr>
-              <a:t>Edmond de Belamy; Ridler's Mosaic Virus; Anadol's Unsupervised</a:t>
-            </a:r>
-            <a:endParaRPr lang="en-US" sz="1400" dirty="0"/>
-          </a:p>
-        </p:txBody>
-      </p:sp>
-      <p:sp>
-        <p:nvSpPr>
-          <p:cNvPr id="9" name="Shape 7"/>
-          <p:cNvSpPr/>
-          <p:nvPr/>
-        </p:nvSpPr>
-        <p:spPr>
-          <a:xfrm>
-            <a:off x="640080" y="4096512"/>
-            <a:ext cx="219456" cy="219456"/>
+              <a:t>Shuffle-test a gap. Interrogate a chart, including your own.</a:t>
+            </a:r>
+            <a:endParaRPr lang="en-US" sz="1500" dirty="0"/>
+          </a:p>
+        </p:txBody>
+      </p:sp>
+      <p:sp>
+        <p:nvSpPr>
+          <p:cNvPr id="13" name="Shape 11"/>
+          <p:cNvSpPr/>
+          <p:nvPr/>
+        </p:nvSpPr>
+        <p:spPr>
+          <a:xfrm>
+            <a:off x="640080" y="5586984"/>
+            <a:ext cx="201168" cy="201168"/>
           </a:xfrm>
           <a:prstGeom prst="ellipse">
             <a:avLst/>
           </a:prstGeom>
           <a:solidFill>
-            <a:srgbClr val="B9852F"/>
-          </a:solidFill>
-          <a:ln/>
-        </p:spPr>
-      </p:sp>
-      <p:sp>
-        <p:nvSpPr>
-          <p:cNvPr id="10" name="Text 8"/>
-          <p:cNvSpPr/>
-          <p:nvPr/>
-        </p:nvSpPr>
-        <p:spPr>
-          <a:xfrm>
-            <a:off x="1051560" y="4023360"/>
-            <a:ext cx="10424160" cy="365760"/>
-          </a:xfrm>
-          <a:prstGeom prst="rect">
-            <a:avLst/>
-          </a:prstGeom>
-          <a:noFill/>
-          <a:ln/>
-        </p:spPr>
-        <p:txBody>
-          <a:bodyPr wrap="square" rtlCol="0" anchor="ctr"/>
+            <a:srgbClr val="3F6F5F"/>
+          </a:solidFill>
+          <a:ln/>
+        </p:spPr>
+      </p:sp>
+      <p:sp>
+        <p:nvSpPr>
+          <p:cNvPr id="14" name="Text 12"/>
+          <p:cNvSpPr/>
+          <p:nvPr/>
+        </p:nvSpPr>
+        <p:spPr>
+          <a:xfrm>
+            <a:off x="1097280" y="5495544"/>
+            <a:ext cx="10607040" cy="813816"/>
+          </a:xfrm>
+          <a:prstGeom prst="rect">
+            <a:avLst/>
+          </a:prstGeom>
+          <a:noFill/>
+          <a:ln/>
+        </p:spPr>
+        <p:txBody>
+          <a:bodyPr wrap="square" rtlCol="0" anchor="t">
+            <a:spAutoFit/>
+          </a:bodyPr>
           <a:lstStyle/>
           <a:p>
             <a:pPr indent="0" marL="0">
-              <a:buNone/>
-            </a:pPr>
-            <a:r>
-              <a:rPr lang="en-US" sz="1500" b="1" dirty="0">
-                <a:solidFill>
-                  <a:srgbClr val="B9852F"/>
+              <a:lnSpc>
+                <a:spcPct val="112000"/>
+              </a:lnSpc>
+              <a:buNone/>
+            </a:pPr>
+            <a:r>
+              <a:rPr lang="en-US" sz="1500" dirty="0">
+                <a:solidFill>
+                  <a:srgbClr val="1A1A1A"/>
                 </a:solidFill>
                 <a:latin typeface="Calibri" pitchFamily="34" charset="0"/>
                 <a:ea typeface="Calibri" pitchFamily="34" charset="-122"/>
                 <a:cs typeface="Calibri" pitchFamily="34" charset="-120"/>
               </a:rPr>
-              <a:t>Sketch</a:t>
+              <a:t>The portfolio proves it: notebook, Data Biography, essay, walkthrough.</a:t>
             </a:r>
             <a:endParaRPr lang="en-US" sz="1500" dirty="0"/>
-          </a:p>
-        </p:txBody>
-      </p:sp>
-      <p:sp>
-        <p:nvSpPr>
-          <p:cNvPr id="11" name="Text 9"/>
-          <p:cNvSpPr/>
-          <p:nvPr/>
-        </p:nvSpPr>
-        <p:spPr>
-          <a:xfrm>
-            <a:off x="1051560" y="4407408"/>
-            <a:ext cx="10424160" cy="731520"/>
-          </a:xfrm>
-          <a:prstGeom prst="rect">
-            <a:avLst/>
-          </a:prstGeom>
-          <a:noFill/>
-          <a:ln/>
-        </p:spPr>
-        <p:txBody>
-          <a:bodyPr wrap="square" rtlCol="0" anchor="t">
-            <a:spAutoFit/>
-          </a:bodyPr>
-          <a:lstStyle/>
-          <a:p>
-            <a:pPr indent="0" marL="0">
-              <a:buNone/>
-            </a:pPr>
-            <a:r>
-              <a:rPr lang="en-US" sz="1400" dirty="0">
-                <a:solidFill>
-                  <a:srgbClr val="1A1A1A"/>
-                </a:solidFill>
-                <a:latin typeface="Calibri" pitchFamily="34" charset="0"/>
-                <a:ea typeface="Calibri" pitchFamily="34" charset="-122"/>
-                <a:cs typeface="Calibri" pitchFamily="34" charset="-120"/>
-              </a:rPr>
-              <a:t>Within a week after: a private one-page reflection.</a:t>
-            </a:r>
-            <a:endParaRPr lang="en-US" sz="1400" dirty="0"/>
-          </a:p>
-        </p:txBody>
-      </p:sp>
-      <p:sp>
-        <p:nvSpPr>
-          <p:cNvPr id="12" name="Shape 10"/>
-          <p:cNvSpPr/>
-          <p:nvPr/>
-        </p:nvSpPr>
-        <p:spPr>
-          <a:xfrm>
-            <a:off x="640080" y="5239512"/>
-            <a:ext cx="219456" cy="219456"/>
-          </a:xfrm>
-          <a:prstGeom prst="ellipse">
-            <a:avLst/>
-          </a:prstGeom>
-          <a:solidFill>
-            <a:srgbClr val="7A3B2E"/>
-          </a:solidFill>
-          <a:ln/>
-        </p:spPr>
-      </p:sp>
-      <p:sp>
-        <p:nvSpPr>
-          <p:cNvPr id="13" name="Text 11"/>
-          <p:cNvSpPr/>
-          <p:nvPr/>
-        </p:nvSpPr>
-        <p:spPr>
-          <a:xfrm>
-            <a:off x="1051560" y="5166360"/>
-            <a:ext cx="10424160" cy="365760"/>
-          </a:xfrm>
-          <a:prstGeom prst="rect">
-            <a:avLst/>
-          </a:prstGeom>
-          <a:noFill/>
-          <a:ln/>
-        </p:spPr>
-        <p:txBody>
-          <a:bodyPr wrap="square" rtlCol="0" anchor="ctr"/>
-          <a:lstStyle/>
-          <a:p>
-            <a:pPr indent="0" marL="0">
-              <a:buNone/>
-            </a:pPr>
-            <a:r>
-              <a:rPr lang="en-US" sz="1500" b="1" dirty="0">
-                <a:solidFill>
-                  <a:srgbClr val="7A3B2E"/>
-                </a:solidFill>
-                <a:latin typeface="Calibri" pitchFamily="34" charset="0"/>
-                <a:ea typeface="Calibri" pitchFamily="34" charset="-122"/>
-                <a:cs typeface="Calibri" pitchFamily="34" charset="-120"/>
-              </a:rPr>
-              <a:t>Check (AI closed)</a:t>
-            </a:r>
-            <a:endParaRPr lang="en-US" sz="1500" dirty="0"/>
-          </a:p>
-        </p:txBody>
-      </p:sp>
-      <p:sp>
-        <p:nvSpPr>
-          <p:cNvPr id="14" name="Text 12"/>
-          <p:cNvSpPr/>
-          <p:nvPr/>
-        </p:nvSpPr>
-        <p:spPr>
-          <a:xfrm>
-            <a:off x="1051560" y="5550408"/>
-            <a:ext cx="10424160" cy="731520"/>
-          </a:xfrm>
-          <a:prstGeom prst="rect">
-            <a:avLst/>
-          </a:prstGeom>
-          <a:noFill/>
-          <a:ln/>
-        </p:spPr>
-        <p:txBody>
-          <a:bodyPr wrap="square" rtlCol="0" anchor="t">
-            <a:spAutoFit/>
-          </a:bodyPr>
-          <a:lstStyle/>
-          <a:p>
-            <a:pPr indent="0" marL="0">
-              <a:buNone/>
-            </a:pPr>
-            <a:r>
-              <a:rPr lang="en-US" sz="1400" dirty="0">
-                <a:solidFill>
-                  <a:srgbClr val="1A1A1A"/>
-                </a:solidFill>
-                <a:latin typeface="Calibri" pitchFamily="34" charset="0"/>
-                <a:ea typeface="Calibri" pitchFamily="34" charset="-122"/>
-                <a:cs typeface="Calibri" pitchFamily="34" charset="-120"/>
-              </a:rPr>
-              <a:t>The oral walkthrough (the capstone): how you got your headline result, what it does not show, and how the tools actually work. Plus the workbench intro. (All eight competencies.)</a:t>
-            </a:r>
-            <a:endParaRPr lang="en-US" sz="1400" dirty="0"/>
           </a:p>
         </p:txBody>
       </p:sp>
@@ -3800,8 +4874,8 @@
         </p:nvSpPr>
         <p:spPr>
           <a:xfrm>
-            <a:off x="640080" y="640080"/>
-            <a:ext cx="10058400" cy="320040"/>
+            <a:off x="640080" y="731520"/>
+            <a:ext cx="10058400" cy="731520"/>
           </a:xfrm>
           <a:prstGeom prst="rect">
             <a:avLst/>
@@ -3817,30 +4891,111 @@
               <a:buNone/>
             </a:pPr>
             <a:r>
-              <a:rPr lang="en-US" sz="1300" b="1" spc="300" kern="0" dirty="0">
-                <a:solidFill>
-                  <a:srgbClr val="7A3B2E"/>
+              <a:rPr lang="en-US" sz="3000" b="1" dirty="0">
+                <a:solidFill>
+                  <a:srgbClr val="1A1A1A"/>
+                </a:solidFill>
+                <a:latin typeface="Cambria" pitchFamily="34" charset="0"/>
+                <a:ea typeface="Cambria" pitchFamily="34" charset="-122"/>
+                <a:cs typeface="Cambria" pitchFamily="34" charset="-120"/>
+              </a:rPr>
+              <a:t>Three modes today</a:t>
+            </a:r>
+            <a:endParaRPr lang="en-US" sz="3000" dirty="0"/>
+          </a:p>
+        </p:txBody>
+      </p:sp>
+      <p:sp>
+        <p:nvSpPr>
+          <p:cNvPr id="3" name="Text 1"/>
+          <p:cNvSpPr/>
+          <p:nvPr/>
+        </p:nvSpPr>
+        <p:spPr>
+          <a:xfrm>
+            <a:off x="640080" y="1417320"/>
+            <a:ext cx="10058400" cy="365760"/>
+          </a:xfrm>
+          <a:prstGeom prst="rect">
+            <a:avLst/>
+          </a:prstGeom>
+          <a:noFill/>
+          <a:ln/>
+        </p:spPr>
+        <p:txBody>
+          <a:bodyPr wrap="square" rtlCol="0" anchor="ctr"/>
+          <a:lstStyle/>
+          <a:p>
+            <a:pPr indent="0" marL="0">
+              <a:buNone/>
+            </a:pPr>
+            <a:r>
+              <a:rPr lang="en-US" sz="1400" i="1" dirty="0">
+                <a:solidFill>
+                  <a:srgbClr val="6B6B63"/>
                 </a:solidFill>
                 <a:latin typeface="Calibri" pitchFamily="34" charset="0"/>
                 <a:ea typeface="Calibri" pitchFamily="34" charset="-122"/>
                 <a:cs typeface="Calibri" pitchFamily="34" charset="-120"/>
               </a:rPr>
-              <a:t>HOW THIS WEEK CONNECTS</a:t>
-            </a:r>
-            <a:endParaRPr lang="en-US" sz="1300" dirty="0"/>
-          </a:p>
-        </p:txBody>
-      </p:sp>
-      <p:sp>
-        <p:nvSpPr>
-          <p:cNvPr id="3" name="Text 1"/>
-          <p:cNvSpPr/>
-          <p:nvPr/>
-        </p:nvSpPr>
-        <p:spPr>
-          <a:xfrm>
-            <a:off x="640080" y="987552"/>
-            <a:ext cx="10058400" cy="640080"/>
+              <a:t>about a third of the session each</a:t>
+            </a:r>
+            <a:endParaRPr lang="en-US" sz="1400" dirty="0"/>
+          </a:p>
+        </p:txBody>
+      </p:sp>
+      <p:sp>
+        <p:nvSpPr>
+          <p:cNvPr id="4" name="Shape 2"/>
+          <p:cNvSpPr/>
+          <p:nvPr/>
+        </p:nvSpPr>
+        <p:spPr>
+          <a:xfrm>
+            <a:off x="640080" y="2194560"/>
+            <a:ext cx="3383280" cy="3291840"/>
+          </a:xfrm>
+          <a:prstGeom prst="roundRect">
+            <a:avLst>
+              <a:gd name="adj" fmla="val 3333"/>
+            </a:avLst>
+          </a:prstGeom>
+          <a:solidFill>
+            <a:srgbClr val="F4EEE8"/>
+          </a:solidFill>
+          <a:ln/>
+        </p:spPr>
+      </p:sp>
+      <p:sp>
+        <p:nvSpPr>
+          <p:cNvPr id="5" name="Shape 3"/>
+          <p:cNvSpPr/>
+          <p:nvPr/>
+        </p:nvSpPr>
+        <p:spPr>
+          <a:xfrm>
+            <a:off x="1051560" y="2606040"/>
+            <a:ext cx="548640" cy="548640"/>
+          </a:xfrm>
+          <a:prstGeom prst="ellipse">
+            <a:avLst/>
+          </a:prstGeom>
+          <a:solidFill>
+            <a:srgbClr val="7A3B2E"/>
+          </a:solidFill>
+          <a:ln/>
+        </p:spPr>
+      </p:sp>
+      <p:sp>
+        <p:nvSpPr>
+          <p:cNvPr id="6" name="Text 4"/>
+          <p:cNvSpPr/>
+          <p:nvPr/>
+        </p:nvSpPr>
+        <p:spPr>
+          <a:xfrm>
+            <a:off x="1005840" y="3383280"/>
+            <a:ext cx="2651760" cy="548640"/>
           </a:xfrm>
           <a:prstGeom prst="rect">
             <a:avLst/>
@@ -3856,7 +5011,7 @@
               <a:buNone/>
             </a:pPr>
             <a:r>
-              <a:rPr lang="en-US" sz="2800" b="1" dirty="0">
+              <a:rPr lang="en-US" sz="2100" b="1" dirty="0">
                 <a:solidFill>
                   <a:srgbClr val="1A1A1A"/>
                 </a:solidFill>
@@ -3864,44 +5019,108 @@
                 <a:ea typeface="Cambria" pitchFamily="34" charset="-122"/>
                 <a:cs typeface="Cambria" pitchFamily="34" charset="-120"/>
               </a:rPr>
-              <a:t>The course's through-lines</a:t>
-            </a:r>
-            <a:endParaRPr lang="en-US" sz="2800" dirty="0"/>
-          </a:p>
-        </p:txBody>
-      </p:sp>
-      <p:sp>
-        <p:nvSpPr>
-          <p:cNvPr id="4" name="Shape 2"/>
-          <p:cNvSpPr/>
-          <p:nvPr/>
-        </p:nvSpPr>
-        <p:spPr>
-          <a:xfrm>
-            <a:off x="640080" y="2057400"/>
-            <a:ext cx="457200" cy="457200"/>
+              <a:t>Lecture / demo</a:t>
+            </a:r>
+            <a:endParaRPr lang="en-US" sz="2100" dirty="0"/>
+          </a:p>
+        </p:txBody>
+      </p:sp>
+      <p:sp>
+        <p:nvSpPr>
+          <p:cNvPr id="7" name="Text 5"/>
+          <p:cNvSpPr/>
+          <p:nvPr/>
+        </p:nvSpPr>
+        <p:spPr>
+          <a:xfrm>
+            <a:off x="1005840" y="3977640"/>
+            <a:ext cx="2651760" cy="1371600"/>
+          </a:xfrm>
+          <a:prstGeom prst="rect">
+            <a:avLst/>
+          </a:prstGeom>
+          <a:noFill/>
+          <a:ln/>
+        </p:spPr>
+        <p:txBody>
+          <a:bodyPr wrap="square" rtlCol="0" anchor="t">
+            <a:spAutoFit/>
+          </a:bodyPr>
+          <a:lstStyle/>
+          <a:p>
+            <a:pPr indent="0" marL="0">
+              <a:lnSpc>
+                <a:spcPct val="115000"/>
+              </a:lnSpc>
+              <a:buNone/>
+            </a:pPr>
+            <a:r>
+              <a:rPr lang="en-US" sz="1500" dirty="0">
+                <a:solidFill>
+                  <a:srgbClr val="1A1A1A"/>
+                </a:solidFill>
+                <a:latin typeface="Calibri" pitchFamily="34" charset="0"/>
+                <a:ea typeface="Calibri" pitchFamily="34" charset="-122"/>
+                <a:cs typeface="Calibri" pitchFamily="34" charset="-120"/>
+              </a:rPr>
+              <a:t>A public celebration; the two capstone assessments</a:t>
+            </a:r>
+            <a:endParaRPr lang="en-US" sz="1500" dirty="0"/>
+          </a:p>
+        </p:txBody>
+      </p:sp>
+      <p:sp>
+        <p:nvSpPr>
+          <p:cNvPr id="8" name="Shape 6"/>
+          <p:cNvSpPr/>
+          <p:nvPr/>
+        </p:nvSpPr>
+        <p:spPr>
+          <a:xfrm>
+            <a:off x="4526280" y="2194560"/>
+            <a:ext cx="3383280" cy="3291840"/>
           </a:xfrm>
           <a:prstGeom prst="roundRect">
             <a:avLst>
-              <a:gd name="adj" fmla="val 16000"/>
+              <a:gd name="adj" fmla="val 3333"/>
             </a:avLst>
           </a:prstGeom>
           <a:solidFill>
-            <a:srgbClr val="7A3B2E"/>
-          </a:solidFill>
-          <a:ln/>
-        </p:spPr>
-      </p:sp>
-      <p:sp>
-        <p:nvSpPr>
-          <p:cNvPr id="5" name="Text 3"/>
-          <p:cNvSpPr/>
-          <p:nvPr/>
-        </p:nvSpPr>
-        <p:spPr>
-          <a:xfrm>
-            <a:off x="640080" y="2057400"/>
-            <a:ext cx="457200" cy="457200"/>
+            <a:srgbClr val="F4EEE8"/>
+          </a:solidFill>
+          <a:ln/>
+        </p:spPr>
+      </p:sp>
+      <p:sp>
+        <p:nvSpPr>
+          <p:cNvPr id="9" name="Shape 7"/>
+          <p:cNvSpPr/>
+          <p:nvPr/>
+        </p:nvSpPr>
+        <p:spPr>
+          <a:xfrm>
+            <a:off x="4937760" y="2606040"/>
+            <a:ext cx="548640" cy="548640"/>
+          </a:xfrm>
+          <a:prstGeom prst="ellipse">
+            <a:avLst/>
+          </a:prstGeom>
+          <a:solidFill>
+            <a:srgbClr val="3F6F5F"/>
+          </a:solidFill>
+          <a:ln/>
+        </p:spPr>
+      </p:sp>
+      <p:sp>
+        <p:nvSpPr>
+          <p:cNvPr id="10" name="Text 8"/>
+          <p:cNvSpPr/>
+          <p:nvPr/>
+        </p:nvSpPr>
+        <p:spPr>
+          <a:xfrm>
+            <a:off x="4892040" y="3383280"/>
+            <a:ext cx="2651760" cy="548640"/>
           </a:xfrm>
           <a:prstGeom prst="rect">
             <a:avLst/>
@@ -3913,34 +5132,120 @@
           <a:bodyPr wrap="square" rtlCol="0" anchor="ctr"/>
           <a:lstStyle/>
           <a:p>
-            <a:pPr algn="ctr" indent="0" marL="0">
-              <a:buNone/>
-            </a:pPr>
-            <a:r>
-              <a:rPr lang="en-US" sz="2000" b="1" dirty="0">
-                <a:solidFill>
-                  <a:srgbClr val="FFFFFF"/>
+            <a:pPr indent="0" marL="0">
+              <a:buNone/>
+            </a:pPr>
+            <a:r>
+              <a:rPr lang="en-US" sz="2100" b="1" dirty="0">
+                <a:solidFill>
+                  <a:srgbClr val="1A1A1A"/>
                 </a:solidFill>
                 <a:latin typeface="Cambria" pitchFamily="34" charset="0"/>
                 <a:ea typeface="Cambria" pitchFamily="34" charset="-122"/>
                 <a:cs typeface="Cambria" pitchFamily="34" charset="-120"/>
               </a:rPr>
-              <a:t>1</a:t>
-            </a:r>
-            <a:endParaRPr lang="en-US" sz="2000" dirty="0"/>
-          </a:p>
-        </p:txBody>
-      </p:sp>
-      <p:sp>
-        <p:nvSpPr>
-          <p:cNvPr id="6" name="Text 4"/>
-          <p:cNvSpPr/>
-          <p:nvPr/>
-        </p:nvSpPr>
-        <p:spPr>
-          <a:xfrm>
-            <a:off x="1371600" y="2020824"/>
-            <a:ext cx="10332720" cy="411480"/>
+              <a:t>Workshop</a:t>
+            </a:r>
+            <a:endParaRPr lang="en-US" sz="2100" dirty="0"/>
+          </a:p>
+        </p:txBody>
+      </p:sp>
+      <p:sp>
+        <p:nvSpPr>
+          <p:cNvPr id="11" name="Text 9"/>
+          <p:cNvSpPr/>
+          <p:nvPr/>
+        </p:nvSpPr>
+        <p:spPr>
+          <a:xfrm>
+            <a:off x="4892040" y="3977640"/>
+            <a:ext cx="2651760" cy="1371600"/>
+          </a:xfrm>
+          <a:prstGeom prst="rect">
+            <a:avLst/>
+          </a:prstGeom>
+          <a:noFill/>
+          <a:ln/>
+        </p:spPr>
+        <p:txBody>
+          <a:bodyPr wrap="square" rtlCol="0" anchor="t">
+            <a:spAutoFit/>
+          </a:bodyPr>
+          <a:lstStyle/>
+          <a:p>
+            <a:pPr indent="0" marL="0">
+              <a:lnSpc>
+                <a:spcPct val="115000"/>
+              </a:lnSpc>
+              <a:buNone/>
+            </a:pPr>
+            <a:r>
+              <a:rPr lang="en-US" sz="1500" dirty="0">
+                <a:solidFill>
+                  <a:srgbClr val="1A1A1A"/>
+                </a:solidFill>
+                <a:latin typeface="Calibri" pitchFamily="34" charset="0"/>
+                <a:ea typeface="Calibri" pitchFamily="34" charset="-122"/>
+                <a:cs typeface="Calibri" pitchFamily="34" charset="-120"/>
+              </a:rPr>
+              <a:t>Build hands-on on your own data.</a:t>
+            </a:r>
+            <a:endParaRPr lang="en-US" sz="1500" dirty="0"/>
+          </a:p>
+        </p:txBody>
+      </p:sp>
+      <p:sp>
+        <p:nvSpPr>
+          <p:cNvPr id="12" name="Shape 10"/>
+          <p:cNvSpPr/>
+          <p:nvPr/>
+        </p:nvSpPr>
+        <p:spPr>
+          <a:xfrm>
+            <a:off x="8412480" y="2194560"/>
+            <a:ext cx="3383280" cy="3291840"/>
+          </a:xfrm>
+          <a:prstGeom prst="roundRect">
+            <a:avLst>
+              <a:gd name="adj" fmla="val 3333"/>
+            </a:avLst>
+          </a:prstGeom>
+          <a:solidFill>
+            <a:srgbClr val="F4EEE8"/>
+          </a:solidFill>
+          <a:ln/>
+        </p:spPr>
+      </p:sp>
+      <p:sp>
+        <p:nvSpPr>
+          <p:cNvPr id="13" name="Shape 11"/>
+          <p:cNvSpPr/>
+          <p:nvPr/>
+        </p:nvSpPr>
+        <p:spPr>
+          <a:xfrm>
+            <a:off x="8823960" y="2606040"/>
+            <a:ext cx="548640" cy="548640"/>
+          </a:xfrm>
+          <a:prstGeom prst="ellipse">
+            <a:avLst/>
+          </a:prstGeom>
+          <a:solidFill>
+            <a:srgbClr val="B9852F"/>
+          </a:solidFill>
+          <a:ln/>
+        </p:spPr>
+      </p:sp>
+      <p:sp>
+        <p:nvSpPr>
+          <p:cNvPr id="14" name="Text 12"/>
+          <p:cNvSpPr/>
+          <p:nvPr/>
+        </p:nvSpPr>
+        <p:spPr>
+          <a:xfrm>
+            <a:off x="8778240" y="3383280"/>
+            <a:ext cx="2651760" cy="548640"/>
           </a:xfrm>
           <a:prstGeom prst="rect">
             <a:avLst/>
@@ -3956,30 +5261,30 @@
               <a:buNone/>
             </a:pPr>
             <a:r>
-              <a:rPr lang="en-US" sz="1900" b="1" dirty="0">
-                <a:solidFill>
-                  <a:srgbClr val="7A3B2E"/>
+              <a:rPr lang="en-US" sz="2100" b="1" dirty="0">
+                <a:solidFill>
+                  <a:srgbClr val="1A1A1A"/>
                 </a:solidFill>
                 <a:latin typeface="Cambria" pitchFamily="34" charset="0"/>
                 <a:ea typeface="Cambria" pitchFamily="34" charset="-122"/>
                 <a:cs typeface="Cambria" pitchFamily="34" charset="-120"/>
               </a:rPr>
-              <a:t>Whose data, whose authorship</a:t>
-            </a:r>
-            <a:endParaRPr lang="en-US" sz="1900" dirty="0"/>
-          </a:p>
-        </p:txBody>
-      </p:sp>
-      <p:sp>
-        <p:nvSpPr>
-          <p:cNvPr id="7" name="Text 5"/>
-          <p:cNvSpPr/>
-          <p:nvPr/>
-        </p:nvSpPr>
-        <p:spPr>
-          <a:xfrm>
-            <a:off x="1371600" y="2441448"/>
-            <a:ext cx="10332720" cy="914400"/>
+              <a:t>Discussion</a:t>
+            </a:r>
+            <a:endParaRPr lang="en-US" sz="2100" dirty="0"/>
+          </a:p>
+        </p:txBody>
+      </p:sp>
+      <p:sp>
+        <p:nvSpPr>
+          <p:cNvPr id="15" name="Text 13"/>
+          <p:cNvSpPr/>
+          <p:nvPr/>
+        </p:nvSpPr>
+        <p:spPr>
+          <a:xfrm>
+            <a:off x="8778240" y="3977640"/>
+            <a:ext cx="2651760" cy="1371600"/>
           </a:xfrm>
           <a:prstGeom prst="rect">
             <a:avLst/>
@@ -3995,12 +5300,12 @@
           <a:p>
             <a:pPr indent="0" marL="0">
               <a:lnSpc>
-                <a:spcPct val="112000"/>
+                <a:spcPct val="115000"/>
               </a:lnSpc>
               <a:buNone/>
             </a:pPr>
             <a:r>
-              <a:rPr lang="en-US" sz="1450" dirty="0">
+              <a:rPr lang="en-US" sz="1500" dirty="0">
                 <a:solidFill>
                   <a:srgbClr val="1A1A1A"/>
                 </a:solidFill>
@@ -4008,297 +5313,9 @@
                 <a:ea typeface="Calibri" pitchFamily="34" charset="-122"/>
                 <a:cs typeface="Calibri" pitchFamily="34" charset="-120"/>
               </a:rPr>
-              <a:t>The art triptych, de Belamy to Ridler to Anadol: who decided what went in?</a:t>
-            </a:r>
-            <a:endParaRPr lang="en-US" sz="1450" dirty="0"/>
-          </a:p>
-        </p:txBody>
-      </p:sp>
-      <p:sp>
-        <p:nvSpPr>
-          <p:cNvPr id="8" name="Shape 6"/>
-          <p:cNvSpPr/>
-          <p:nvPr/>
-        </p:nvSpPr>
-        <p:spPr>
-          <a:xfrm>
-            <a:off x="640080" y="3520440"/>
-            <a:ext cx="457200" cy="457200"/>
-          </a:xfrm>
-          <a:prstGeom prst="roundRect">
-            <a:avLst>
-              <a:gd name="adj" fmla="val 16000"/>
-            </a:avLst>
-          </a:prstGeom>
-          <a:solidFill>
-            <a:srgbClr val="3F6F5F"/>
-          </a:solidFill>
-          <a:ln/>
-        </p:spPr>
-      </p:sp>
-      <p:sp>
-        <p:nvSpPr>
-          <p:cNvPr id="9" name="Text 7"/>
-          <p:cNvSpPr/>
-          <p:nvPr/>
-        </p:nvSpPr>
-        <p:spPr>
-          <a:xfrm>
-            <a:off x="640080" y="3520440"/>
-            <a:ext cx="457200" cy="457200"/>
-          </a:xfrm>
-          <a:prstGeom prst="rect">
-            <a:avLst/>
-          </a:prstGeom>
-          <a:noFill/>
-          <a:ln/>
-        </p:spPr>
-        <p:txBody>
-          <a:bodyPr wrap="square" rtlCol="0" anchor="ctr"/>
-          <a:lstStyle/>
-          <a:p>
-            <a:pPr algn="ctr" indent="0" marL="0">
-              <a:buNone/>
-            </a:pPr>
-            <a:r>
-              <a:rPr lang="en-US" sz="2000" b="1" dirty="0">
-                <a:solidFill>
-                  <a:srgbClr val="FFFFFF"/>
-                </a:solidFill>
-                <a:latin typeface="Cambria" pitchFamily="34" charset="0"/>
-                <a:ea typeface="Cambria" pitchFamily="34" charset="-122"/>
-                <a:cs typeface="Cambria" pitchFamily="34" charset="-120"/>
-              </a:rPr>
-              <a:t>2</a:t>
-            </a:r>
-            <a:endParaRPr lang="en-US" sz="2000" dirty="0"/>
-          </a:p>
-        </p:txBody>
-      </p:sp>
-      <p:sp>
-        <p:nvSpPr>
-          <p:cNvPr id="10" name="Text 8"/>
-          <p:cNvSpPr/>
-          <p:nvPr/>
-        </p:nvSpPr>
-        <p:spPr>
-          <a:xfrm>
-            <a:off x="1371600" y="3483864"/>
-            <a:ext cx="10332720" cy="411480"/>
-          </a:xfrm>
-          <a:prstGeom prst="rect">
-            <a:avLst/>
-          </a:prstGeom>
-          <a:noFill/>
-          <a:ln/>
-        </p:spPr>
-        <p:txBody>
-          <a:bodyPr wrap="square" rtlCol="0" anchor="ctr"/>
-          <a:lstStyle/>
-          <a:p>
-            <a:pPr indent="0" marL="0">
-              <a:buNone/>
-            </a:pPr>
-            <a:r>
-              <a:rPr lang="en-US" sz="1900" b="1" dirty="0">
-                <a:solidFill>
-                  <a:srgbClr val="3F6F5F"/>
-                </a:solidFill>
-                <a:latin typeface="Cambria" pitchFamily="34" charset="0"/>
-                <a:ea typeface="Cambria" pitchFamily="34" charset="-122"/>
-                <a:cs typeface="Cambria" pitchFamily="34" charset="-120"/>
-              </a:rPr>
-              <a:t>Understand, not commission</a:t>
-            </a:r>
-            <a:endParaRPr lang="en-US" sz="1900" dirty="0"/>
-          </a:p>
-        </p:txBody>
-      </p:sp>
-      <p:sp>
-        <p:nvSpPr>
-          <p:cNvPr id="11" name="Text 9"/>
-          <p:cNvSpPr/>
-          <p:nvPr/>
-        </p:nvSpPr>
-        <p:spPr>
-          <a:xfrm>
-            <a:off x="1371600" y="3904488"/>
-            <a:ext cx="10332720" cy="914400"/>
-          </a:xfrm>
-          <a:prstGeom prst="rect">
-            <a:avLst/>
-          </a:prstGeom>
-          <a:noFill/>
-          <a:ln/>
-        </p:spPr>
-        <p:txBody>
-          <a:bodyPr wrap="square" rtlCol="0" anchor="t">
-            <a:spAutoFit/>
-          </a:bodyPr>
-          <a:lstStyle/>
-          <a:p>
-            <a:pPr indent="0" marL="0">
-              <a:lnSpc>
-                <a:spcPct val="112000"/>
-              </a:lnSpc>
-              <a:buNone/>
-            </a:pPr>
-            <a:r>
-              <a:rPr lang="en-US" sz="1450" dirty="0">
-                <a:solidFill>
-                  <a:srgbClr val="1A1A1A"/>
-                </a:solidFill>
-                <a:latin typeface="Calibri" pitchFamily="34" charset="0"/>
-                <a:ea typeface="Calibri" pitchFamily="34" charset="-122"/>
-                <a:cs typeface="Calibri" pitchFamily="34" charset="-120"/>
-              </a:rPr>
-              <a:t>The oral walkthrough an AI cannot do for you.</a:t>
-            </a:r>
-            <a:endParaRPr lang="en-US" sz="1450" dirty="0"/>
-          </a:p>
-        </p:txBody>
-      </p:sp>
-      <p:sp>
-        <p:nvSpPr>
-          <p:cNvPr id="12" name="Shape 10"/>
-          <p:cNvSpPr/>
-          <p:nvPr/>
-        </p:nvSpPr>
-        <p:spPr>
-          <a:xfrm>
-            <a:off x="640080" y="4983480"/>
-            <a:ext cx="457200" cy="457200"/>
-          </a:xfrm>
-          <a:prstGeom prst="roundRect">
-            <a:avLst>
-              <a:gd name="adj" fmla="val 16000"/>
-            </a:avLst>
-          </a:prstGeom>
-          <a:solidFill>
-            <a:srgbClr val="B9852F"/>
-          </a:solidFill>
-          <a:ln/>
-        </p:spPr>
-      </p:sp>
-      <p:sp>
-        <p:nvSpPr>
-          <p:cNvPr id="13" name="Text 11"/>
-          <p:cNvSpPr/>
-          <p:nvPr/>
-        </p:nvSpPr>
-        <p:spPr>
-          <a:xfrm>
-            <a:off x="640080" y="4983480"/>
-            <a:ext cx="457200" cy="457200"/>
-          </a:xfrm>
-          <a:prstGeom prst="rect">
-            <a:avLst/>
-          </a:prstGeom>
-          <a:noFill/>
-          <a:ln/>
-        </p:spPr>
-        <p:txBody>
-          <a:bodyPr wrap="square" rtlCol="0" anchor="ctr"/>
-          <a:lstStyle/>
-          <a:p>
-            <a:pPr algn="ctr" indent="0" marL="0">
-              <a:buNone/>
-            </a:pPr>
-            <a:r>
-              <a:rPr lang="en-US" sz="2000" b="1" dirty="0">
-                <a:solidFill>
-                  <a:srgbClr val="FFFFFF"/>
-                </a:solidFill>
-                <a:latin typeface="Cambria" pitchFamily="34" charset="0"/>
-                <a:ea typeface="Cambria" pitchFamily="34" charset="-122"/>
-                <a:cs typeface="Cambria" pitchFamily="34" charset="-120"/>
-              </a:rPr>
-              <a:t>3</a:t>
-            </a:r>
-            <a:endParaRPr lang="en-US" sz="2000" dirty="0"/>
-          </a:p>
-        </p:txBody>
-      </p:sp>
-      <p:sp>
-        <p:nvSpPr>
-          <p:cNvPr id="14" name="Text 12"/>
-          <p:cNvSpPr/>
-          <p:nvPr/>
-        </p:nvSpPr>
-        <p:spPr>
-          <a:xfrm>
-            <a:off x="1371600" y="4946904"/>
-            <a:ext cx="10332720" cy="411480"/>
-          </a:xfrm>
-          <a:prstGeom prst="rect">
-            <a:avLst/>
-          </a:prstGeom>
-          <a:noFill/>
-          <a:ln/>
-        </p:spPr>
-        <p:txBody>
-          <a:bodyPr wrap="square" rtlCol="0" anchor="ctr"/>
-          <a:lstStyle/>
-          <a:p>
-            <a:pPr indent="0" marL="0">
-              <a:buNone/>
-            </a:pPr>
-            <a:r>
-              <a:rPr lang="en-US" sz="1900" b="1" dirty="0">
-                <a:solidFill>
-                  <a:srgbClr val="B9852F"/>
-                </a:solidFill>
-                <a:latin typeface="Cambria" pitchFamily="34" charset="0"/>
-                <a:ea typeface="Cambria" pitchFamily="34" charset="-122"/>
-                <a:cs typeface="Cambria" pitchFamily="34" charset="-120"/>
-              </a:rPr>
-              <a:t>All threads converge</a:t>
-            </a:r>
-            <a:endParaRPr lang="en-US" sz="1900" dirty="0"/>
-          </a:p>
-        </p:txBody>
-      </p:sp>
-      <p:sp>
-        <p:nvSpPr>
-          <p:cNvPr id="15" name="Text 13"/>
-          <p:cNvSpPr/>
-          <p:nvPr/>
-        </p:nvSpPr>
-        <p:spPr>
-          <a:xfrm>
-            <a:off x="1371600" y="5367528"/>
-            <a:ext cx="10332720" cy="914400"/>
-          </a:xfrm>
-          <a:prstGeom prst="rect">
-            <a:avLst/>
-          </a:prstGeom>
-          <a:noFill/>
-          <a:ln/>
-        </p:spPr>
-        <p:txBody>
-          <a:bodyPr wrap="square" rtlCol="0" anchor="t">
-            <a:spAutoFit/>
-          </a:bodyPr>
-          <a:lstStyle/>
-          <a:p>
-            <a:pPr indent="0" marL="0">
-              <a:lnSpc>
-                <a:spcPct val="112000"/>
-              </a:lnSpc>
-              <a:buNone/>
-            </a:pPr>
-            <a:r>
-              <a:rPr lang="en-US" sz="1450" dirty="0">
-                <a:solidFill>
-                  <a:srgbClr val="1A1A1A"/>
-                </a:solidFill>
-                <a:latin typeface="Calibri" pitchFamily="34" charset="0"/>
-                <a:ea typeface="Calibri" pitchFamily="34" charset="-122"/>
-                <a:cs typeface="Calibri" pitchFamily="34" charset="-120"/>
-              </a:rPr>
-              <a:t>You started loading a museum's data; you end watching it become the art.</a:t>
-            </a:r>
-            <a:endParaRPr lang="en-US" sz="1450" dirty="0"/>
+              <a:t>Interrogate the study, debate it, or critique each other's work.</a:t>
+            </a:r>
+            <a:endParaRPr lang="en-US" sz="1500" dirty="0"/>
           </a:p>
         </p:txBody>
       </p:sp>
@@ -4316,7 +5333,7 @@
     <p:bg>
       <p:bgPr>
         <a:solidFill>
-          <a:srgbClr val="4E261D"/>
+          <a:srgbClr val="FFFFFF"/>
         </a:solidFill>
       </p:bgPr>
     </p:bg>
@@ -4342,8 +5359,8 @@
         </p:nvSpPr>
         <p:spPr>
           <a:xfrm>
-            <a:off x="640080" y="1005840"/>
-            <a:ext cx="8229600" cy="320040"/>
+            <a:off x="640080" y="640080"/>
+            <a:ext cx="10058400" cy="731520"/>
           </a:xfrm>
           <a:prstGeom prst="rect">
             <a:avLst/>
@@ -4359,30 +5376,466 @@
               <a:buNone/>
             </a:pPr>
             <a:r>
-              <a:rPr lang="en-US" sz="1300" b="1" spc="300" kern="0" dirty="0">
-                <a:solidFill>
-                  <a:srgbClr val="B9852F"/>
+              <a:rPr lang="en-US" sz="3000" b="1" dirty="0">
+                <a:solidFill>
+                  <a:srgbClr val="1A1A1A"/>
+                </a:solidFill>
+                <a:latin typeface="Cambria" pitchFamily="34" charset="0"/>
+                <a:ea typeface="Cambria" pitchFamily="34" charset="-122"/>
+                <a:cs typeface="Cambria" pitchFamily="34" charset="-120"/>
+              </a:rPr>
+              <a:t>The session</a:t>
+            </a:r>
+            <a:endParaRPr lang="en-US" sz="3000" dirty="0"/>
+          </a:p>
+        </p:txBody>
+      </p:sp>
+      <p:sp>
+        <p:nvSpPr>
+          <p:cNvPr id="3" name="Shape 1"/>
+          <p:cNvSpPr/>
+          <p:nvPr/>
+        </p:nvSpPr>
+        <p:spPr>
+          <a:xfrm>
+            <a:off x="640080" y="1572768"/>
+            <a:ext cx="868680" cy="457200"/>
+          </a:xfrm>
+          <a:prstGeom prst="roundRect">
+            <a:avLst>
+              <a:gd name="adj" fmla="val 12000"/>
+            </a:avLst>
+          </a:prstGeom>
+          <a:solidFill>
+            <a:srgbClr val="7A3B2E"/>
+          </a:solidFill>
+          <a:ln/>
+        </p:spPr>
+      </p:sp>
+      <p:sp>
+        <p:nvSpPr>
+          <p:cNvPr id="4" name="Text 2"/>
+          <p:cNvSpPr/>
+          <p:nvPr/>
+        </p:nvSpPr>
+        <p:spPr>
+          <a:xfrm>
+            <a:off x="640080" y="1572768"/>
+            <a:ext cx="868680" cy="457200"/>
+          </a:xfrm>
+          <a:prstGeom prst="rect">
+            <a:avLst/>
+          </a:prstGeom>
+          <a:noFill/>
+          <a:ln/>
+        </p:spPr>
+        <p:txBody>
+          <a:bodyPr wrap="square" rtlCol="0" anchor="ctr"/>
+          <a:lstStyle/>
+          <a:p>
+            <a:pPr algn="ctr" indent="0" marL="0">
+              <a:buNone/>
+            </a:pPr>
+            <a:r>
+              <a:rPr lang="en-US" sz="1100" b="1" dirty="0">
+                <a:solidFill>
+                  <a:srgbClr val="FFFFFF"/>
                 </a:solidFill>
                 <a:latin typeface="Calibri" pitchFamily="34" charset="0"/>
                 <a:ea typeface="Calibri" pitchFamily="34" charset="-122"/>
                 <a:cs typeface="Calibri" pitchFamily="34" charset="-120"/>
               </a:rPr>
-              <a:t>THE CHECK, AI CLOSED</a:t>
-            </a:r>
-            <a:endParaRPr lang="en-US" sz="1300" dirty="0"/>
-          </a:p>
-        </p:txBody>
-      </p:sp>
-      <p:sp>
-        <p:nvSpPr>
-          <p:cNvPr id="3" name="Text 1"/>
-          <p:cNvSpPr/>
-          <p:nvPr/>
-        </p:nvSpPr>
-        <p:spPr>
-          <a:xfrm>
-            <a:off x="640080" y="1645920"/>
-            <a:ext cx="8686800" cy="3108960"/>
+              <a:t>0:00</a:t>
+            </a:r>
+            <a:endParaRPr lang="en-US" sz="1100" dirty="0"/>
+          </a:p>
+        </p:txBody>
+      </p:sp>
+      <p:sp>
+        <p:nvSpPr>
+          <p:cNvPr id="5" name="Text 3"/>
+          <p:cNvSpPr/>
+          <p:nvPr/>
+        </p:nvSpPr>
+        <p:spPr>
+          <a:xfrm>
+            <a:off x="1691640" y="1554480"/>
+            <a:ext cx="9646920" cy="566928"/>
+          </a:xfrm>
+          <a:prstGeom prst="rect">
+            <a:avLst/>
+          </a:prstGeom>
+          <a:noFill/>
+          <a:ln/>
+        </p:spPr>
+        <p:txBody>
+          <a:bodyPr wrap="square" rtlCol="0" anchor="ctr">
+            <a:spAutoFit/>
+          </a:bodyPr>
+          <a:lstStyle/>
+          <a:p>
+            <a:pPr indent="0" marL="0">
+              <a:buNone/>
+            </a:pPr>
+            <a:r>
+              <a:rPr lang="en-US" sz="1250" dirty="0">
+                <a:solidFill>
+                  <a:srgbClr val="1A1A1A"/>
+                </a:solidFill>
+                <a:latin typeface="Calibri" pitchFamily="34" charset="0"/>
+                <a:ea typeface="Calibri" pitchFamily="34" charset="-122"/>
+                <a:cs typeface="Calibri" pitchFamily="34" charset="-120"/>
+              </a:rPr>
+              <a:t>Welcome. This is a show, not a defense. The closing Look at This.</a:t>
+            </a:r>
+            <a:endParaRPr lang="en-US" sz="1250" dirty="0"/>
+          </a:p>
+        </p:txBody>
+      </p:sp>
+      <p:sp>
+        <p:nvSpPr>
+          <p:cNvPr id="6" name="Shape 4"/>
+          <p:cNvSpPr/>
+          <p:nvPr/>
+        </p:nvSpPr>
+        <p:spPr>
+          <a:xfrm>
+            <a:off x="640080" y="2139696"/>
+            <a:ext cx="868680" cy="457200"/>
+          </a:xfrm>
+          <a:prstGeom prst="roundRect">
+            <a:avLst>
+              <a:gd name="adj" fmla="val 12000"/>
+            </a:avLst>
+          </a:prstGeom>
+          <a:solidFill>
+            <a:srgbClr val="7A3B2E"/>
+          </a:solidFill>
+          <a:ln/>
+        </p:spPr>
+      </p:sp>
+      <p:sp>
+        <p:nvSpPr>
+          <p:cNvPr id="7" name="Text 5"/>
+          <p:cNvSpPr/>
+          <p:nvPr/>
+        </p:nvSpPr>
+        <p:spPr>
+          <a:xfrm>
+            <a:off x="640080" y="2139696"/>
+            <a:ext cx="868680" cy="457200"/>
+          </a:xfrm>
+          <a:prstGeom prst="rect">
+            <a:avLst/>
+          </a:prstGeom>
+          <a:noFill/>
+          <a:ln/>
+        </p:spPr>
+        <p:txBody>
+          <a:bodyPr wrap="square" rtlCol="0" anchor="ctr"/>
+          <a:lstStyle/>
+          <a:p>
+            <a:pPr algn="ctr" indent="0" marL="0">
+              <a:buNone/>
+            </a:pPr>
+            <a:r>
+              <a:rPr lang="en-US" sz="1100" b="1" dirty="0">
+                <a:solidFill>
+                  <a:srgbClr val="FFFFFF"/>
+                </a:solidFill>
+                <a:latin typeface="Calibri" pitchFamily="34" charset="0"/>
+                <a:ea typeface="Calibri" pitchFamily="34" charset="-122"/>
+                <a:cs typeface="Calibri" pitchFamily="34" charset="-120"/>
+              </a:rPr>
+              <a:t>0:10</a:t>
+            </a:r>
+            <a:endParaRPr lang="en-US" sz="1100" dirty="0"/>
+          </a:p>
+        </p:txBody>
+      </p:sp>
+      <p:sp>
+        <p:nvSpPr>
+          <p:cNvPr id="8" name="Text 6"/>
+          <p:cNvSpPr/>
+          <p:nvPr/>
+        </p:nvSpPr>
+        <p:spPr>
+          <a:xfrm>
+            <a:off x="1691640" y="2121408"/>
+            <a:ext cx="9646920" cy="566928"/>
+          </a:xfrm>
+          <a:prstGeom prst="rect">
+            <a:avLst/>
+          </a:prstGeom>
+          <a:noFill/>
+          <a:ln/>
+        </p:spPr>
+        <p:txBody>
+          <a:bodyPr wrap="square" rtlCol="0" anchor="ctr">
+            <a:spAutoFit/>
+          </a:bodyPr>
+          <a:lstStyle/>
+          <a:p>
+            <a:pPr indent="0" marL="0">
+              <a:buNone/>
+            </a:pPr>
+            <a:r>
+              <a:rPr lang="en-US" sz="1250" dirty="0">
+                <a:solidFill>
+                  <a:srgbClr val="1A1A1A"/>
+                </a:solidFill>
+                <a:latin typeface="Calibri" pitchFamily="34" charset="0"/>
+                <a:ea typeface="Calibri" pitchFamily="34" charset="-122"/>
+                <a:cs typeface="Calibri" pitchFamily="34" charset="-120"/>
+              </a:rPr>
+              <a:t>Presentations, 4–5 min each: corpus, headline finding, one surprise. Live URL projected.</a:t>
+            </a:r>
+            <a:endParaRPr lang="en-US" sz="1250" dirty="0"/>
+          </a:p>
+        </p:txBody>
+      </p:sp>
+      <p:sp>
+        <p:nvSpPr>
+          <p:cNvPr id="9" name="Shape 7"/>
+          <p:cNvSpPr/>
+          <p:nvPr/>
+        </p:nvSpPr>
+        <p:spPr>
+          <a:xfrm>
+            <a:off x="640080" y="2706624"/>
+            <a:ext cx="868680" cy="457200"/>
+          </a:xfrm>
+          <a:prstGeom prst="roundRect">
+            <a:avLst>
+              <a:gd name="adj" fmla="val 12000"/>
+            </a:avLst>
+          </a:prstGeom>
+          <a:solidFill>
+            <a:srgbClr val="7A3B2E"/>
+          </a:solidFill>
+          <a:ln/>
+        </p:spPr>
+      </p:sp>
+      <p:sp>
+        <p:nvSpPr>
+          <p:cNvPr id="10" name="Text 8"/>
+          <p:cNvSpPr/>
+          <p:nvPr/>
+        </p:nvSpPr>
+        <p:spPr>
+          <a:xfrm>
+            <a:off x="640080" y="2706624"/>
+            <a:ext cx="868680" cy="457200"/>
+          </a:xfrm>
+          <a:prstGeom prst="rect">
+            <a:avLst/>
+          </a:prstGeom>
+          <a:noFill/>
+          <a:ln/>
+        </p:spPr>
+        <p:txBody>
+          <a:bodyPr wrap="square" rtlCol="0" anchor="ctr"/>
+          <a:lstStyle/>
+          <a:p>
+            <a:pPr algn="ctr" indent="0" marL="0">
+              <a:buNone/>
+            </a:pPr>
+            <a:r>
+              <a:rPr lang="en-US" sz="1100" b="1" dirty="0">
+                <a:solidFill>
+                  <a:srgbClr val="FFFFFF"/>
+                </a:solidFill>
+                <a:latin typeface="Calibri" pitchFamily="34" charset="0"/>
+                <a:ea typeface="Calibri" pitchFamily="34" charset="-122"/>
+                <a:cs typeface="Calibri" pitchFamily="34" charset="-120"/>
+              </a:rPr>
+              <a:t>1:30</a:t>
+            </a:r>
+            <a:endParaRPr lang="en-US" sz="1100" dirty="0"/>
+          </a:p>
+        </p:txBody>
+      </p:sp>
+      <p:sp>
+        <p:nvSpPr>
+          <p:cNvPr id="11" name="Text 9"/>
+          <p:cNvSpPr/>
+          <p:nvPr/>
+        </p:nvSpPr>
+        <p:spPr>
+          <a:xfrm>
+            <a:off x="1691640" y="2688336"/>
+            <a:ext cx="9646920" cy="566928"/>
+          </a:xfrm>
+          <a:prstGeom prst="rect">
+            <a:avLst/>
+          </a:prstGeom>
+          <a:noFill/>
+          <a:ln/>
+        </p:spPr>
+        <p:txBody>
+          <a:bodyPr wrap="square" rtlCol="0" anchor="ctr">
+            <a:spAutoFit/>
+          </a:bodyPr>
+          <a:lstStyle/>
+          <a:p>
+            <a:pPr indent="0" marL="0">
+              <a:buNone/>
+            </a:pPr>
+            <a:r>
+              <a:rPr lang="en-US" sz="1250" dirty="0">
+                <a:solidFill>
+                  <a:srgbClr val="1A1A1A"/>
+                </a:solidFill>
+                <a:latin typeface="Calibri" pitchFamily="34" charset="0"/>
+                <a:ea typeface="Calibri" pitchFamily="34" charset="-122"/>
+                <a:cs typeface="Calibri" pitchFamily="34" charset="-120"/>
+              </a:rPr>
+              <a:t>Reception. Laptops at every seat with everyone's URLs loaded.</a:t>
+            </a:r>
+            <a:endParaRPr lang="en-US" sz="1250" dirty="0"/>
+          </a:p>
+        </p:txBody>
+      </p:sp>
+    </p:spTree>
+  </p:cSld>
+  <p:clrMapOvr>
+    <a:masterClrMapping/>
+  </p:clrMapOvr>
+</p:sld>
+</file>
+
+<file path=ppt/slides/slide9.xml><?xml version="1.0" encoding="utf-8"?>
+<p:sld xmlns:a="http://schemas.openxmlformats.org/drawingml/2006/main" xmlns:r="http://schemas.openxmlformats.org/officeDocument/2006/relationships" xmlns:p="http://schemas.openxmlformats.org/presentationml/2006/main">
+  <p:cSld name="Slide 9">
+    <p:bg>
+      <p:bgPr>
+        <a:solidFill>
+          <a:srgbClr val="FFFFFF"/>
+        </a:solidFill>
+      </p:bgPr>
+    </p:bg>
+    <p:spTree>
+      <p:nvGrpSpPr>
+        <p:cNvPr id="1" name=""/>
+        <p:cNvGrpSpPr/>
+        <p:nvPr/>
+      </p:nvGrpSpPr>
+      <p:grpSpPr>
+        <a:xfrm>
+          <a:off x="0" y="0"/>
+          <a:ext cx="0" cy="0"/>
+          <a:chOff x="0" y="0"/>
+          <a:chExt cx="0" cy="0"/>
+        </a:xfrm>
+      </p:grpSpPr>
+      <p:sp>
+        <p:nvSpPr>
+          <p:cNvPr id="2" name="Text 0"/>
+          <p:cNvSpPr/>
+          <p:nvPr/>
+        </p:nvSpPr>
+        <p:spPr>
+          <a:xfrm>
+            <a:off x="640080" y="640080"/>
+            <a:ext cx="10058400" cy="731520"/>
+          </a:xfrm>
+          <a:prstGeom prst="rect">
+            <a:avLst/>
+          </a:prstGeom>
+          <a:noFill/>
+          <a:ln/>
+        </p:spPr>
+        <p:txBody>
+          <a:bodyPr wrap="square" rtlCol="0" anchor="ctr"/>
+          <a:lstStyle/>
+          <a:p>
+            <a:pPr indent="0" marL="0">
+              <a:buNone/>
+            </a:pPr>
+            <a:r>
+              <a:rPr lang="en-US" sz="3000" b="1" dirty="0">
+                <a:solidFill>
+                  <a:srgbClr val="1A1A1A"/>
+                </a:solidFill>
+                <a:latin typeface="Cambria" pitchFamily="34" charset="0"/>
+                <a:ea typeface="Cambria" pitchFamily="34" charset="-122"/>
+                <a:cs typeface="Cambria" pitchFamily="34" charset="-120"/>
+              </a:rPr>
+              <a:t>Reading &amp; homework</a:t>
+            </a:r>
+            <a:endParaRPr lang="en-US" sz="3000" dirty="0"/>
+          </a:p>
+        </p:txBody>
+      </p:sp>
+      <p:sp>
+        <p:nvSpPr>
+          <p:cNvPr id="3" name="Shape 1"/>
+          <p:cNvSpPr/>
+          <p:nvPr/>
+        </p:nvSpPr>
+        <p:spPr>
+          <a:xfrm>
+            <a:off x="640080" y="1810512"/>
+            <a:ext cx="219456" cy="219456"/>
+          </a:xfrm>
+          <a:prstGeom prst="ellipse">
+            <a:avLst/>
+          </a:prstGeom>
+          <a:solidFill>
+            <a:srgbClr val="7A3B2E"/>
+          </a:solidFill>
+          <a:ln/>
+        </p:spPr>
+      </p:sp>
+      <p:sp>
+        <p:nvSpPr>
+          <p:cNvPr id="4" name="Text 2"/>
+          <p:cNvSpPr/>
+          <p:nvPr/>
+        </p:nvSpPr>
+        <p:spPr>
+          <a:xfrm>
+            <a:off x="1051560" y="1737360"/>
+            <a:ext cx="10424160" cy="365760"/>
+          </a:xfrm>
+          <a:prstGeom prst="rect">
+            <a:avLst/>
+          </a:prstGeom>
+          <a:noFill/>
+          <a:ln/>
+        </p:spPr>
+        <p:txBody>
+          <a:bodyPr wrap="square" rtlCol="0" anchor="ctr"/>
+          <a:lstStyle/>
+          <a:p>
+            <a:pPr indent="0" marL="0">
+              <a:buNone/>
+            </a:pPr>
+            <a:r>
+              <a:rPr lang="en-US" sz="1500" b="1" dirty="0">
+                <a:solidFill>
+                  <a:srgbClr val="7A3B2E"/>
+                </a:solidFill>
+                <a:latin typeface="Calibri" pitchFamily="34" charset="0"/>
+                <a:ea typeface="Calibri" pitchFamily="34" charset="-122"/>
+                <a:cs typeface="Calibri" pitchFamily="34" charset="-120"/>
+              </a:rPr>
+              <a:t>Reading</a:t>
+            </a:r>
+            <a:endParaRPr lang="en-US" sz="1500" dirty="0"/>
+          </a:p>
+        </p:txBody>
+      </p:sp>
+      <p:sp>
+        <p:nvSpPr>
+          <p:cNvPr id="5" name="Text 3"/>
+          <p:cNvSpPr/>
+          <p:nvPr/>
+        </p:nvSpPr>
+        <p:spPr>
+          <a:xfrm>
+            <a:off x="1051560" y="2121408"/>
+            <a:ext cx="10424160" cy="731520"/>
           </a:xfrm>
           <a:prstGeom prst="rect">
             <a:avLst/>
@@ -4397,80 +5850,238 @@
           <a:lstStyle/>
           <a:p>
             <a:pPr indent="0" marL="0">
-              <a:lnSpc>
-                <a:spcPct val="115000"/>
-              </a:lnSpc>
-              <a:buNone/>
-            </a:pPr>
-            <a:r>
-              <a:rPr lang="en-US" sz="2600" dirty="0">
-                <a:solidFill>
-                  <a:srgbClr val="FFFFFF"/>
-                </a:solidFill>
-                <a:latin typeface="Cambria" pitchFamily="34" charset="0"/>
-                <a:ea typeface="Cambria" pitchFamily="34" charset="-122"/>
-                <a:cs typeface="Cambria" pitchFamily="34" charset="-120"/>
-              </a:rPr>
-              <a:t>The oral walkthrough (the capstone): how you got your headline result, what it does not show, and how the tools actually work. Plus the workbench intro. (All eight competencies.)</a:t>
-            </a:r>
-            <a:endParaRPr lang="en-US" sz="2600" dirty="0"/>
-          </a:p>
-        </p:txBody>
-      </p:sp>
-      <p:sp>
-        <p:nvSpPr>
-          <p:cNvPr id="4" name="Text 2"/>
-          <p:cNvSpPr/>
-          <p:nvPr/>
-        </p:nvSpPr>
-        <p:spPr>
-          <a:xfrm>
-            <a:off x="640080" y="6126480"/>
-            <a:ext cx="7315200" cy="365760"/>
-          </a:xfrm>
-          <a:prstGeom prst="rect">
-            <a:avLst/>
-          </a:prstGeom>
-          <a:noFill/>
-          <a:ln/>
-        </p:spPr>
-        <p:txBody>
-          <a:bodyPr wrap="square" rtlCol="0" anchor="ctr"/>
-          <a:lstStyle/>
-          <a:p>
-            <a:pPr indent="0" marL="0">
-              <a:buNone/>
-            </a:pPr>
-            <a:r>
-              <a:rPr lang="en-US" sz="1200" dirty="0">
-                <a:solidFill>
-                  <a:srgbClr val="E8DCD6"/>
+              <a:buNone/>
+            </a:pPr>
+            <a:r>
+              <a:rPr lang="en-US" sz="1400" dirty="0">
+                <a:solidFill>
+                  <a:srgbClr val="1A1A1A"/>
                 </a:solidFill>
                 <a:latin typeface="Calibri" pitchFamily="34" charset="0"/>
                 <a:ea typeface="Calibri" pitchFamily="34" charset="-122"/>
                 <a:cs typeface="Calibri" pitchFamily="34" charset="-120"/>
               </a:rPr>
-              <a:t>Culture as Data  ·  Week 10</a:t>
-            </a:r>
-            <a:endParaRPr lang="en-US" sz="1200" dirty="0"/>
-          </a:p>
-        </p:txBody>
-      </p:sp>
-      <p:sp>
-        <p:nvSpPr>
-          <p:cNvPr id="5" name="Shape 3"/>
-          <p:cNvSpPr/>
-          <p:nvPr/>
-        </p:nvSpPr>
-        <p:spPr>
-          <a:xfrm>
-            <a:off x="11052898" y="6107659"/>
-            <a:ext cx="96631" cy="96631"/>
+              <a:t>None</a:t>
+            </a:r>
+            <a:endParaRPr lang="en-US" sz="1400" dirty="0"/>
+          </a:p>
+        </p:txBody>
+      </p:sp>
+      <p:sp>
+        <p:nvSpPr>
+          <p:cNvPr id="6" name="Shape 4"/>
+          <p:cNvSpPr/>
+          <p:nvPr/>
+        </p:nvSpPr>
+        <p:spPr>
+          <a:xfrm>
+            <a:off x="640080" y="2953512"/>
+            <a:ext cx="219456" cy="219456"/>
           </a:xfrm>
           <a:prstGeom prst="ellipse">
             <a:avLst/>
           </a:prstGeom>
           <a:solidFill>
+            <a:srgbClr val="3F6F5F"/>
+          </a:solidFill>
+          <a:ln/>
+        </p:spPr>
+      </p:sp>
+      <p:sp>
+        <p:nvSpPr>
+          <p:cNvPr id="7" name="Text 5"/>
+          <p:cNvSpPr/>
+          <p:nvPr/>
+        </p:nvSpPr>
+        <p:spPr>
+          <a:xfrm>
+            <a:off x="1051560" y="2880360"/>
+            <a:ext cx="10424160" cy="365760"/>
+          </a:xfrm>
+          <a:prstGeom prst="rect">
+            <a:avLst/>
+          </a:prstGeom>
+          <a:noFill/>
+          <a:ln/>
+        </p:spPr>
+        <p:txBody>
+          <a:bodyPr wrap="square" rtlCol="0" anchor="ctr"/>
+          <a:lstStyle/>
+          <a:p>
+            <a:pPr indent="0" marL="0">
+              <a:buNone/>
+            </a:pPr>
+            <a:r>
+              <a:rPr lang="en-US" sz="1500" b="1" dirty="0">
+                <a:solidFill>
+                  <a:srgbClr val="3F6F5F"/>
+                </a:solidFill>
+                <a:latin typeface="Calibri" pitchFamily="34" charset="0"/>
+                <a:ea typeface="Calibri" pitchFamily="34" charset="-122"/>
+                <a:cs typeface="Calibri" pitchFamily="34" charset="-120"/>
+              </a:rPr>
+              <a:t>Supplement</a:t>
+            </a:r>
+            <a:endParaRPr lang="en-US" sz="1500" dirty="0"/>
+          </a:p>
+        </p:txBody>
+      </p:sp>
+      <p:sp>
+        <p:nvSpPr>
+          <p:cNvPr id="8" name="Text 6"/>
+          <p:cNvSpPr/>
+          <p:nvPr/>
+        </p:nvSpPr>
+        <p:spPr>
+          <a:xfrm>
+            <a:off x="1051560" y="3264408"/>
+            <a:ext cx="10424160" cy="731520"/>
+          </a:xfrm>
+          <a:prstGeom prst="rect">
+            <a:avLst/>
+          </a:prstGeom>
+          <a:noFill/>
+          <a:ln/>
+        </p:spPr>
+        <p:txBody>
+          <a:bodyPr wrap="square" rtlCol="0" anchor="t">
+            <a:spAutoFit/>
+          </a:bodyPr>
+          <a:lstStyle/>
+          <a:p>
+            <a:pPr indent="0" marL="0">
+              <a:buNone/>
+            </a:pPr>
+            <a:r>
+              <a:rPr lang="en-US" sz="1400" dirty="0">
+                <a:solidFill>
+                  <a:srgbClr val="1A1A1A"/>
+                </a:solidFill>
+                <a:latin typeface="Calibri" pitchFamily="34" charset="0"/>
+                <a:ea typeface="Calibri" pitchFamily="34" charset="-122"/>
+                <a:cs typeface="Calibri" pitchFamily="34" charset="-120"/>
+              </a:rPr>
+              <a:t>Edmond de Belamy; Ridler's Mosaic Virus; Anadol's Unsupervised</a:t>
+            </a:r>
+            <a:endParaRPr lang="en-US" sz="1400" dirty="0"/>
+          </a:p>
+        </p:txBody>
+      </p:sp>
+      <p:sp>
+        <p:nvSpPr>
+          <p:cNvPr id="9" name="Shape 7"/>
+          <p:cNvSpPr/>
+          <p:nvPr/>
+        </p:nvSpPr>
+        <p:spPr>
+          <a:xfrm>
+            <a:off x="640080" y="4096512"/>
+            <a:ext cx="219456" cy="219456"/>
+          </a:xfrm>
+          <a:prstGeom prst="ellipse">
+            <a:avLst/>
+          </a:prstGeom>
+          <a:solidFill>
+            <a:srgbClr val="B9852F"/>
+          </a:solidFill>
+          <a:ln/>
+        </p:spPr>
+      </p:sp>
+      <p:sp>
+        <p:nvSpPr>
+          <p:cNvPr id="10" name="Text 8"/>
+          <p:cNvSpPr/>
+          <p:nvPr/>
+        </p:nvSpPr>
+        <p:spPr>
+          <a:xfrm>
+            <a:off x="1051560" y="4023360"/>
+            <a:ext cx="10424160" cy="365760"/>
+          </a:xfrm>
+          <a:prstGeom prst="rect">
+            <a:avLst/>
+          </a:prstGeom>
+          <a:noFill/>
+          <a:ln/>
+        </p:spPr>
+        <p:txBody>
+          <a:bodyPr wrap="square" rtlCol="0" anchor="ctr"/>
+          <a:lstStyle/>
+          <a:p>
+            <a:pPr indent="0" marL="0">
+              <a:buNone/>
+            </a:pPr>
+            <a:r>
+              <a:rPr lang="en-US" sz="1500" b="1" dirty="0">
+                <a:solidFill>
+                  <a:srgbClr val="B9852F"/>
+                </a:solidFill>
+                <a:latin typeface="Calibri" pitchFamily="34" charset="0"/>
+                <a:ea typeface="Calibri" pitchFamily="34" charset="-122"/>
+                <a:cs typeface="Calibri" pitchFamily="34" charset="-120"/>
+              </a:rPr>
+              <a:t>Sketch</a:t>
+            </a:r>
+            <a:endParaRPr lang="en-US" sz="1500" dirty="0"/>
+          </a:p>
+        </p:txBody>
+      </p:sp>
+      <p:sp>
+        <p:nvSpPr>
+          <p:cNvPr id="11" name="Text 9"/>
+          <p:cNvSpPr/>
+          <p:nvPr/>
+        </p:nvSpPr>
+        <p:spPr>
+          <a:xfrm>
+            <a:off x="1051560" y="4407408"/>
+            <a:ext cx="10424160" cy="731520"/>
+          </a:xfrm>
+          <a:prstGeom prst="rect">
+            <a:avLst/>
+          </a:prstGeom>
+          <a:noFill/>
+          <a:ln/>
+        </p:spPr>
+        <p:txBody>
+          <a:bodyPr wrap="square" rtlCol="0" anchor="t">
+            <a:spAutoFit/>
+          </a:bodyPr>
+          <a:lstStyle/>
+          <a:p>
+            <a:pPr indent="0" marL="0">
+              <a:buNone/>
+            </a:pPr>
+            <a:r>
+              <a:rPr lang="en-US" sz="1400" dirty="0">
+                <a:solidFill>
+                  <a:srgbClr val="1A1A1A"/>
+                </a:solidFill>
+                <a:latin typeface="Calibri" pitchFamily="34" charset="0"/>
+                <a:ea typeface="Calibri" pitchFamily="34" charset="-122"/>
+                <a:cs typeface="Calibri" pitchFamily="34" charset="-120"/>
+              </a:rPr>
+              <a:t>Within a week after: a private one-page reflection.</a:t>
+            </a:r>
+            <a:endParaRPr lang="en-US" sz="1400" dirty="0"/>
+          </a:p>
+        </p:txBody>
+      </p:sp>
+      <p:sp>
+        <p:nvSpPr>
+          <p:cNvPr id="12" name="Shape 10"/>
+          <p:cNvSpPr/>
+          <p:nvPr/>
+        </p:nvSpPr>
+        <p:spPr>
+          <a:xfrm>
+            <a:off x="640080" y="5239512"/>
+            <a:ext cx="219456" cy="219456"/>
+          </a:xfrm>
+          <a:prstGeom prst="ellipse">
+            <a:avLst/>
+          </a:prstGeom>
+          <a:solidFill>
             <a:srgbClr val="7A3B2E"/>
           </a:solidFill>
           <a:ln/>
@@ -4478,263 +6089,83 @@
       </p:sp>
       <p:sp>
         <p:nvSpPr>
-          <p:cNvPr id="6" name="Shape 4"/>
-          <p:cNvSpPr/>
-          <p:nvPr/>
-        </p:nvSpPr>
-        <p:spPr>
-          <a:xfrm>
-            <a:off x="9224752" y="5766644"/>
-            <a:ext cx="61944" cy="61944"/>
-          </a:xfrm>
-          <a:prstGeom prst="ellipse">
-            <a:avLst/>
-          </a:prstGeom>
-          <a:solidFill>
-            <a:srgbClr val="3F6F5F"/>
-          </a:solidFill>
-          <a:ln/>
-        </p:spPr>
-      </p:sp>
-      <p:sp>
-        <p:nvSpPr>
-          <p:cNvPr id="7" name="Shape 5"/>
-          <p:cNvSpPr/>
-          <p:nvPr/>
-        </p:nvSpPr>
-        <p:spPr>
-          <a:xfrm>
-            <a:off x="10591079" y="4939008"/>
-            <a:ext cx="74374" cy="74374"/>
-          </a:xfrm>
-          <a:prstGeom prst="ellipse">
-            <a:avLst/>
-          </a:prstGeom>
-          <a:solidFill>
-            <a:srgbClr val="B9852F"/>
-          </a:solidFill>
-          <a:ln/>
-        </p:spPr>
-      </p:sp>
-      <p:sp>
-        <p:nvSpPr>
-          <p:cNvPr id="8" name="Shape 6"/>
-          <p:cNvSpPr/>
-          <p:nvPr/>
-        </p:nvSpPr>
-        <p:spPr>
-          <a:xfrm>
-            <a:off x="11098039" y="6086009"/>
-            <a:ext cx="47052" cy="47052"/>
-          </a:xfrm>
-          <a:prstGeom prst="ellipse">
-            <a:avLst/>
-          </a:prstGeom>
-          <a:solidFill>
-            <a:srgbClr val="7A3B2E"/>
-          </a:solidFill>
-          <a:ln/>
-        </p:spPr>
-      </p:sp>
-      <p:sp>
-        <p:nvSpPr>
-          <p:cNvPr id="9" name="Shape 7"/>
-          <p:cNvSpPr/>
-          <p:nvPr/>
-        </p:nvSpPr>
-        <p:spPr>
-          <a:xfrm>
-            <a:off x="9252113" y="4719469"/>
-            <a:ext cx="57704" cy="57704"/>
-          </a:xfrm>
-          <a:prstGeom prst="ellipse">
-            <a:avLst/>
-          </a:prstGeom>
-          <a:solidFill>
-            <a:srgbClr val="3F6F5F"/>
-          </a:solidFill>
-          <a:ln/>
-        </p:spPr>
-      </p:sp>
-      <p:sp>
-        <p:nvSpPr>
-          <p:cNvPr id="10" name="Shape 8"/>
-          <p:cNvSpPr/>
-          <p:nvPr/>
-        </p:nvSpPr>
-        <p:spPr>
-          <a:xfrm>
-            <a:off x="11240740" y="5038008"/>
-            <a:ext cx="74325" cy="74325"/>
-          </a:xfrm>
-          <a:prstGeom prst="ellipse">
-            <a:avLst/>
-          </a:prstGeom>
-          <a:solidFill>
-            <a:srgbClr val="B9852F"/>
-          </a:solidFill>
-          <a:ln/>
-        </p:spPr>
-      </p:sp>
-      <p:sp>
-        <p:nvSpPr>
-          <p:cNvPr id="11" name="Shape 9"/>
-          <p:cNvSpPr/>
-          <p:nvPr/>
-        </p:nvSpPr>
-        <p:spPr>
-          <a:xfrm>
-            <a:off x="10449761" y="6028164"/>
-            <a:ext cx="64911" cy="64911"/>
-          </a:xfrm>
-          <a:prstGeom prst="ellipse">
-            <a:avLst/>
-          </a:prstGeom>
-          <a:solidFill>
-            <a:srgbClr val="7A3B2E"/>
-          </a:solidFill>
-          <a:ln/>
-        </p:spPr>
-      </p:sp>
-      <p:sp>
-        <p:nvSpPr>
-          <p:cNvPr id="12" name="Shape 10"/>
-          <p:cNvSpPr/>
-          <p:nvPr/>
-        </p:nvSpPr>
-        <p:spPr>
-          <a:xfrm>
-            <a:off x="10506295" y="4939119"/>
-            <a:ext cx="52321" cy="52321"/>
-          </a:xfrm>
-          <a:prstGeom prst="ellipse">
-            <a:avLst/>
-          </a:prstGeom>
-          <a:solidFill>
-            <a:srgbClr val="3F6F5F"/>
-          </a:solidFill>
-          <a:ln/>
-        </p:spPr>
-      </p:sp>
-      <p:sp>
-        <p:nvSpPr>
-          <p:cNvPr id="13" name="Shape 11"/>
-          <p:cNvSpPr/>
-          <p:nvPr/>
-        </p:nvSpPr>
-        <p:spPr>
-          <a:xfrm>
-            <a:off x="9916822" y="5969493"/>
-            <a:ext cx="59417" cy="59417"/>
-          </a:xfrm>
-          <a:prstGeom prst="ellipse">
-            <a:avLst/>
-          </a:prstGeom>
-          <a:solidFill>
-            <a:srgbClr val="B9852F"/>
-          </a:solidFill>
-          <a:ln/>
-        </p:spPr>
-      </p:sp>
-      <p:sp>
-        <p:nvSpPr>
-          <p:cNvPr id="14" name="Shape 12"/>
-          <p:cNvSpPr/>
-          <p:nvPr/>
-        </p:nvSpPr>
-        <p:spPr>
-          <a:xfrm>
-            <a:off x="9748142" y="4631104"/>
-            <a:ext cx="54194" cy="54194"/>
-          </a:xfrm>
-          <a:prstGeom prst="ellipse">
-            <a:avLst/>
-          </a:prstGeom>
-          <a:solidFill>
-            <a:srgbClr val="7A3B2E"/>
-          </a:solidFill>
-          <a:ln/>
-        </p:spPr>
-      </p:sp>
-      <p:sp>
-        <p:nvSpPr>
-          <p:cNvPr id="15" name="Shape 13"/>
-          <p:cNvSpPr/>
-          <p:nvPr/>
-        </p:nvSpPr>
-        <p:spPr>
-          <a:xfrm>
-            <a:off x="11067056" y="5122574"/>
-            <a:ext cx="59512" cy="59512"/>
-          </a:xfrm>
-          <a:prstGeom prst="ellipse">
-            <a:avLst/>
-          </a:prstGeom>
-          <a:solidFill>
-            <a:srgbClr val="3F6F5F"/>
-          </a:solidFill>
-          <a:ln/>
-        </p:spPr>
-      </p:sp>
-      <p:sp>
-        <p:nvSpPr>
-          <p:cNvPr id="16" name="Shape 14"/>
-          <p:cNvSpPr/>
-          <p:nvPr/>
-        </p:nvSpPr>
-        <p:spPr>
-          <a:xfrm>
-            <a:off x="9819723" y="4693083"/>
-            <a:ext cx="98231" cy="98231"/>
-          </a:xfrm>
-          <a:prstGeom prst="ellipse">
-            <a:avLst/>
-          </a:prstGeom>
-          <a:solidFill>
-            <a:srgbClr val="B9852F"/>
-          </a:solidFill>
-          <a:ln/>
-        </p:spPr>
-      </p:sp>
-      <p:sp>
-        <p:nvSpPr>
-          <p:cNvPr id="17" name="Shape 15"/>
-          <p:cNvSpPr/>
-          <p:nvPr/>
-        </p:nvSpPr>
-        <p:spPr>
-          <a:xfrm>
-            <a:off x="9633264" y="5803889"/>
-            <a:ext cx="83482" cy="83482"/>
-          </a:xfrm>
-          <a:prstGeom prst="ellipse">
-            <a:avLst/>
-          </a:prstGeom>
-          <a:solidFill>
-            <a:srgbClr val="7A3B2E"/>
-          </a:solidFill>
-          <a:ln/>
-        </p:spPr>
-      </p:sp>
-      <p:sp>
-        <p:nvSpPr>
-          <p:cNvPr id="18" name="Shape 16"/>
-          <p:cNvSpPr/>
-          <p:nvPr/>
-        </p:nvSpPr>
-        <p:spPr>
-          <a:xfrm>
-            <a:off x="11574477" y="5704174"/>
-            <a:ext cx="92991" cy="92991"/>
-          </a:xfrm>
-          <a:prstGeom prst="ellipse">
-            <a:avLst/>
-          </a:prstGeom>
-          <a:solidFill>
-            <a:srgbClr val="3F6F5F"/>
-          </a:solidFill>
-          <a:ln/>
-        </p:spPr>
+          <p:cNvPr id="13" name="Text 11"/>
+          <p:cNvSpPr/>
+          <p:nvPr/>
+        </p:nvSpPr>
+        <p:spPr>
+          <a:xfrm>
+            <a:off x="1051560" y="5166360"/>
+            <a:ext cx="10424160" cy="365760"/>
+          </a:xfrm>
+          <a:prstGeom prst="rect">
+            <a:avLst/>
+          </a:prstGeom>
+          <a:noFill/>
+          <a:ln/>
+        </p:spPr>
+        <p:txBody>
+          <a:bodyPr wrap="square" rtlCol="0" anchor="ctr"/>
+          <a:lstStyle/>
+          <a:p>
+            <a:pPr indent="0" marL="0">
+              <a:buNone/>
+            </a:pPr>
+            <a:r>
+              <a:rPr lang="en-US" sz="1500" b="1" dirty="0">
+                <a:solidFill>
+                  <a:srgbClr val="7A3B2E"/>
+                </a:solidFill>
+                <a:latin typeface="Calibri" pitchFamily="34" charset="0"/>
+                <a:ea typeface="Calibri" pitchFamily="34" charset="-122"/>
+                <a:cs typeface="Calibri" pitchFamily="34" charset="-120"/>
+              </a:rPr>
+              <a:t>Check (AI closed)</a:t>
+            </a:r>
+            <a:endParaRPr lang="en-US" sz="1500" dirty="0"/>
+          </a:p>
+        </p:txBody>
+      </p:sp>
+      <p:sp>
+        <p:nvSpPr>
+          <p:cNvPr id="14" name="Text 12"/>
+          <p:cNvSpPr/>
+          <p:nvPr/>
+        </p:nvSpPr>
+        <p:spPr>
+          <a:xfrm>
+            <a:off x="1051560" y="5550408"/>
+            <a:ext cx="10424160" cy="731520"/>
+          </a:xfrm>
+          <a:prstGeom prst="rect">
+            <a:avLst/>
+          </a:prstGeom>
+          <a:noFill/>
+          <a:ln/>
+        </p:spPr>
+        <p:txBody>
+          <a:bodyPr wrap="square" rtlCol="0" anchor="t">
+            <a:spAutoFit/>
+          </a:bodyPr>
+          <a:lstStyle/>
+          <a:p>
+            <a:pPr indent="0" marL="0">
+              <a:buNone/>
+            </a:pPr>
+            <a:r>
+              <a:rPr lang="en-US" sz="1400" dirty="0">
+                <a:solidFill>
+                  <a:srgbClr val="1A1A1A"/>
+                </a:solidFill>
+                <a:latin typeface="Calibri" pitchFamily="34" charset="0"/>
+                <a:ea typeface="Calibri" pitchFamily="34" charset="-122"/>
+                <a:cs typeface="Calibri" pitchFamily="34" charset="-120"/>
+              </a:rPr>
+              <a:t>The oral walkthrough (the capstone): how you got your headline result, what it does not show, and how the tools actually work. Plus the workbench intro. (All eight competencies.)</a:t>
+            </a:r>
+            <a:endParaRPr lang="en-US" sz="1400" dirty="0"/>
+          </a:p>
+        </p:txBody>
       </p:sp>
     </p:spTree>
   </p:cSld>

--- a/slides/pptx/week-10.pptx
+++ b/slides/pptx/week-10.pptx
@@ -3755,7 +3755,7 @@
                 <a:ea typeface="Calibri" pitchFamily="34" charset="-122"/>
                 <a:cs typeface="Calibri" pitchFamily="34" charset="-120"/>
               </a:rPr>
-              <a:t>WEEK 10 · THE MATERIAL</a:t>
+              <a:t>WEEK 10 · KEY POINTS</a:t>
             </a:r>
             <a:endParaRPr lang="en-US" sz="1200" dirty="0"/>
           </a:p>
@@ -4079,7 +4079,7 @@
                 <a:ea typeface="Calibri" pitchFamily="34" charset="-122"/>
                 <a:cs typeface="Calibri" pitchFamily="34" charset="-120"/>
               </a:rPr>
-              <a:t>WEEK 10 · THE MATERIAL</a:t>
+              <a:t>WEEK 10 · KEY POINTS</a:t>
             </a:r>
             <a:endParaRPr lang="en-US" sz="1200" dirty="0"/>
           </a:p>
@@ -4467,7 +4467,7 @@
                 <a:ea typeface="Calibri" pitchFamily="34" charset="-122"/>
                 <a:cs typeface="Calibri" pitchFamily="34" charset="-120"/>
               </a:rPr>
-              <a:t>WEEK 10 · THE MATERIAL</a:t>
+              <a:t>WEEK 10 · KEY POINTS</a:t>
             </a:r>
             <a:endParaRPr lang="en-US" sz="1200" dirty="0"/>
           </a:p>

--- a/slides/pptx/week-10.pptx
+++ b/slides/pptx/week-10.pptx
@@ -1919,7 +1919,7 @@
                 <a:ea typeface="Calibri" pitchFamily="34" charset="-122"/>
                 <a:cs typeface="Calibri" pitchFamily="34" charset="-120"/>
               </a:rPr>
-              <a:t>A 90-minute public event followed by a reception. Snacks. Music. Friends and family invited. Printed program with everyone's titles and URLs.</a:t>
+              <a:t>A 90-minute public event followed by a reception, with friends and family invited. A printed program lists every project's title and URL.</a:t>
             </a:r>
             <a:endParaRPr lang="en-US" sz="1600" dirty="0"/>
           </a:p>
@@ -4120,7 +4120,7 @@
                 <a:ea typeface="Cambria" pitchFamily="34" charset="-122"/>
                 <a:cs typeface="Cambria" pitchFamily="34" charset="-120"/>
               </a:rPr>
-              <a:t>The send-off triptych</a:t>
+              <a:t>The closing triptych</a:t>
             </a:r>
             <a:endParaRPr lang="en-US" sz="3000" dirty="0"/>
           </a:p>
@@ -4376,7 +4376,7 @@
                 <a:ea typeface="Calibri" pitchFamily="34" charset="-122"/>
                 <a:cs typeface="Calibri" pitchFamily="34" charset="-120"/>
               </a:rPr>
-              <a:t>You spent Week 1 loading a museum's catalog. You end watching a catalog become the art.</a:t>
+              <a:t>Week 1 began with loading a museum's catalog. The course ends watching a catalog become the art.</a:t>
             </a:r>
             <a:endParaRPr lang="en-US" sz="1650" dirty="0"/>
           </a:p>
@@ -5486,7 +5486,7 @@
                 <a:ea typeface="Calibri" pitchFamily="34" charset="-122"/>
                 <a:cs typeface="Calibri" pitchFamily="34" charset="-120"/>
               </a:rPr>
-              <a:t>Welcome. This is a show, not a defense. The closing Look at This.</a:t>
+              <a:t>Welcome. This is a celebration, not a defense. The closing Look at This.</a:t>
             </a:r>
             <a:endParaRPr lang="en-US" sz="1250" dirty="0"/>
           </a:p>

--- a/slides/pptx/week-10.pptx
+++ b/slides/pptx/week-10.pptx
@@ -5775,7 +5775,7 @@
         </p:nvSpPr>
         <p:spPr>
           <a:xfrm>
-            <a:off x="640080" y="1810512"/>
+            <a:off x="640080" y="1673352"/>
             <a:ext cx="219456" cy="219456"/>
           </a:xfrm>
           <a:prstGeom prst="ellipse">
@@ -5795,7 +5795,7 @@
         </p:nvSpPr>
         <p:spPr>
           <a:xfrm>
-            <a:off x="1051560" y="1737360"/>
+            <a:off x="1051560" y="1600200"/>
             <a:ext cx="10424160" cy="365760"/>
           </a:xfrm>
           <a:prstGeom prst="rect">
@@ -5834,7 +5834,7 @@
         </p:nvSpPr>
         <p:spPr>
           <a:xfrm>
-            <a:off x="1051560" y="2121408"/>
+            <a:off x="1051560" y="1984248"/>
             <a:ext cx="10424160" cy="731520"/>
           </a:xfrm>
           <a:prstGeom prst="rect">
@@ -5875,7 +5875,7 @@
         </p:nvSpPr>
         <p:spPr>
           <a:xfrm>
-            <a:off x="640080" y="2953512"/>
+            <a:off x="640080" y="2633472"/>
             <a:ext cx="219456" cy="219456"/>
           </a:xfrm>
           <a:prstGeom prst="ellipse">
@@ -5895,7 +5895,7 @@
         </p:nvSpPr>
         <p:spPr>
           <a:xfrm>
-            <a:off x="1051560" y="2880360"/>
+            <a:off x="1051560" y="2560320"/>
             <a:ext cx="10424160" cy="365760"/>
           </a:xfrm>
           <a:prstGeom prst="rect">
@@ -5934,7 +5934,7 @@
         </p:nvSpPr>
         <p:spPr>
           <a:xfrm>
-            <a:off x="1051560" y="3264408"/>
+            <a:off x="1051560" y="2944368"/>
             <a:ext cx="10424160" cy="731520"/>
           </a:xfrm>
           <a:prstGeom prst="rect">
@@ -5975,7 +5975,7 @@
         </p:nvSpPr>
         <p:spPr>
           <a:xfrm>
-            <a:off x="640080" y="4096512"/>
+            <a:off x="640080" y="3593592"/>
             <a:ext cx="219456" cy="219456"/>
           </a:xfrm>
           <a:prstGeom prst="ellipse">
@@ -5995,7 +5995,7 @@
         </p:nvSpPr>
         <p:spPr>
           <a:xfrm>
-            <a:off x="1051560" y="4023360"/>
+            <a:off x="1051560" y="3520440"/>
             <a:ext cx="10424160" cy="365760"/>
           </a:xfrm>
           <a:prstGeom prst="rect">
@@ -6020,7 +6020,7 @@
                 <a:ea typeface="Calibri" pitchFamily="34" charset="-122"/>
                 <a:cs typeface="Calibri" pitchFamily="34" charset="-120"/>
               </a:rPr>
-              <a:t>Sketch</a:t>
+              <a:t>Deeper (optional)</a:t>
             </a:r>
             <a:endParaRPr lang="en-US" sz="1500" dirty="0"/>
           </a:p>
@@ -6034,7 +6034,7 @@
         </p:nvSpPr>
         <p:spPr>
           <a:xfrm>
-            <a:off x="1051560" y="4407408"/>
+            <a:off x="1051560" y="3904488"/>
             <a:ext cx="10424160" cy="731520"/>
           </a:xfrm>
           <a:prstGeom prst="rect">
@@ -6061,7 +6061,7 @@
                 <a:ea typeface="Calibri" pitchFamily="34" charset="-122"/>
                 <a:cs typeface="Calibri" pitchFamily="34" charset="-120"/>
               </a:rPr>
-              <a:t>Within a week after: a private one-page reflection.</a:t>
+              <a:t>Elgammal et al., CAN: Creative Adversarial Networks (2017), the paper behind the de Belamy generation of AI art</a:t>
             </a:r>
             <a:endParaRPr lang="en-US" sz="1400" dirty="0"/>
           </a:p>
@@ -6075,14 +6075,14 @@
         </p:nvSpPr>
         <p:spPr>
           <a:xfrm>
-            <a:off x="640080" y="5239512"/>
+            <a:off x="640080" y="4553712"/>
             <a:ext cx="219456" cy="219456"/>
           </a:xfrm>
           <a:prstGeom prst="ellipse">
             <a:avLst/>
           </a:prstGeom>
           <a:solidFill>
-            <a:srgbClr val="7A3B2E"/>
+            <a:srgbClr val="3F6F5F"/>
           </a:solidFill>
           <a:ln/>
         </p:spPr>
@@ -6095,7 +6095,7 @@
         </p:nvSpPr>
         <p:spPr>
           <a:xfrm>
-            <a:off x="1051560" y="5166360"/>
+            <a:off x="1051560" y="4480560"/>
             <a:ext cx="10424160" cy="365760"/>
           </a:xfrm>
           <a:prstGeom prst="rect">
@@ -6114,12 +6114,112 @@
             <a:r>
               <a:rPr lang="en-US" sz="1500" b="1" dirty="0">
                 <a:solidFill>
-                  <a:srgbClr val="7A3B2E"/>
+                  <a:srgbClr val="3F6F5F"/>
                 </a:solidFill>
                 <a:latin typeface="Calibri" pitchFamily="34" charset="0"/>
                 <a:ea typeface="Calibri" pitchFamily="34" charset="-122"/>
                 <a:cs typeface="Calibri" pitchFamily="34" charset="-120"/>
               </a:rPr>
+              <a:t>Sketch</a:t>
+            </a:r>
+            <a:endParaRPr lang="en-US" sz="1500" dirty="0"/>
+          </a:p>
+        </p:txBody>
+      </p:sp>
+      <p:sp>
+        <p:nvSpPr>
+          <p:cNvPr id="14" name="Text 12"/>
+          <p:cNvSpPr/>
+          <p:nvPr/>
+        </p:nvSpPr>
+        <p:spPr>
+          <a:xfrm>
+            <a:off x="1051560" y="4864608"/>
+            <a:ext cx="10424160" cy="731520"/>
+          </a:xfrm>
+          <a:prstGeom prst="rect">
+            <a:avLst/>
+          </a:prstGeom>
+          <a:noFill/>
+          <a:ln/>
+        </p:spPr>
+        <p:txBody>
+          <a:bodyPr wrap="square" rtlCol="0" anchor="t">
+            <a:spAutoFit/>
+          </a:bodyPr>
+          <a:lstStyle/>
+          <a:p>
+            <a:pPr indent="0" marL="0">
+              <a:buNone/>
+            </a:pPr>
+            <a:r>
+              <a:rPr lang="en-US" sz="1400" dirty="0">
+                <a:solidFill>
+                  <a:srgbClr val="1A1A1A"/>
+                </a:solidFill>
+                <a:latin typeface="Calibri" pitchFamily="34" charset="0"/>
+                <a:ea typeface="Calibri" pitchFamily="34" charset="-122"/>
+                <a:cs typeface="Calibri" pitchFamily="34" charset="-120"/>
+              </a:rPr>
+              <a:t>Within a week after: a private one-page reflection.</a:t>
+            </a:r>
+            <a:endParaRPr lang="en-US" sz="1400" dirty="0"/>
+          </a:p>
+        </p:txBody>
+      </p:sp>
+      <p:sp>
+        <p:nvSpPr>
+          <p:cNvPr id="15" name="Shape 13"/>
+          <p:cNvSpPr/>
+          <p:nvPr/>
+        </p:nvSpPr>
+        <p:spPr>
+          <a:xfrm>
+            <a:off x="640080" y="5513832"/>
+            <a:ext cx="219456" cy="219456"/>
+          </a:xfrm>
+          <a:prstGeom prst="ellipse">
+            <a:avLst/>
+          </a:prstGeom>
+          <a:solidFill>
+            <a:srgbClr val="7A3B2E"/>
+          </a:solidFill>
+          <a:ln/>
+        </p:spPr>
+      </p:sp>
+      <p:sp>
+        <p:nvSpPr>
+          <p:cNvPr id="16" name="Text 14"/>
+          <p:cNvSpPr/>
+          <p:nvPr/>
+        </p:nvSpPr>
+        <p:spPr>
+          <a:xfrm>
+            <a:off x="1051560" y="5440680"/>
+            <a:ext cx="10424160" cy="365760"/>
+          </a:xfrm>
+          <a:prstGeom prst="rect">
+            <a:avLst/>
+          </a:prstGeom>
+          <a:noFill/>
+          <a:ln/>
+        </p:spPr>
+        <p:txBody>
+          <a:bodyPr wrap="square" rtlCol="0" anchor="ctr"/>
+          <a:lstStyle/>
+          <a:p>
+            <a:pPr indent="0" marL="0">
+              <a:buNone/>
+            </a:pPr>
+            <a:r>
+              <a:rPr lang="en-US" sz="1500" b="1" dirty="0">
+                <a:solidFill>
+                  <a:srgbClr val="7A3B2E"/>
+                </a:solidFill>
+                <a:latin typeface="Calibri" pitchFamily="34" charset="0"/>
+                <a:ea typeface="Calibri" pitchFamily="34" charset="-122"/>
+                <a:cs typeface="Calibri" pitchFamily="34" charset="-120"/>
+              </a:rPr>
               <a:t>Check (AI closed)</a:t>
             </a:r>
             <a:endParaRPr lang="en-US" sz="1500" dirty="0"/>
@@ -6128,13 +6228,13 @@
       </p:sp>
       <p:sp>
         <p:nvSpPr>
-          <p:cNvPr id="14" name="Text 12"/>
-          <p:cNvSpPr/>
-          <p:nvPr/>
-        </p:nvSpPr>
-        <p:spPr>
-          <a:xfrm>
-            <a:off x="1051560" y="5550408"/>
+          <p:cNvPr id="17" name="Text 15"/>
+          <p:cNvSpPr/>
+          <p:nvPr/>
+        </p:nvSpPr>
+        <p:spPr>
+          <a:xfrm>
+            <a:off x="1051560" y="5824728"/>
             <a:ext cx="10424160" cy="731520"/>
           </a:xfrm>
           <a:prstGeom prst="rect">
